--- a/S1-CL3-Cloud-Infrastructure-Improvement/delivery/topic_08/Topic_08_Slides.pptx
+++ b/S1-CL3-Cloud-Infrastructure-Improvement/delivery/topic_08/Topic_08_Slides.pptx
@@ -3676,7 +3676,7 @@
           <a:noFill/>
         </p:spPr>
         <p:txBody>
-          <a:bodyPr wrap="square" anchor="t" lIns="0" rIns="0" tIns="0" bIns="0">
+          <a:bodyPr wrap="square" anchor="ctr" lIns="0" rIns="0" tIns="0" bIns="0">
             <a:spAutoFit/>
           </a:bodyPr>
           <a:lstStyle/>
@@ -3693,7 +3693,7 @@
               </a:spcAft>
             </a:pPr>
             <a:r>
-              <a:rPr sz="1800" b="1" i="0">
+              <a:rPr sz="2400" b="1" i="0">
                 <a:solidFill>
                   <a:srgbClr val="EDAB0C"/>
                 </a:solidFill>
@@ -3702,7 +3702,7 @@
               <a:t>■  </a:t>
             </a:r>
             <a:r>
-              <a:rPr sz="1800" b="0" i="0">
+              <a:rPr sz="2400" b="0" i="0">
                 <a:solidFill>
                   <a:srgbClr val="2A2929"/>
                 </a:solidFill>
@@ -3724,7 +3724,7 @@
               </a:spcAft>
             </a:pPr>
             <a:r>
-              <a:rPr sz="1800" b="1" i="0">
+              <a:rPr sz="2400" b="1" i="0">
                 <a:solidFill>
                   <a:srgbClr val="EDAB0C"/>
                 </a:solidFill>
@@ -3733,7 +3733,7 @@
               <a:t>■  </a:t>
             </a:r>
             <a:r>
-              <a:rPr sz="1800" b="0" i="0">
+              <a:rPr sz="2400" b="0" i="0">
                 <a:solidFill>
                   <a:srgbClr val="2A2929"/>
                 </a:solidFill>
@@ -3755,7 +3755,7 @@
               </a:spcAft>
             </a:pPr>
             <a:r>
-              <a:rPr sz="1800" b="1" i="0">
+              <a:rPr sz="2400" b="1" i="0">
                 <a:solidFill>
                   <a:srgbClr val="EDAB0C"/>
                 </a:solidFill>
@@ -3764,7 +3764,7 @@
               <a:t>■  </a:t>
             </a:r>
             <a:r>
-              <a:rPr sz="1800" b="0" i="0">
+              <a:rPr sz="2400" b="0" i="0">
                 <a:solidFill>
                   <a:srgbClr val="2A2929"/>
                 </a:solidFill>
@@ -4018,7 +4018,7 @@
           <a:noFill/>
         </p:spPr>
         <p:txBody>
-          <a:bodyPr wrap="square" anchor="t" lIns="0" rIns="0" tIns="0" bIns="0">
+          <a:bodyPr wrap="square" anchor="ctr" lIns="0" rIns="0" tIns="0" bIns="0">
             <a:spAutoFit/>
           </a:bodyPr>
           <a:lstStyle/>
@@ -4035,7 +4035,7 @@
               </a:spcAft>
             </a:pPr>
             <a:r>
-              <a:rPr sz="1800" b="1" i="0">
+              <a:rPr sz="2400" b="1" i="0">
                 <a:solidFill>
                   <a:srgbClr val="EDAB0C"/>
                 </a:solidFill>
@@ -4044,7 +4044,7 @@
               <a:t>■  </a:t>
             </a:r>
             <a:r>
-              <a:rPr sz="1800" b="0" i="0">
+              <a:rPr sz="2400" b="0" i="0">
                 <a:solidFill>
                   <a:srgbClr val="2A2929"/>
                 </a:solidFill>
@@ -4066,7 +4066,7 @@
               </a:spcAft>
             </a:pPr>
             <a:r>
-              <a:rPr sz="1800" b="1" i="0">
+              <a:rPr sz="2400" b="1" i="0">
                 <a:solidFill>
                   <a:srgbClr val="EDAB0C"/>
                 </a:solidFill>
@@ -4075,7 +4075,7 @@
               <a:t>■  </a:t>
             </a:r>
             <a:r>
-              <a:rPr sz="1800" b="0" i="0">
+              <a:rPr sz="2400" b="0" i="0">
                 <a:solidFill>
                   <a:srgbClr val="2A2929"/>
                 </a:solidFill>
@@ -4097,7 +4097,7 @@
               </a:spcAft>
             </a:pPr>
             <a:r>
-              <a:rPr sz="1800" b="1" i="0">
+              <a:rPr sz="2400" b="1" i="0">
                 <a:solidFill>
                   <a:srgbClr val="EDAB0C"/>
                 </a:solidFill>
@@ -4106,7 +4106,7 @@
               <a:t>■  </a:t>
             </a:r>
             <a:r>
-              <a:rPr sz="1800" b="0" i="0">
+              <a:rPr sz="2400" b="0" i="0">
                 <a:solidFill>
                   <a:srgbClr val="2A2929"/>
                 </a:solidFill>
@@ -6424,7 +6424,7 @@
           <a:noFill/>
         </p:spPr>
         <p:txBody>
-          <a:bodyPr wrap="square" anchor="t" lIns="0" rIns="0" tIns="0" bIns="0">
+          <a:bodyPr wrap="square" anchor="ctr" lIns="0" rIns="0" tIns="0" bIns="0">
             <a:spAutoFit/>
           </a:bodyPr>
           <a:lstStyle/>
@@ -6441,7 +6441,7 @@
               </a:spcAft>
             </a:pPr>
             <a:r>
-              <a:rPr sz="1800" b="1" i="0">
+              <a:rPr sz="2400" b="1" i="0">
                 <a:solidFill>
                   <a:srgbClr val="EDAB0C"/>
                 </a:solidFill>
@@ -6450,7 +6450,7 @@
               <a:t>■  </a:t>
             </a:r>
             <a:r>
-              <a:rPr sz="1800" b="0" i="0">
+              <a:rPr sz="2400" b="0" i="0">
                 <a:solidFill>
                   <a:srgbClr val="2A2929"/>
                 </a:solidFill>
@@ -6472,7 +6472,7 @@
               </a:spcAft>
             </a:pPr>
             <a:r>
-              <a:rPr sz="1800" b="1" i="0">
+              <a:rPr sz="2400" b="1" i="0">
                 <a:solidFill>
                   <a:srgbClr val="EDAB0C"/>
                 </a:solidFill>
@@ -6481,7 +6481,7 @@
               <a:t>■  </a:t>
             </a:r>
             <a:r>
-              <a:rPr sz="1800" b="0" i="0">
+              <a:rPr sz="2400" b="0" i="0">
                 <a:solidFill>
                   <a:srgbClr val="2A2929"/>
                 </a:solidFill>
@@ -6503,7 +6503,7 @@
               </a:spcAft>
             </a:pPr>
             <a:r>
-              <a:rPr sz="1800" b="1" i="0">
+              <a:rPr sz="2400" b="1" i="0">
                 <a:solidFill>
                   <a:srgbClr val="EDAB0C"/>
                 </a:solidFill>
@@ -6512,7 +6512,7 @@
               <a:t>■  </a:t>
             </a:r>
             <a:r>
-              <a:rPr sz="1800" b="0" i="0">
+              <a:rPr sz="2400" b="0" i="0">
                 <a:solidFill>
                   <a:srgbClr val="2A2929"/>
                 </a:solidFill>
@@ -6766,7 +6766,7 @@
           <a:noFill/>
         </p:spPr>
         <p:txBody>
-          <a:bodyPr wrap="square" anchor="t" lIns="0" rIns="0" tIns="0" bIns="0">
+          <a:bodyPr wrap="square" anchor="ctr" lIns="0" rIns="0" tIns="0" bIns="0">
             <a:spAutoFit/>
           </a:bodyPr>
           <a:lstStyle/>
@@ -6783,7 +6783,7 @@
               </a:spcAft>
             </a:pPr>
             <a:r>
-              <a:rPr sz="1800" b="1" i="0">
+              <a:rPr sz="2400" b="1" i="0">
                 <a:solidFill>
                   <a:srgbClr val="EDAB0C"/>
                 </a:solidFill>
@@ -6792,7 +6792,7 @@
               <a:t>■  </a:t>
             </a:r>
             <a:r>
-              <a:rPr sz="1800" b="0" i="0">
+              <a:rPr sz="2400" b="0" i="0">
                 <a:solidFill>
                   <a:srgbClr val="2A2929"/>
                 </a:solidFill>
@@ -6814,7 +6814,7 @@
               </a:spcAft>
             </a:pPr>
             <a:r>
-              <a:rPr sz="1800" b="1" i="0">
+              <a:rPr sz="2400" b="1" i="0">
                 <a:solidFill>
                   <a:srgbClr val="EDAB0C"/>
                 </a:solidFill>
@@ -6823,7 +6823,7 @@
               <a:t>■  </a:t>
             </a:r>
             <a:r>
-              <a:rPr sz="1800" b="0" i="0">
+              <a:rPr sz="2400" b="0" i="0">
                 <a:solidFill>
                   <a:srgbClr val="2A2929"/>
                 </a:solidFill>
@@ -6845,7 +6845,7 @@
               </a:spcAft>
             </a:pPr>
             <a:r>
-              <a:rPr sz="1800" b="1" i="0">
+              <a:rPr sz="2400" b="1" i="0">
                 <a:solidFill>
                   <a:srgbClr val="EDAB0C"/>
                 </a:solidFill>
@@ -6854,7 +6854,7 @@
               <a:t>■  </a:t>
             </a:r>
             <a:r>
-              <a:rPr sz="1800" b="0" i="0">
+              <a:rPr sz="2400" b="0" i="0">
                 <a:solidFill>
                   <a:srgbClr val="2A2929"/>
                 </a:solidFill>
@@ -7108,7 +7108,7 @@
           <a:noFill/>
         </p:spPr>
         <p:txBody>
-          <a:bodyPr wrap="square" anchor="t" lIns="0" rIns="0" tIns="0" bIns="0">
+          <a:bodyPr wrap="square" anchor="ctr" lIns="0" rIns="0" tIns="0" bIns="0">
             <a:spAutoFit/>
           </a:bodyPr>
           <a:lstStyle/>
@@ -7125,7 +7125,7 @@
               </a:spcAft>
             </a:pPr>
             <a:r>
-              <a:rPr sz="1800" b="1" i="0">
+              <a:rPr sz="2400" b="1" i="0">
                 <a:solidFill>
                   <a:srgbClr val="EDAB0C"/>
                 </a:solidFill>
@@ -7134,7 +7134,7 @@
               <a:t>■  </a:t>
             </a:r>
             <a:r>
-              <a:rPr sz="1800" b="0" i="0">
+              <a:rPr sz="2400" b="0" i="0">
                 <a:solidFill>
                   <a:srgbClr val="2A2929"/>
                 </a:solidFill>
@@ -7156,7 +7156,7 @@
               </a:spcAft>
             </a:pPr>
             <a:r>
-              <a:rPr sz="1800" b="1" i="0">
+              <a:rPr sz="2400" b="1" i="0">
                 <a:solidFill>
                   <a:srgbClr val="EDAB0C"/>
                 </a:solidFill>
@@ -7165,7 +7165,7 @@
               <a:t>■  </a:t>
             </a:r>
             <a:r>
-              <a:rPr sz="1800" b="0" i="0">
+              <a:rPr sz="2400" b="0" i="0">
                 <a:solidFill>
                   <a:srgbClr val="2A2929"/>
                 </a:solidFill>
@@ -7187,7 +7187,7 @@
               </a:spcAft>
             </a:pPr>
             <a:r>
-              <a:rPr sz="1800" b="1" i="0">
+              <a:rPr sz="2400" b="1" i="0">
                 <a:solidFill>
                   <a:srgbClr val="EDAB0C"/>
                 </a:solidFill>
@@ -7196,7 +7196,7 @@
               <a:t>■  </a:t>
             </a:r>
             <a:r>
-              <a:rPr sz="1800" b="0" i="0">
+              <a:rPr sz="2400" b="0" i="0">
                 <a:solidFill>
                   <a:srgbClr val="2A2929"/>
                 </a:solidFill>
@@ -8350,7 +8350,7 @@
           <a:noFill/>
         </p:spPr>
         <p:txBody>
-          <a:bodyPr wrap="square" anchor="t" lIns="0" rIns="0" tIns="0" bIns="0">
+          <a:bodyPr wrap="square" anchor="ctr" lIns="0" rIns="0" tIns="0" bIns="0">
             <a:spAutoFit/>
           </a:bodyPr>
           <a:lstStyle/>
@@ -8367,7 +8367,7 @@
               </a:spcAft>
             </a:pPr>
             <a:r>
-              <a:rPr sz="1800" b="1" i="0">
+              <a:rPr sz="2400" b="1" i="0">
                 <a:solidFill>
                   <a:srgbClr val="EDAB0C"/>
                 </a:solidFill>
@@ -8376,7 +8376,7 @@
               <a:t>■  </a:t>
             </a:r>
             <a:r>
-              <a:rPr sz="1800" b="0" i="0">
+              <a:rPr sz="2400" b="0" i="0">
                 <a:solidFill>
                   <a:srgbClr val="2A2929"/>
                 </a:solidFill>
@@ -8398,7 +8398,7 @@
               </a:spcAft>
             </a:pPr>
             <a:r>
-              <a:rPr sz="1800" b="1" i="0">
+              <a:rPr sz="2400" b="1" i="0">
                 <a:solidFill>
                   <a:srgbClr val="EDAB0C"/>
                 </a:solidFill>
@@ -8407,7 +8407,7 @@
               <a:t>■  </a:t>
             </a:r>
             <a:r>
-              <a:rPr sz="1800" b="0" i="0">
+              <a:rPr sz="2400" b="0" i="0">
                 <a:solidFill>
                   <a:srgbClr val="2A2929"/>
                 </a:solidFill>
@@ -8429,7 +8429,7 @@
               </a:spcAft>
             </a:pPr>
             <a:r>
-              <a:rPr sz="1800" b="1" i="0">
+              <a:rPr sz="2400" b="1" i="0">
                 <a:solidFill>
                   <a:srgbClr val="EDAB0C"/>
                 </a:solidFill>
@@ -8438,7 +8438,7 @@
               <a:t>■  </a:t>
             </a:r>
             <a:r>
-              <a:rPr sz="1800" b="0" i="0">
+              <a:rPr sz="2400" b="0" i="0">
                 <a:solidFill>
                   <a:srgbClr val="2A2929"/>
                 </a:solidFill>

--- a/S1-CL3-Cloud-Infrastructure-Improvement/delivery/topic_08/Topic_08_Slides.pptx
+++ b/S1-CL3-Cloud-Infrastructure-Improvement/delivery/topic_08/Topic_08_Slides.pptx
@@ -7,19 +7,19 @@
   <p:sldIdLst>
     <p:sldId id="256" r:id="rId7"/>
     <p:sldId id="257" r:id="rId8"/>
-    <p:sldId id="258" r:id="rId9"/>
-    <p:sldId id="259" r:id="rId10"/>
-    <p:sldId id="260" r:id="rId11"/>
-    <p:sldId id="261" r:id="rId12"/>
-    <p:sldId id="262" r:id="rId13"/>
-    <p:sldId id="263" r:id="rId14"/>
-    <p:sldId id="264" r:id="rId15"/>
-    <p:sldId id="265" r:id="rId16"/>
-    <p:sldId id="266" r:id="rId17"/>
-    <p:sldId id="267" r:id="rId18"/>
-    <p:sldId id="268" r:id="rId19"/>
-    <p:sldId id="269" r:id="rId20"/>
-    <p:sldId id="270" r:id="rId21"/>
+    <p:sldId id="258" r:id="rId10"/>
+    <p:sldId id="259" r:id="rId11"/>
+    <p:sldId id="260" r:id="rId12"/>
+    <p:sldId id="261" r:id="rId13"/>
+    <p:sldId id="262" r:id="rId14"/>
+    <p:sldId id="263" r:id="rId15"/>
+    <p:sldId id="264" r:id="rId16"/>
+    <p:sldId id="265" r:id="rId17"/>
+    <p:sldId id="266" r:id="rId18"/>
+    <p:sldId id="267" r:id="rId19"/>
+    <p:sldId id="268" r:id="rId20"/>
+    <p:sldId id="269" r:id="rId21"/>
+    <p:sldId id="270" r:id="rId22"/>
   </p:sldIdLst>
   <p:sldSz cx="12191695" cy="6858000" type="screen4x3"/>
   <p:notesSz cx="6858000" cy="9144000"/>
@@ -119,6 +119,1481 @@
     </a:lvl9pPr>
   </p:defaultTextStyle>
 </p:presentation>
+</file>
+
+<file path=ppt/notesMasters/notesMaster1.xml><?xml version="1.0" encoding="utf-8"?>
+<p:notesMaster xmlns:a="http://schemas.openxmlformats.org/drawingml/2006/main" xmlns:p="http://schemas.openxmlformats.org/presentationml/2006/main" xmlns:r="http://schemas.openxmlformats.org/officeDocument/2006/relationships">
+  <p:cSld>
+    <p:bg>
+      <p:bgRef idx="1001">
+        <a:schemeClr val="bg1"/>
+      </p:bgRef>
+    </p:bg>
+    <p:spTree>
+      <p:nvGrpSpPr>
+        <p:cNvPr id="1" name=""/>
+        <p:cNvGrpSpPr/>
+        <p:nvPr/>
+      </p:nvGrpSpPr>
+      <p:grpSpPr>
+        <a:xfrm>
+          <a:off x="0" y="0"/>
+          <a:ext cx="0" cy="0"/>
+          <a:chOff x="0" y="0"/>
+          <a:chExt cx="0" cy="0"/>
+        </a:xfrm>
+      </p:grpSpPr>
+      <p:sp>
+        <p:nvSpPr>
+          <p:cNvPr id="2" name="Header Placeholder 1"/>
+          <p:cNvSpPr>
+            <a:spLocks noGrp="1"/>
+          </p:cNvSpPr>
+          <p:nvPr>
+            <p:ph type="hdr" sz="quarter"/>
+          </p:nvPr>
+        </p:nvSpPr>
+        <p:spPr>
+          <a:xfrm>
+            <a:off x="0" y="0"/>
+            <a:ext cx="2971800" cy="457200"/>
+          </a:xfrm>
+          <a:prstGeom prst="rect">
+            <a:avLst/>
+          </a:prstGeom>
+        </p:spPr>
+        <p:txBody>
+          <a:bodyPr vert="horz" lIns="91440" tIns="45720" rIns="91440" bIns="45720" rtlCol="0"/>
+          <a:lstStyle>
+            <a:lvl1pPr algn="l">
+              <a:defRPr sz="1200"/>
+            </a:lvl1pPr>
+          </a:lstStyle>
+          <a:p>
+            <a:endParaRPr lang="en-US"/>
+          </a:p>
+        </p:txBody>
+      </p:sp>
+      <p:sp>
+        <p:nvSpPr>
+          <p:cNvPr id="3" name="Date Placeholder 2"/>
+          <p:cNvSpPr>
+            <a:spLocks noGrp="1"/>
+          </p:cNvSpPr>
+          <p:nvPr>
+            <p:ph type="dt" idx="1"/>
+          </p:nvPr>
+        </p:nvSpPr>
+        <p:spPr>
+          <a:xfrm>
+            <a:off x="3884613" y="0"/>
+            <a:ext cx="2971800" cy="457200"/>
+          </a:xfrm>
+          <a:prstGeom prst="rect">
+            <a:avLst/>
+          </a:prstGeom>
+        </p:spPr>
+        <p:txBody>
+          <a:bodyPr vert="horz" lIns="91440" tIns="45720" rIns="91440" bIns="45720" rtlCol="0"/>
+          <a:lstStyle>
+            <a:lvl1pPr algn="r">
+              <a:defRPr sz="1200"/>
+            </a:lvl1pPr>
+          </a:lstStyle>
+          <a:p>
+            <a:fld id="{0F89C1C7-3DCD-1040-A9CF-14679D8B5DDD}" type="datetimeFigureOut">
+              <a:rPr lang="en-US" smtClean="0"/>
+              <a:t>10/17/16</a:t>
+            </a:fld>
+            <a:endParaRPr lang="en-US"/>
+          </a:p>
+        </p:txBody>
+      </p:sp>
+      <p:sp>
+        <p:nvSpPr>
+          <p:cNvPr id="4" name="Slide Image Placeholder 3"/>
+          <p:cNvSpPr>
+            <a:spLocks noGrp="1" noRot="1" noChangeAspect="1"/>
+          </p:cNvSpPr>
+          <p:nvPr>
+            <p:ph type="sldImg" idx="2"/>
+          </p:nvPr>
+        </p:nvSpPr>
+        <p:spPr>
+          <a:xfrm>
+            <a:off x="1143000" y="685800"/>
+            <a:ext cx="4572000" cy="3429000"/>
+          </a:xfrm>
+          <a:prstGeom prst="rect">
+            <a:avLst/>
+          </a:prstGeom>
+          <a:noFill/>
+          <a:ln w="12700">
+            <a:solidFill>
+              <a:prstClr val="black"/>
+            </a:solidFill>
+          </a:ln>
+        </p:spPr>
+        <p:txBody>
+          <a:bodyPr vert="horz" lIns="91440" tIns="45720" rIns="91440" bIns="45720" rtlCol="0" anchor="ctr"/>
+          <a:lstStyle/>
+          <a:p>
+            <a:endParaRPr lang="en-US"/>
+          </a:p>
+        </p:txBody>
+      </p:sp>
+      <p:sp>
+        <p:nvSpPr>
+          <p:cNvPr id="5" name="Notes Placeholder 4"/>
+          <p:cNvSpPr>
+            <a:spLocks noGrp="1"/>
+          </p:cNvSpPr>
+          <p:nvPr>
+            <p:ph type="body" sz="quarter" idx="3"/>
+          </p:nvPr>
+        </p:nvSpPr>
+        <p:spPr>
+          <a:xfrm>
+            <a:off x="685800" y="4343400"/>
+            <a:ext cx="5486400" cy="4114800"/>
+          </a:xfrm>
+          <a:prstGeom prst="rect">
+            <a:avLst/>
+          </a:prstGeom>
+        </p:spPr>
+        <p:txBody>
+          <a:bodyPr vert="horz" lIns="91440" tIns="45720" rIns="91440" bIns="45720" rtlCol="0"/>
+          <a:lstStyle/>
+          <a:p>
+            <a:pPr lvl="0"/>
+            <a:r>
+              <a:rPr lang="en-US" smtClean="0"/>
+              <a:t>Click to edit Master text styles</a:t>
+            </a:r>
+          </a:p>
+          <a:p>
+            <a:pPr lvl="1"/>
+            <a:r>
+              <a:rPr lang="en-US" smtClean="0"/>
+              <a:t>Second level</a:t>
+            </a:r>
+          </a:p>
+          <a:p>
+            <a:pPr lvl="2"/>
+            <a:r>
+              <a:rPr lang="en-US" smtClean="0"/>
+              <a:t>Third level</a:t>
+            </a:r>
+          </a:p>
+          <a:p>
+            <a:pPr lvl="3"/>
+            <a:r>
+              <a:rPr lang="en-US" smtClean="0"/>
+              <a:t>Fourth level</a:t>
+            </a:r>
+          </a:p>
+          <a:p>
+            <a:pPr lvl="4"/>
+            <a:r>
+              <a:rPr lang="en-US" smtClean="0"/>
+              <a:t>Fifth level</a:t>
+            </a:r>
+            <a:endParaRPr lang="en-US"/>
+          </a:p>
+        </p:txBody>
+      </p:sp>
+      <p:sp>
+        <p:nvSpPr>
+          <p:cNvPr id="6" name="Footer Placeholder 5"/>
+          <p:cNvSpPr>
+            <a:spLocks noGrp="1"/>
+          </p:cNvSpPr>
+          <p:nvPr>
+            <p:ph type="ftr" sz="quarter" idx="4"/>
+          </p:nvPr>
+        </p:nvSpPr>
+        <p:spPr>
+          <a:xfrm>
+            <a:off x="0" y="8685213"/>
+            <a:ext cx="2971800" cy="457200"/>
+          </a:xfrm>
+          <a:prstGeom prst="rect">
+            <a:avLst/>
+          </a:prstGeom>
+        </p:spPr>
+        <p:txBody>
+          <a:bodyPr vert="horz" lIns="91440" tIns="45720" rIns="91440" bIns="45720" rtlCol="0" anchor="b"/>
+          <a:lstStyle>
+            <a:lvl1pPr algn="l">
+              <a:defRPr sz="1200"/>
+            </a:lvl1pPr>
+          </a:lstStyle>
+          <a:p>
+            <a:endParaRPr lang="en-US"/>
+          </a:p>
+        </p:txBody>
+      </p:sp>
+      <p:sp>
+        <p:nvSpPr>
+          <p:cNvPr id="7" name="Slide Number Placeholder 6"/>
+          <p:cNvSpPr>
+            <a:spLocks noGrp="1"/>
+          </p:cNvSpPr>
+          <p:nvPr>
+            <p:ph type="sldNum" sz="quarter" idx="5"/>
+          </p:nvPr>
+        </p:nvSpPr>
+        <p:spPr>
+          <a:xfrm>
+            <a:off x="3884613" y="8685213"/>
+            <a:ext cx="2971800" cy="457200"/>
+          </a:xfrm>
+          <a:prstGeom prst="rect">
+            <a:avLst/>
+          </a:prstGeom>
+        </p:spPr>
+        <p:txBody>
+          <a:bodyPr vert="horz" lIns="91440" tIns="45720" rIns="91440" bIns="45720" rtlCol="0" anchor="b"/>
+          <a:lstStyle>
+            <a:lvl1pPr algn="r">
+              <a:defRPr sz="1200"/>
+            </a:lvl1pPr>
+          </a:lstStyle>
+          <a:p>
+            <a:fld id="{BB5E49A5-4136-284D-997B-48E1D791AD67}" type="slidenum">
+              <a:rPr lang="en-US" smtClean="0"/>
+              <a:t>‹#›</a:t>
+            </a:fld>
+            <a:endParaRPr lang="en-US"/>
+          </a:p>
+        </p:txBody>
+      </p:sp>
+    </p:spTree>
+    <p:extLst>
+      <p:ext uri="{BB962C8B-B14F-4D97-AF65-F5344CB8AC3E}">
+        <p14:creationId xmlns:p14="http://schemas.microsoft.com/office/powerpoint/2010/main" val="2623252185"/>
+      </p:ext>
+    </p:extLst>
+  </p:cSld>
+  <p:clrMap bg1="lt1" tx1="dk1" bg2="lt2" tx2="dk2" accent1="accent1" accent2="accent2" accent3="accent3" accent4="accent4" accent5="accent5" accent6="accent6" hlink="hlink" folHlink="folHlink"/>
+  <p:notesStyle>
+    <a:lvl1pPr marL="0" algn="l" defTabSz="457200" rtl="0" eaLnBrk="1" latinLnBrk="0" hangingPunct="1">
+      <a:defRPr sz="1200" kern="1200">
+        <a:solidFill>
+          <a:schemeClr val="tx1"/>
+        </a:solidFill>
+        <a:latin typeface="+mn-lt"/>
+        <a:ea typeface="+mn-ea"/>
+        <a:cs typeface="+mn-cs"/>
+      </a:defRPr>
+    </a:lvl1pPr>
+    <a:lvl2pPr marL="457200" algn="l" defTabSz="457200" rtl="0" eaLnBrk="1" latinLnBrk="0" hangingPunct="1">
+      <a:defRPr sz="1200" kern="1200">
+        <a:solidFill>
+          <a:schemeClr val="tx1"/>
+        </a:solidFill>
+        <a:latin typeface="+mn-lt"/>
+        <a:ea typeface="+mn-ea"/>
+        <a:cs typeface="+mn-cs"/>
+      </a:defRPr>
+    </a:lvl2pPr>
+    <a:lvl3pPr marL="914400" algn="l" defTabSz="457200" rtl="0" eaLnBrk="1" latinLnBrk="0" hangingPunct="1">
+      <a:defRPr sz="1200" kern="1200">
+        <a:solidFill>
+          <a:schemeClr val="tx1"/>
+        </a:solidFill>
+        <a:latin typeface="+mn-lt"/>
+        <a:ea typeface="+mn-ea"/>
+        <a:cs typeface="+mn-cs"/>
+      </a:defRPr>
+    </a:lvl3pPr>
+    <a:lvl4pPr marL="1371600" algn="l" defTabSz="457200" rtl="0" eaLnBrk="1" latinLnBrk="0" hangingPunct="1">
+      <a:defRPr sz="1200" kern="1200">
+        <a:solidFill>
+          <a:schemeClr val="tx1"/>
+        </a:solidFill>
+        <a:latin typeface="+mn-lt"/>
+        <a:ea typeface="+mn-ea"/>
+        <a:cs typeface="+mn-cs"/>
+      </a:defRPr>
+    </a:lvl4pPr>
+    <a:lvl5pPr marL="1828800" algn="l" defTabSz="457200" rtl="0" eaLnBrk="1" latinLnBrk="0" hangingPunct="1">
+      <a:defRPr sz="1200" kern="1200">
+        <a:solidFill>
+          <a:schemeClr val="tx1"/>
+        </a:solidFill>
+        <a:latin typeface="+mn-lt"/>
+        <a:ea typeface="+mn-ea"/>
+        <a:cs typeface="+mn-cs"/>
+      </a:defRPr>
+    </a:lvl5pPr>
+    <a:lvl6pPr marL="2286000" algn="l" defTabSz="457200" rtl="0" eaLnBrk="1" latinLnBrk="0" hangingPunct="1">
+      <a:defRPr sz="1200" kern="1200">
+        <a:solidFill>
+          <a:schemeClr val="tx1"/>
+        </a:solidFill>
+        <a:latin typeface="+mn-lt"/>
+        <a:ea typeface="+mn-ea"/>
+        <a:cs typeface="+mn-cs"/>
+      </a:defRPr>
+    </a:lvl6pPr>
+    <a:lvl7pPr marL="2743200" algn="l" defTabSz="457200" rtl="0" eaLnBrk="1" latinLnBrk="0" hangingPunct="1">
+      <a:defRPr sz="1200" kern="1200">
+        <a:solidFill>
+          <a:schemeClr val="tx1"/>
+        </a:solidFill>
+        <a:latin typeface="+mn-lt"/>
+        <a:ea typeface="+mn-ea"/>
+        <a:cs typeface="+mn-cs"/>
+      </a:defRPr>
+    </a:lvl7pPr>
+    <a:lvl8pPr marL="3200400" algn="l" defTabSz="457200" rtl="0" eaLnBrk="1" latinLnBrk="0" hangingPunct="1">
+      <a:defRPr sz="1200" kern="1200">
+        <a:solidFill>
+          <a:schemeClr val="tx1"/>
+        </a:solidFill>
+        <a:latin typeface="+mn-lt"/>
+        <a:ea typeface="+mn-ea"/>
+        <a:cs typeface="+mn-cs"/>
+      </a:defRPr>
+    </a:lvl8pPr>
+    <a:lvl9pPr marL="3657600" algn="l" defTabSz="457200" rtl="0" eaLnBrk="1" latinLnBrk="0" hangingPunct="1">
+      <a:defRPr sz="1200" kern="1200">
+        <a:solidFill>
+          <a:schemeClr val="tx1"/>
+        </a:solidFill>
+        <a:latin typeface="+mn-lt"/>
+        <a:ea typeface="+mn-ea"/>
+        <a:cs typeface="+mn-cs"/>
+      </a:defRPr>
+    </a:lvl9pPr>
+  </p:notesStyle>
+</p:notesMaster>
+</file>
+
+<file path=ppt/notesSlides/notesSlide1.xml><?xml version="1.0" encoding="utf-8"?>
+<p:notes xmlns:a="http://schemas.openxmlformats.org/drawingml/2006/main" xmlns:p="http://schemas.openxmlformats.org/presentationml/2006/main" xmlns:r="http://schemas.openxmlformats.org/officeDocument/2006/relationships">
+  <p:cSld>
+    <p:spTree>
+      <p:nvGrpSpPr>
+        <p:cNvPr id="1" name=""/>
+        <p:cNvGrpSpPr/>
+        <p:nvPr/>
+      </p:nvGrpSpPr>
+      <p:grpSpPr>
+        <a:xfrm>
+          <a:off x="0" y="0"/>
+          <a:ext cx="0" cy="0"/>
+          <a:chOff x="0" y="0"/>
+          <a:chExt cx="0" cy="0"/>
+        </a:xfrm>
+      </p:grpSpPr>
+      <p:sp>
+        <p:nvSpPr>
+          <p:cNvPr id="2" name="Slide Image Placeholder 1"/>
+          <p:cNvSpPr>
+            <a:spLocks noGrp="1"/>
+          </p:cNvSpPr>
+          <p:nvPr>
+            <p:ph type="sldImg" idx="2"/>
+          </p:nvPr>
+        </p:nvSpPr>
+        <p:spPr/>
+      </p:sp>
+      <p:sp>
+        <p:nvSpPr>
+          <p:cNvPr id="3" name="Notes Placeholder 2"/>
+          <p:cNvSpPr>
+            <a:spLocks noGrp="1"/>
+          </p:cNvSpPr>
+          <p:nvPr>
+            <p:ph type="body" idx="3" sz="quarter"/>
+          </p:nvPr>
+        </p:nvSpPr>
+        <p:spPr/>
+        <p:txBody>
+          <a:bodyPr/>
+          <a:lstStyle/>
+          <a:p>
+            <a:r>
+              <a:t>Frame Topic 8 as the CLOSE of AT3 and the cluster — Topic 7 built and tested; Topic 8 writes it up and</a:t>
+            </a:r>
+          </a:p>
+          <a:p>
+            <a:r>
+              <a:t>signs it off. No new build.</a:t>
+            </a:r>
+          </a:p>
+          <a:p>
+            <a:r>
+              <a:t>• First bullet: Topic 7 deployed, monitored and tested the improvement; Topic 8 writes it up and closes</a:t>
+            </a:r>
+          </a:p>
+          <a:p>
+            <a:r>
+              <a:t>the cluster.</a:t>
+            </a:r>
+          </a:p>
+          <a:p>
+            <a:r>
+              <a:t>• Second bullet: three moves — document the AS-DEPLOYED system against the approved design, describe</a:t>
+            </a:r>
+          </a:p>
+          <a:p>
+            <a:r>
+              <a:t>the LONG-TERM improvement strategy, and obtain the FINAL SIGN-OFF. Those three are C1, C2, C3.</a:t>
+            </a:r>
+          </a:p>
+          <a:p>
+            <a:r>
+              <a:t>• Third bullet: the deliverable is the DEPLOYMENT REPORT — the whole system across all four concerns:</a:t>
+            </a:r>
+          </a:p>
+          <a:p>
+            <a:r>
+              <a:t>security, reliability, scalability, cost.</a:t>
+            </a:r>
+          </a:p>
+          <a:p>
+            <a:r>
+              <a:t>• Fourth bullet: NO new build — the report is assembled from what you captured LIVE during the Topic 7</a:t>
+            </a:r>
+          </a:p>
+          <a:p>
+            <a:r>
+              <a:t>deploy and test. That's why live capture mattered.</a:t>
+            </a:r>
+          </a:p>
+          <a:p>
+            <a:r>
+              <a:t>Misconception to pre-empt: "documentation is where I finally build the missing bits." No — nothing new</a:t>
+            </a:r>
+          </a:p>
+          <a:p>
+            <a:r>
+              <a:t>is built here; if evidence wasn't captured in Topic 7 you can't manufacture it now. The report assembles</a:t>
+            </a:r>
+          </a:p>
+          <a:p>
+            <a:r>
+              <a:t>what exists.</a:t>
+            </a:r>
+          </a:p>
+          <a:p>
+            <a:r>
+              <a:t>Question to pose: "If you didn't screenshot the SPOF test in Topic 7, can you put it in the report now?"</a:t>
+            </a:r>
+          </a:p>
+          <a:p>
+            <a:r>
+              <a:t>(no — capture was live; reinforces why Topic 7 discipline mattered).</a:t>
+            </a:r>
+          </a:p>
+          <a:p>
+            <a:r>
+              <a:t>UoC/AT3 tie: opens the AT3 finalisation arc — ICTCLD504 el 4; everything today produces the as-deployed</a:t>
+            </a:r>
+          </a:p>
+          <a:p>
+            <a:r>
+              <a:t>report, long-term strategy and sign-off evidenced in AT3.</a:t>
+            </a:r>
+          </a:p>
+        </p:txBody>
+      </p:sp>
+      <p:sp>
+        <p:nvSpPr>
+          <p:cNvPr id="4" name="Slide Number Placeholder 3"/>
+          <p:cNvSpPr>
+            <a:spLocks noGrp="1"/>
+          </p:cNvSpPr>
+          <p:nvPr>
+            <p:ph type="sldNum" idx="5" sz="quarter"/>
+          </p:nvPr>
+        </p:nvSpPr>
+        <p:spPr/>
+      </p:sp>
+    </p:spTree>
+  </p:cSld>
+  <p:clrMapOvr>
+    <a:masterClrMapping/>
+  </p:clrMapOvr>
+</p:notes>
+</file>
+
+<file path=ppt/notesSlides/notesSlide2.xml><?xml version="1.0" encoding="utf-8"?>
+<p:notes xmlns:a="http://schemas.openxmlformats.org/drawingml/2006/main" xmlns:p="http://schemas.openxmlformats.org/presentationml/2006/main" xmlns:r="http://schemas.openxmlformats.org/officeDocument/2006/relationships">
+  <p:cSld>
+    <p:spTree>
+      <p:nvGrpSpPr>
+        <p:cNvPr id="1" name=""/>
+        <p:cNvGrpSpPr/>
+        <p:nvPr/>
+      </p:nvGrpSpPr>
+      <p:grpSpPr>
+        <a:xfrm>
+          <a:off x="0" y="0"/>
+          <a:ext cx="0" cy="0"/>
+          <a:chOff x="0" y="0"/>
+          <a:chExt cx="0" cy="0"/>
+        </a:xfrm>
+      </p:grpSpPr>
+      <p:sp>
+        <p:nvSpPr>
+          <p:cNvPr id="2" name="Slide Image Placeholder 1"/>
+          <p:cNvSpPr>
+            <a:spLocks noGrp="1"/>
+          </p:cNvSpPr>
+          <p:nvPr>
+            <p:ph type="sldImg" idx="2"/>
+          </p:nvPr>
+        </p:nvSpPr>
+        <p:spPr/>
+      </p:sp>
+      <p:sp>
+        <p:nvSpPr>
+          <p:cNvPr id="3" name="Notes Placeholder 2"/>
+          <p:cNvSpPr>
+            <a:spLocks noGrp="1"/>
+          </p:cNvSpPr>
+          <p:nvPr>
+            <p:ph type="body" idx="3" sz="quarter"/>
+          </p:nvPr>
+        </p:nvSpPr>
+        <p:spPr/>
+        <p:txBody>
+          <a:bodyPr/>
+          <a:lstStyle/>
+          <a:p>
+            <a:r>
+              <a:t>Open Section 1 — teach what an AS-DEPLOYED record is and what the Deployment Report assembles. PC 4.1</a:t>
+            </a:r>
+          </a:p>
+          <a:p>
+            <a:r>
+              <a:t>and PE 5 land across C1.</a:t>
+            </a:r>
+          </a:p>
+          <a:p>
+            <a:r>
+              <a:t>• First bullet: an as-deployed record documents the system AS IT WAS ACTUALLY DEPLOYED — not the</a:t>
+            </a:r>
+          </a:p>
+          <a:p>
+            <a:r>
+              <a:t>design on paper, the resources actually running. The distinction is the whole idea.</a:t>
+            </a:r>
+          </a:p>
+          <a:p>
+            <a:r>
+              <a:t>• Second bullet: the Deployment Report assembles it — the as-deployed architecture, the test results,</a:t>
+            </a:r>
+          </a:p>
+          <a:p>
+            <a:r>
+              <a:t>the changes from the approved design, and the deployment/testing steps. Name the four parts.</a:t>
+            </a:r>
+          </a:p>
+          <a:p>
+            <a:r>
+              <a:t>• Third bullet: it's COMPLETE and READABLE by someone who wasn't in the room — a reviewer can follow it</a:t>
+            </a:r>
+          </a:p>
+          <a:p>
+            <a:r>
+              <a:t>end to end. Write for the absent reader.</a:t>
+            </a:r>
+          </a:p>
+          <a:p>
+            <a:r>
+              <a:t>Misconception to pre-empt: "as-deployed = the approved design document." No — the point is documenting</a:t>
+            </a:r>
+          </a:p>
+          <a:p>
+            <a:r>
+              <a:t>what ACTUALLY ran (which differs from the design, e.g. DB-tier DR at design level only); copying the</a:t>
+            </a:r>
+          </a:p>
+          <a:p>
+            <a:r>
+              <a:t>design defeats it.</a:t>
+            </a:r>
+          </a:p>
+          <a:p>
+            <a:r>
+              <a:t>Question to pose: "Name one thing that will differ between the approved design and the as-deployed</a:t>
+            </a:r>
+          </a:p>
+          <a:p>
+            <a:r>
+              <a:t>record on this build" (draws out the DB-tier DR / us-east-1 substitution).</a:t>
+            </a:r>
+          </a:p>
+          <a:p>
+            <a:r>
+              <a:t>UoC/AT3 tie: ICTCLD504 PC 4.1 + PE 5 → the as-deployed record and step documentation evidenced in AT3.</a:t>
+            </a:r>
+          </a:p>
+        </p:txBody>
+      </p:sp>
+      <p:sp>
+        <p:nvSpPr>
+          <p:cNvPr id="4" name="Slide Number Placeholder 3"/>
+          <p:cNvSpPr>
+            <a:spLocks noGrp="1"/>
+          </p:cNvSpPr>
+          <p:nvPr>
+            <p:ph type="sldNum" idx="5" sz="quarter"/>
+          </p:nvPr>
+        </p:nvSpPr>
+        <p:spPr/>
+      </p:sp>
+    </p:spTree>
+  </p:cSld>
+  <p:clrMapOvr>
+    <a:masterClrMapping/>
+  </p:clrMapOvr>
+</p:notes>
+</file>
+
+<file path=ppt/notesSlides/notesSlide3.xml><?xml version="1.0" encoding="utf-8"?>
+<p:notes xmlns:a="http://schemas.openxmlformats.org/drawingml/2006/main" xmlns:p="http://schemas.openxmlformats.org/presentationml/2006/main" xmlns:r="http://schemas.openxmlformats.org/officeDocument/2006/relationships">
+  <p:cSld>
+    <p:spTree>
+      <p:nvGrpSpPr>
+        <p:cNvPr id="1" name=""/>
+        <p:cNvGrpSpPr/>
+        <p:nvPr/>
+      </p:nvGrpSpPr>
+      <p:grpSpPr>
+        <a:xfrm>
+          <a:off x="0" y="0"/>
+          <a:ext cx="0" cy="0"/>
+          <a:chOff x="0" y="0"/>
+          <a:chExt cx="0" cy="0"/>
+        </a:xfrm>
+      </p:grpSpPr>
+      <p:sp>
+        <p:nvSpPr>
+          <p:cNvPr id="2" name="Slide Image Placeholder 1"/>
+          <p:cNvSpPr>
+            <a:spLocks noGrp="1"/>
+          </p:cNvSpPr>
+          <p:nvPr>
+            <p:ph type="sldImg" idx="2"/>
+          </p:nvPr>
+        </p:nvSpPr>
+        <p:spPr/>
+      </p:sp>
+      <p:sp>
+        <p:nvSpPr>
+          <p:cNvPr id="3" name="Notes Placeholder 2"/>
+          <p:cNvSpPr>
+            <a:spLocks noGrp="1"/>
+          </p:cNvSpPr>
+          <p:nvPr>
+            <p:ph type="body" idx="3" sz="quarter"/>
+          </p:nvPr>
+        </p:nvSpPr>
+        <p:spPr/>
+        <p:txBody>
+          <a:bodyPr/>
+          <a:lstStyle/>
+          <a:p>
+            <a:r>
+              <a:t>The core of C1 — the report must HIGHLIGHT where reality differed from the approved design. PC 4.1</a:t>
+            </a:r>
+          </a:p>
+          <a:p>
+            <a:r>
+              <a:t>lands here.</a:t>
+            </a:r>
+          </a:p>
+          <a:p>
+            <a:r>
+              <a:t>• First bullet: document the as-deployed architecture and test results, and HIGHLIGHT the changes and</a:t>
+            </a:r>
+          </a:p>
+          <a:p>
+            <a:r>
+              <a:t>improvements from the approved design (PC 4.1). Highlighting the deltas is the assessed act.</a:t>
+            </a:r>
+          </a:p>
+          <a:p>
+            <a:r>
+              <a:t>• Second bullet: every difference is NAMED and JUSTIFIED — e.g. DB-tier DR stayed at design level</a:t>
+            </a:r>
+          </a:p>
+          <a:p>
+            <a:r>
+              <a:t>because the lab couldn't modify the database; app-tier Multi-AZ was built and evidenced. Difference +</a:t>
+            </a:r>
+          </a:p>
+          <a:p>
+            <a:r>
+              <a:t>reason, every time.</a:t>
+            </a:r>
+          </a:p>
+          <a:p>
+            <a:r>
+              <a:t>• Third bullet: test results cover ALL FOUR concerns — security, reliability, scalability, cost — each</a:t>
+            </a:r>
+          </a:p>
+          <a:p>
+            <a:r>
+              <a:t>against the goals set in Topic 1. Close the loop back to the AT1 goals.</a:t>
+            </a:r>
+          </a:p>
+          <a:p>
+            <a:r>
+              <a:t>Misconception to pre-empt: "a difference from the design is a failure to hide." No — a named, justified</a:t>
+            </a:r>
+          </a:p>
+          <a:p>
+            <a:r>
+              <a:t>difference is good engineering documentation; the unnamed difference is the problem. Surface them.</a:t>
+            </a:r>
+          </a:p>
+          <a:p>
+            <a:r>
+              <a:t>Question to pose: "The DB-tier DR is design-level, not deployed — how do you write that up so it reads</a:t>
+            </a:r>
+          </a:p>
+          <a:p>
+            <a:r>
+              <a:t>as a justified decision, not a gap?" (rehearses name + justify).</a:t>
+            </a:r>
+          </a:p>
+          <a:p>
+            <a:r>
+              <a:t>UoC/AT3 tie: ICTCLD504 PC 4.1 → the as-deployed-vs-design section of the AT3 report.</a:t>
+            </a:r>
+          </a:p>
+        </p:txBody>
+      </p:sp>
+      <p:sp>
+        <p:nvSpPr>
+          <p:cNvPr id="4" name="Slide Number Placeholder 3"/>
+          <p:cNvSpPr>
+            <a:spLocks noGrp="1"/>
+          </p:cNvSpPr>
+          <p:nvPr>
+            <p:ph type="sldNum" idx="5" sz="quarter"/>
+          </p:nvPr>
+        </p:nvSpPr>
+        <p:spPr/>
+      </p:sp>
+    </p:spTree>
+  </p:cSld>
+  <p:clrMapOvr>
+    <a:masterClrMapping/>
+  </p:clrMapOvr>
+</p:notes>
+</file>
+
+<file path=ppt/notesSlides/notesSlide4.xml><?xml version="1.0" encoding="utf-8"?>
+<p:notes xmlns:a="http://schemas.openxmlformats.org/drawingml/2006/main" xmlns:p="http://schemas.openxmlformats.org/presentationml/2006/main" xmlns:r="http://schemas.openxmlformats.org/officeDocument/2006/relationships">
+  <p:cSld>
+    <p:spTree>
+      <p:nvGrpSpPr>
+        <p:cNvPr id="1" name=""/>
+        <p:cNvGrpSpPr/>
+        <p:nvPr/>
+      </p:nvGrpSpPr>
+      <p:grpSpPr>
+        <a:xfrm>
+          <a:off x="0" y="0"/>
+          <a:ext cx="0" cy="0"/>
+          <a:chOff x="0" y="0"/>
+          <a:chExt cx="0" cy="0"/>
+        </a:xfrm>
+      </p:grpSpPr>
+      <p:sp>
+        <p:nvSpPr>
+          <p:cNvPr id="2" name="Slide Image Placeholder 1"/>
+          <p:cNvSpPr>
+            <a:spLocks noGrp="1"/>
+          </p:cNvSpPr>
+          <p:nvPr>
+            <p:ph type="sldImg" idx="2"/>
+          </p:nvPr>
+        </p:nvSpPr>
+        <p:spPr/>
+      </p:sp>
+      <p:sp>
+        <p:nvSpPr>
+          <p:cNvPr id="3" name="Notes Placeholder 2"/>
+          <p:cNvSpPr>
+            <a:spLocks noGrp="1"/>
+          </p:cNvSpPr>
+          <p:nvPr>
+            <p:ph type="body" idx="3" sz="quarter"/>
+          </p:nvPr>
+        </p:nvSpPr>
+        <p:spPr/>
+        <p:txBody>
+          <a:bodyPr/>
+          <a:lstStyle/>
+          <a:p>
+            <a:r>
+              <a:t>The step-documentation slide — PE 5 lands here. Teach it as a repeatable record.</a:t>
+            </a:r>
+          </a:p>
+          <a:p>
+            <a:r>
+              <a:t>• First bullet: create the documentation of the DEPLOYMENT AND TESTING STEPS (PE 5) — the step-by-step</a:t>
+            </a:r>
+          </a:p>
+          <a:p>
+            <a:r>
+              <a:t>record of how the improvement was deployed and tested.</a:t>
+            </a:r>
+          </a:p>
+          <a:p>
+            <a:r>
+              <a:t>• Second bullet: written so a reader could REPEAT it — the stacks/changes applied, in order, and each</a:t>
+            </a:r>
+          </a:p>
+          <a:p>
+            <a:r>
+              <a:t>test run with its outcome. Repeatability is the standard.</a:t>
+            </a:r>
+          </a:p>
+          <a:p>
+            <a:r>
+              <a:t>• Third bullet: assembled from the SCREENSHOTS, EXPORTS and LOGS captured as you went in Topic 7 — you</a:t>
+            </a:r>
+          </a:p>
+          <a:p>
+            <a:r>
+              <a:t>can't reconstruct it after the fact. Live capture again.</a:t>
+            </a:r>
+          </a:p>
+          <a:p>
+            <a:r>
+              <a:t>Misconception to pre-empt: "step documentation is a vague summary." No — the bar is 'a reader could</a:t>
+            </a:r>
+          </a:p>
+          <a:p>
+            <a:r>
+              <a:t>repeat it'; a summary that skips the order or the outcomes fails PE 5.</a:t>
+            </a:r>
+          </a:p>
+          <a:p>
+            <a:r>
+              <a:t>Question to pose: "Hand your step doc to someone who wasn't here — could they redeploy and re-test from</a:t>
+            </a:r>
+          </a:p>
+          <a:p>
+            <a:r>
+              <a:t>it alone? What's missing if not?" (tests the repeatability bar).</a:t>
+            </a:r>
+          </a:p>
+          <a:p>
+            <a:r>
+              <a:t>UoC/AT3 tie: ICTCLD504 PE 5 → the deployment/testing-steps documentation evidenced in AT3.</a:t>
+            </a:r>
+          </a:p>
+        </p:txBody>
+      </p:sp>
+      <p:sp>
+        <p:nvSpPr>
+          <p:cNvPr id="4" name="Slide Number Placeholder 3"/>
+          <p:cNvSpPr>
+            <a:spLocks noGrp="1"/>
+          </p:cNvSpPr>
+          <p:nvPr>
+            <p:ph type="sldNum" idx="5" sz="quarter"/>
+          </p:nvPr>
+        </p:nvSpPr>
+        <p:spPr/>
+      </p:sp>
+    </p:spTree>
+  </p:cSld>
+  <p:clrMapOvr>
+    <a:masterClrMapping/>
+  </p:clrMapOvr>
+</p:notes>
+</file>
+
+<file path=ppt/notesSlides/notesSlide5.xml><?xml version="1.0" encoding="utf-8"?>
+<p:notes xmlns:a="http://schemas.openxmlformats.org/drawingml/2006/main" xmlns:p="http://schemas.openxmlformats.org/presentationml/2006/main" xmlns:r="http://schemas.openxmlformats.org/officeDocument/2006/relationships">
+  <p:cSld>
+    <p:spTree>
+      <p:nvGrpSpPr>
+        <p:cNvPr id="1" name=""/>
+        <p:cNvGrpSpPr/>
+        <p:nvPr/>
+      </p:nvGrpSpPr>
+      <p:grpSpPr>
+        <a:xfrm>
+          <a:off x="0" y="0"/>
+          <a:ext cx="0" cy="0"/>
+          <a:chOff x="0" y="0"/>
+          <a:chExt cx="0" cy="0"/>
+        </a:xfrm>
+      </p:grpSpPr>
+      <p:sp>
+        <p:nvSpPr>
+          <p:cNvPr id="2" name="Slide Image Placeholder 1"/>
+          <p:cNvSpPr>
+            <a:spLocks noGrp="1"/>
+          </p:cNvSpPr>
+          <p:nvPr>
+            <p:ph type="sldImg" idx="2"/>
+          </p:nvPr>
+        </p:nvSpPr>
+        <p:spPr/>
+      </p:sp>
+      <p:sp>
+        <p:nvSpPr>
+          <p:cNvPr id="3" name="Notes Placeholder 2"/>
+          <p:cNvSpPr>
+            <a:spLocks noGrp="1"/>
+          </p:cNvSpPr>
+          <p:nvPr>
+            <p:ph type="body" idx="3" sz="quarter"/>
+          </p:nvPr>
+        </p:nvSpPr>
+        <p:spPr/>
+        <p:txBody>
+          <a:bodyPr/>
+          <a:lstStyle/>
+          <a:p>
+            <a:r>
+              <a:t>Section 2 — LONG-TERM strategy, described (not built). PC 4.2 lands here; contrast with Topic 7's</a:t>
+            </a:r>
+          </a:p>
+          <a:p>
+            <a:r>
+              <a:t>short-term refinements.</a:t>
+            </a:r>
+          </a:p>
+          <a:p>
+            <a:r>
+              <a:t>• First bullet: describe long-term improvement strategies and their benefits AS APPLIED TO the deployed</a:t>
+            </a:r>
+          </a:p>
+          <a:p>
+            <a:r>
+              <a:t>resources (PC 4.2) — what a next iteration would improve and the BENEFIT it buys. Description + benefit,</a:t>
+            </a:r>
+          </a:p>
+          <a:p>
+            <a:r>
+              <a:t>tied to the actual deploy.</a:t>
+            </a:r>
+          </a:p>
+          <a:p>
+            <a:r>
+              <a:t>• Second bullet (the headline): this is where DB-TIER DR lives — built at design level here, it's the</a:t>
+            </a:r>
+          </a:p>
+          <a:p>
+            <a:r>
+              <a:t>headline long-term strategy: cross-Region database resilience and the availability benefit it delivers.</a:t>
+            </a:r>
+          </a:p>
+          <a:p>
+            <a:r>
+              <a:t>• Third bullet: include other future improvements across the four concerns — tighter cost controls,</a:t>
+            </a:r>
+          </a:p>
+          <a:p>
+            <a:r>
+              <a:t>further scalability headroom, security hardening — each tied to a BENEFIT, not a wish-list.</a:t>
+            </a:r>
+          </a:p>
+          <a:p>
+            <a:r>
+              <a:t>Misconception to pre-empt: "long-term strategy is the same as the short-term refinements." No —</a:t>
+            </a:r>
+          </a:p>
+          <a:p>
+            <a:r>
+              <a:t>short-term was APPLIED now on the running stack (Topic 7, PC 3.4); long-term is DESCRIBED for a future</a:t>
+            </a:r>
+          </a:p>
+          <a:p>
+            <a:r>
+              <a:t>iteration (PC 4.2). Different verb, different topic.</a:t>
+            </a:r>
+          </a:p>
+          <a:p>
+            <a:r>
+              <a:t>Question to pose: "DB-tier DR couldn't be deployed in the lab — why does that make it the perfect</a:t>
+            </a:r>
+          </a:p>
+          <a:p>
+            <a:r>
+              <a:t>LONG-TERM strategy item, and what benefit do you cite?" (ties the constraint to the long-term narrative).</a:t>
+            </a:r>
+          </a:p>
+          <a:p>
+            <a:r>
+              <a:t>UoC/AT3 tie: ICTCLD504 PC 4.2 → the long-term-strategy section of the AT3 report; DB-tier DR is the</a:t>
+            </a:r>
+          </a:p>
+          <a:p>
+            <a:r>
+              <a:t>headline item.</a:t>
+            </a:r>
+          </a:p>
+        </p:txBody>
+      </p:sp>
+      <p:sp>
+        <p:nvSpPr>
+          <p:cNvPr id="4" name="Slide Number Placeholder 3"/>
+          <p:cNvSpPr>
+            <a:spLocks noGrp="1"/>
+          </p:cNvSpPr>
+          <p:nvPr>
+            <p:ph type="sldNum" idx="5" sz="quarter"/>
+          </p:nvPr>
+        </p:nvSpPr>
+        <p:spPr/>
+      </p:sp>
+    </p:spTree>
+  </p:cSld>
+  <p:clrMapOvr>
+    <a:masterClrMapping/>
+  </p:clrMapOvr>
+</p:notes>
+</file>
+
+<file path=ppt/notesSlides/notesSlide6.xml><?xml version="1.0" encoding="utf-8"?>
+<p:notes xmlns:a="http://schemas.openxmlformats.org/drawingml/2006/main" xmlns:p="http://schemas.openxmlformats.org/presentationml/2006/main" xmlns:r="http://schemas.openxmlformats.org/officeDocument/2006/relationships">
+  <p:cSld>
+    <p:spTree>
+      <p:nvGrpSpPr>
+        <p:cNvPr id="1" name=""/>
+        <p:cNvGrpSpPr/>
+        <p:nvPr/>
+      </p:nvGrpSpPr>
+      <p:grpSpPr>
+        <a:xfrm>
+          <a:off x="0" y="0"/>
+          <a:ext cx="0" cy="0"/>
+          <a:chOff x="0" y="0"/>
+          <a:chExt cx="0" cy="0"/>
+        </a:xfrm>
+      </p:grpSpPr>
+      <p:sp>
+        <p:nvSpPr>
+          <p:cNvPr id="2" name="Slide Image Placeholder 1"/>
+          <p:cNvSpPr>
+            <a:spLocks noGrp="1"/>
+          </p:cNvSpPr>
+          <p:nvPr>
+            <p:ph type="sldImg" idx="2"/>
+          </p:nvPr>
+        </p:nvSpPr>
+        <p:spPr/>
+      </p:sp>
+      <p:sp>
+        <p:nvSpPr>
+          <p:cNvPr id="3" name="Notes Placeholder 2"/>
+          <p:cNvSpPr>
+            <a:spLocks noGrp="1"/>
+          </p:cNvSpPr>
+          <p:nvPr>
+            <p:ph type="body" idx="3" sz="quarter"/>
+          </p:nvPr>
+        </p:nvSpPr>
+        <p:spPr/>
+        <p:txBody>
+          <a:bodyPr/>
+          <a:lstStyle/>
+          <a:p>
+            <a:r>
+              <a:t>Open Section 3 — the FINAL SIGN-OFF, the formal acceptance that closes the cluster. PC 4.3 lands here.</a:t>
+            </a:r>
+          </a:p>
+          <a:p>
+            <a:r>
+              <a:t>• First bullet: obtain final sign-off from the REQUIRED PERSONNEL (PC 4.3) — the formal acceptance of</a:t>
+            </a:r>
+          </a:p>
+          <a:p>
+            <a:r>
+              <a:t>the deployed and tested improvement.</a:t>
+            </a:r>
+          </a:p>
+          <a:p>
+            <a:r>
+              <a:t>• Second bullet: WALK the Deployment Report — the as-deployed system, the test results against the</a:t>
+            </a:r>
+          </a:p>
+          <a:p>
+            <a:r>
+              <a:t>goals, and the long-term strategy — confirm requirements met FOR THE AUDIENCE, not in jargon.</a:t>
+            </a:r>
+          </a:p>
+          <a:p>
+            <a:r>
+              <a:t>• Third bullet: RECORD it — who approved, on what, when — as the closing section of the report. An</a:t>
+            </a:r>
+          </a:p>
+          <a:p>
+            <a:r>
+              <a:t>unrecorded sign-off isn't evidence.</a:t>
+            </a:r>
+          </a:p>
+          <a:p>
+            <a:r>
+              <a:t>Misconception to pre-empt: "sign-off is a rubber stamp at the end." No — you have to demonstrate the</a:t>
+            </a:r>
+          </a:p>
+          <a:p>
+            <a:r>
+              <a:t>goals were met, in the audience's language; the approver accepts on evidence, not assertion.</a:t>
+            </a:r>
+          </a:p>
+          <a:p>
+            <a:r>
+              <a:t>Question to pose: "You're presenting to the YAT sponsor, not an engineer — how do you show 'reliability</a:t>
+            </a:r>
+          </a:p>
+          <a:p>
+            <a:r>
+              <a:t>improved' without the jargon?" (draws out audience-appropriate demonstration).</a:t>
+            </a:r>
+          </a:p>
+          <a:p>
+            <a:r>
+              <a:t>UoC/AT3 tie: ICTCLD504 PC 4.3 (obtain final sign-off from required personnel) → the sign-off record in</a:t>
+            </a:r>
+          </a:p>
+          <a:p>
+            <a:r>
+              <a:t>the AT3 report.</a:t>
+            </a:r>
+          </a:p>
+        </p:txBody>
+      </p:sp>
+      <p:sp>
+        <p:nvSpPr>
+          <p:cNvPr id="4" name="Slide Number Placeholder 3"/>
+          <p:cNvSpPr>
+            <a:spLocks noGrp="1"/>
+          </p:cNvSpPr>
+          <p:nvPr>
+            <p:ph type="sldNum" idx="5" sz="quarter"/>
+          </p:nvPr>
+        </p:nvSpPr>
+        <p:spPr/>
+      </p:sp>
+    </p:spTree>
+  </p:cSld>
+  <p:clrMapOvr>
+    <a:masterClrMapping/>
+  </p:clrMapOvr>
+</p:notes>
+</file>
+
+<file path=ppt/notesSlides/notesSlide7.xml><?xml version="1.0" encoding="utf-8"?>
+<p:notes xmlns:a="http://schemas.openxmlformats.org/drawingml/2006/main" xmlns:p="http://schemas.openxmlformats.org/presentationml/2006/main" xmlns:r="http://schemas.openxmlformats.org/officeDocument/2006/relationships">
+  <p:cSld>
+    <p:spTree>
+      <p:nvGrpSpPr>
+        <p:cNvPr id="1" name=""/>
+        <p:cNvGrpSpPr/>
+        <p:nvPr/>
+      </p:nvGrpSpPr>
+      <p:grpSpPr>
+        <a:xfrm>
+          <a:off x="0" y="0"/>
+          <a:ext cx="0" cy="0"/>
+          <a:chOff x="0" y="0"/>
+          <a:chExt cx="0" cy="0"/>
+        </a:xfrm>
+      </p:grpSpPr>
+      <p:sp>
+        <p:nvSpPr>
+          <p:cNvPr id="2" name="Slide Image Placeholder 1"/>
+          <p:cNvSpPr>
+            <a:spLocks noGrp="1"/>
+          </p:cNvSpPr>
+          <p:nvPr>
+            <p:ph type="sldImg" idx="2"/>
+          </p:nvPr>
+        </p:nvSpPr>
+        <p:spPr/>
+      </p:sp>
+      <p:sp>
+        <p:nvSpPr>
+          <p:cNvPr id="3" name="Notes Placeholder 2"/>
+          <p:cNvSpPr>
+            <a:spLocks noGrp="1"/>
+          </p:cNvSpPr>
+          <p:nvPr>
+            <p:ph type="body" idx="3" sz="quarter"/>
+          </p:nvPr>
+        </p:nvSpPr>
+        <p:spPr/>
+        <p:txBody>
+          <a:bodyPr/>
+          <a:lstStyle/>
+          <a:p>
+            <a:r>
+              <a:t>The clarifier slide — students conflate the cluster's TWO approval moments. Teach the distinction</a:t>
+            </a:r>
+          </a:p>
+          <a:p>
+            <a:r>
+              <a:t>explicitly.</a:t>
+            </a:r>
+          </a:p>
+          <a:p>
+            <a:r>
+              <a:t>• First bullet: this is the cluster's SECOND approval — the final sign-off at AT3, on the DEPLOYED and</a:t>
+            </a:r>
+          </a:p>
+          <a:p>
+            <a:r>
+              <a:t>TESTED improvement.</a:t>
+            </a:r>
+          </a:p>
+          <a:p>
+            <a:r>
+              <a:t>• Second bullet: the FIRST was the AT1 deploy sign-off — the approval to PROCEED to deployment, on the</a:t>
+            </a:r>
+          </a:p>
+          <a:p>
+            <a:r>
+              <a:t>DESIGN (Topic 4). Different object, different moment.</a:t>
+            </a:r>
+          </a:p>
+          <a:p>
+            <a:r>
+              <a:t>• Third bullet: the first gate AUTHORISED the build; this gate ACCEPTS the result and closes the</a:t>
+            </a:r>
+          </a:p>
+          <a:p>
+            <a:r>
+              <a:t>cluster. Authorise vs accept — the two verbs.</a:t>
+            </a:r>
+          </a:p>
+          <a:p>
+            <a:r>
+              <a:t>Misconception to pre-empt: "there's one sign-off at the end." No — there are two: AT1 approved the</a:t>
+            </a:r>
+          </a:p>
+          <a:p>
+            <a:r>
+              <a:t>design to proceed; AT3 accepts the deployed result. Naming which one you're doing is the assessable</a:t>
+            </a:r>
+          </a:p>
+          <a:p>
+            <a:r>
+              <a:t>clarity.</a:t>
+            </a:r>
+          </a:p>
+          <a:p>
+            <a:r>
+              <a:t>Question to pose: "Which sign-off approved a DESIGN, and which accepts a RUNNING SYSTEM — and what's the</a:t>
+            </a:r>
+          </a:p>
+          <a:p>
+            <a:r>
+              <a:t>object of each?" (forces the authorise-vs-accept distinction).</a:t>
+            </a:r>
+          </a:p>
+          <a:p>
+            <a:r>
+              <a:t>UoC/AT3 tie: ICTCLD504 PC 4.3 → the final (second) sign-off in AT3; distinct from the AT1 deploy</a:t>
+            </a:r>
+          </a:p>
+          <a:p>
+            <a:r>
+              <a:t>sign-off (Topic 4).</a:t>
+            </a:r>
+          </a:p>
+        </p:txBody>
+      </p:sp>
+      <p:sp>
+        <p:nvSpPr>
+          <p:cNvPr id="4" name="Slide Number Placeholder 3"/>
+          <p:cNvSpPr>
+            <a:spLocks noGrp="1"/>
+          </p:cNvSpPr>
+          <p:nvPr>
+            <p:ph type="sldNum" idx="5" sz="quarter"/>
+          </p:nvPr>
+        </p:nvSpPr>
+        <p:spPr/>
+      </p:sp>
+    </p:spTree>
+  </p:cSld>
+  <p:clrMapOvr>
+    <a:masterClrMapping/>
+  </p:clrMapOvr>
+</p:notes>
+</file>
+
+<file path=ppt/notesSlides/notesSlide8.xml><?xml version="1.0" encoding="utf-8"?>
+<p:notes xmlns:a="http://schemas.openxmlformats.org/drawingml/2006/main" xmlns:p="http://schemas.openxmlformats.org/presentationml/2006/main" xmlns:r="http://schemas.openxmlformats.org/officeDocument/2006/relationships">
+  <p:cSld>
+    <p:spTree>
+      <p:nvGrpSpPr>
+        <p:cNvPr id="1" name=""/>
+        <p:cNvGrpSpPr/>
+        <p:nvPr/>
+      </p:nvGrpSpPr>
+      <p:grpSpPr>
+        <a:xfrm>
+          <a:off x="0" y="0"/>
+          <a:ext cx="0" cy="0"/>
+          <a:chOff x="0" y="0"/>
+          <a:chExt cx="0" cy="0"/>
+        </a:xfrm>
+      </p:grpSpPr>
+      <p:sp>
+        <p:nvSpPr>
+          <p:cNvPr id="2" name="Slide Image Placeholder 1"/>
+          <p:cNvSpPr>
+            <a:spLocks noGrp="1"/>
+          </p:cNvSpPr>
+          <p:nvPr>
+            <p:ph type="sldImg" idx="2"/>
+          </p:nvPr>
+        </p:nvSpPr>
+        <p:spPr/>
+      </p:sp>
+      <p:sp>
+        <p:nvSpPr>
+          <p:cNvPr id="3" name="Notes Placeholder 2"/>
+          <p:cNvSpPr>
+            <a:spLocks noGrp="1"/>
+          </p:cNvSpPr>
+          <p:nvPr>
+            <p:ph type="body" idx="3" sz="quarter"/>
+          </p:nvPr>
+        </p:nvSpPr>
+        <p:spPr/>
+        <p:txBody>
+          <a:bodyPr/>
+          <a:lstStyle/>
+          <a:p>
+            <a:r>
+              <a:t>Facilitation — the Topic 8 practice; students write the as-deployed report section AND rehearse the</a:t>
+            </a:r>
+          </a:p>
+          <a:p>
+            <a:r>
+              <a:t>sign-off conversation for the PRACTICE engagement (the website vehicle).</a:t>
+            </a:r>
+          </a:p>
+          <a:p>
+            <a:r>
+              <a:t>Tell students, in these words: "For the practice engagement, write the as-deployed / test-results</a:t>
+            </a:r>
+          </a:p>
+          <a:p>
+            <a:r>
+              <a:t>section of the Deployment Report — highlight the changes from the approved design. Then rehearse the</a:t>
+            </a:r>
+          </a:p>
+          <a:p>
+            <a:r>
+              <a:t>final sign-off conversation to a mock panel: walk the report, confirm the goals met, and obtain</a:t>
+            </a:r>
+          </a:p>
+          <a:p>
+            <a:r>
+              <a:t>acceptance."</a:t>
+            </a:r>
+          </a:p>
+          <a:p>
+            <a:r>
+              <a:t>Steps (put on the board):</a:t>
+            </a:r>
+          </a:p>
+          <a:p>
+            <a:r>
+              <a:t>1. Write the as-deployed architecture + test results section; highlight and justify each change from</a:t>
+            </a:r>
+          </a:p>
+          <a:p>
+            <a:r>
+              <a:t>the approved design.</a:t>
+            </a:r>
+          </a:p>
+          <a:p>
+            <a:r>
+              <a:t>2. Prepare to present it to a non-technical panel — goals met, in plain language.</a:t>
+            </a:r>
+          </a:p>
+          <a:p>
+            <a:r>
+              <a:t>3. Rehearse the sign-off conversation; obtain (mock) acceptance and record who/what/when.</a:t>
+            </a:r>
+          </a:p>
+          <a:p>
+            <a:r>
+              <a:t>Must produce: an as-deployed / test-results report section (changes highlighted) plus a rehearsed</a:t>
+            </a:r>
+          </a:p>
+          <a:p>
+            <a:r>
+              <a:t>sign-off with a recorded acceptance — the practice run of the AT3 finalisation.</a:t>
+            </a:r>
+          </a:p>
+          <a:p>
+            <a:r>
+              <a:t>Timing: ~30 min. Where they get stuck: the report reads as the approved DESIGN rather than what was</a:t>
+            </a:r>
+          </a:p>
+          <a:p>
+            <a:r>
+              <a:t>actually deployed — push "what actually ran, and where did it differ?"; and in the sign-off they slip</a:t>
+            </a:r>
+          </a:p>
+          <a:p>
+            <a:r>
+              <a:t>into jargon — make them confirm goals for the AUDIENCE.</a:t>
+            </a:r>
+          </a:p>
+          <a:p>
+            <a:r>
+              <a:t>Share-back prompt: pick one pair, have them run 60 seconds of the sign-off; ask the room whether the</a:t>
+            </a:r>
+          </a:p>
+          <a:p>
+            <a:r>
+              <a:t>goals were shown met in plain language.</a:t>
+            </a:r>
+          </a:p>
+          <a:p>
+            <a:r>
+              <a:t>No-leakage note: the website is the PRACTICE vehicle — AT3 assesses the same finalisation on the</a:t>
+            </a:r>
+          </a:p>
+          <a:p>
+            <a:r>
+              <a:t>Ledgerline implementation (comparable, not identical); keep them on the practice engagement.</a:t>
+            </a:r>
+          </a:p>
+        </p:txBody>
+      </p:sp>
+      <p:sp>
+        <p:nvSpPr>
+          <p:cNvPr id="4" name="Slide Number Placeholder 3"/>
+          <p:cNvSpPr>
+            <a:spLocks noGrp="1"/>
+          </p:cNvSpPr>
+          <p:nvPr>
+            <p:ph type="sldNum" idx="5" sz="quarter"/>
+          </p:nvPr>
+        </p:nvSpPr>
+        <p:spPr/>
+      </p:sp>
+    </p:spTree>
+  </p:cSld>
+  <p:clrMapOvr>
+    <a:masterClrMapping/>
+  </p:clrMapOvr>
+</p:notes>
 </file>
 
 <file path=ppt/slideLayouts/slideLayout1.xml><?xml version="1.0" encoding="utf-8"?>
@@ -8897,4 +10372,324 @@
   </a:objectDefaults>
   <a:extraClrSchemeLst/>
 </a:theme>
+</file>
+
+<file path=ppt/theme/theme2.xml><?xml version="1.0" encoding="utf-8"?>
+<a:theme xmlns:a="http://schemas.openxmlformats.org/drawingml/2006/main" name="Office Theme">
+  <a:themeElements>
+    <a:clrScheme name="Office">
+      <a:dk1>
+        <a:sysClr val="windowText" lastClr="000000"/>
+      </a:dk1>
+      <a:lt1>
+        <a:sysClr val="window" lastClr="FFFFFF"/>
+      </a:lt1>
+      <a:dk2>
+        <a:srgbClr val="1F497D"/>
+      </a:dk2>
+      <a:lt2>
+        <a:srgbClr val="EEECE1"/>
+      </a:lt2>
+      <a:accent1>
+        <a:srgbClr val="4F81BD"/>
+      </a:accent1>
+      <a:accent2>
+        <a:srgbClr val="C0504D"/>
+      </a:accent2>
+      <a:accent3>
+        <a:srgbClr val="9BBB59"/>
+      </a:accent3>
+      <a:accent4>
+        <a:srgbClr val="8064A2"/>
+      </a:accent4>
+      <a:accent5>
+        <a:srgbClr val="4BACC6"/>
+      </a:accent5>
+      <a:accent6>
+        <a:srgbClr val="F79646"/>
+      </a:accent6>
+      <a:hlink>
+        <a:srgbClr val="0000FF"/>
+      </a:hlink>
+      <a:folHlink>
+        <a:srgbClr val="800080"/>
+      </a:folHlink>
+    </a:clrScheme>
+    <a:fontScheme name="Office">
+      <a:majorFont>
+        <a:latin typeface="Calibri"/>
+        <a:ea typeface=""/>
+        <a:cs typeface=""/>
+        <a:font script="Jpan" typeface="ＭＳ Ｐゴシック"/>
+        <a:font script="Hang" typeface="맑은 고딕"/>
+        <a:font script="Hans" typeface="宋体"/>
+        <a:font script="Hant" typeface="新細明體"/>
+        <a:font script="Arab" typeface="Times New Roman"/>
+        <a:font script="Hebr" typeface="Times New Roman"/>
+        <a:font script="Thai" typeface="Angsana New"/>
+        <a:font script="Ethi" typeface="Nyala"/>
+        <a:font script="Beng" typeface="Vrinda"/>
+        <a:font script="Gujr" typeface="Shruti"/>
+        <a:font script="Khmr" typeface="MoolBoran"/>
+        <a:font script="Knda" typeface="Tunga"/>
+        <a:font script="Guru" typeface="Raavi"/>
+        <a:font script="Cans" typeface="Euphemia"/>
+        <a:font script="Cher" typeface="Plantagenet Cherokee"/>
+        <a:font script="Yiii" typeface="Microsoft Yi Baiti"/>
+        <a:font script="Tibt" typeface="Microsoft Himalaya"/>
+        <a:font script="Thaa" typeface="MV Boli"/>
+        <a:font script="Deva" typeface="Mangal"/>
+        <a:font script="Telu" typeface="Gautami"/>
+        <a:font script="Taml" typeface="Latha"/>
+        <a:font script="Syrc" typeface="Estrangelo Edessa"/>
+        <a:font script="Orya" typeface="Kalinga"/>
+        <a:font script="Mlym" typeface="Kartika"/>
+        <a:font script="Laoo" typeface="DokChampa"/>
+        <a:font script="Sinh" typeface="Iskoola Pota"/>
+        <a:font script="Mong" typeface="Mongolian Baiti"/>
+        <a:font script="Viet" typeface="Times New Roman"/>
+        <a:font script="Uigh" typeface="Microsoft Uighur"/>
+        <a:font script="Geor" typeface="Sylfaen"/>
+      </a:majorFont>
+      <a:minorFont>
+        <a:latin typeface="Calibri"/>
+        <a:ea typeface=""/>
+        <a:cs typeface=""/>
+        <a:font script="Jpan" typeface="ＭＳ Ｐゴシック"/>
+        <a:font script="Hang" typeface="맑은 고딕"/>
+        <a:font script="Hans" typeface="宋体"/>
+        <a:font script="Hant" typeface="新細明體"/>
+        <a:font script="Arab" typeface="Arial"/>
+        <a:font script="Hebr" typeface="Arial"/>
+        <a:font script="Thai" typeface="Cordia New"/>
+        <a:font script="Ethi" typeface="Nyala"/>
+        <a:font script="Beng" typeface="Vrinda"/>
+        <a:font script="Gujr" typeface="Shruti"/>
+        <a:font script="Khmr" typeface="DaunPenh"/>
+        <a:font script="Knda" typeface="Tunga"/>
+        <a:font script="Guru" typeface="Raavi"/>
+        <a:font script="Cans" typeface="Euphemia"/>
+        <a:font script="Cher" typeface="Plantagenet Cherokee"/>
+        <a:font script="Yiii" typeface="Microsoft Yi Baiti"/>
+        <a:font script="Tibt" typeface="Microsoft Himalaya"/>
+        <a:font script="Thaa" typeface="MV Boli"/>
+        <a:font script="Deva" typeface="Mangal"/>
+        <a:font script="Telu" typeface="Gautami"/>
+        <a:font script="Taml" typeface="Latha"/>
+        <a:font script="Syrc" typeface="Estrangelo Edessa"/>
+        <a:font script="Orya" typeface="Kalinga"/>
+        <a:font script="Mlym" typeface="Kartika"/>
+        <a:font script="Laoo" typeface="DokChampa"/>
+        <a:font script="Sinh" typeface="Iskoola Pota"/>
+        <a:font script="Mong" typeface="Mongolian Baiti"/>
+        <a:font script="Viet" typeface="Arial"/>
+        <a:font script="Uigh" typeface="Microsoft Uighur"/>
+        <a:font script="Geor" typeface="Sylfaen"/>
+      </a:minorFont>
+    </a:fontScheme>
+    <a:fmtScheme name="Office">
+      <a:fillStyleLst>
+        <a:solidFill>
+          <a:schemeClr val="phClr"/>
+        </a:solidFill>
+        <a:gradFill rotWithShape="1">
+          <a:gsLst>
+            <a:gs pos="0">
+              <a:schemeClr val="phClr">
+                <a:tint val="50000"/>
+                <a:satMod val="300000"/>
+              </a:schemeClr>
+            </a:gs>
+            <a:gs pos="35000">
+              <a:schemeClr val="phClr">
+                <a:tint val="37000"/>
+                <a:satMod val="300000"/>
+              </a:schemeClr>
+            </a:gs>
+            <a:gs pos="100000">
+              <a:schemeClr val="phClr">
+                <a:tint val="15000"/>
+                <a:satMod val="350000"/>
+              </a:schemeClr>
+            </a:gs>
+          </a:gsLst>
+          <a:lin ang="16200000" scaled="1"/>
+        </a:gradFill>
+        <a:gradFill rotWithShape="1">
+          <a:gsLst>
+            <a:gs pos="0">
+              <a:schemeClr val="phClr">
+                <a:tint val="100000"/>
+                <a:shade val="100000"/>
+                <a:satMod val="130000"/>
+              </a:schemeClr>
+            </a:gs>
+            <a:gs pos="100000">
+              <a:schemeClr val="phClr">
+                <a:tint val="50000"/>
+                <a:shade val="100000"/>
+                <a:satMod val="350000"/>
+              </a:schemeClr>
+            </a:gs>
+          </a:gsLst>
+          <a:lin ang="16200000" scaled="0"/>
+        </a:gradFill>
+      </a:fillStyleLst>
+      <a:lnStyleLst>
+        <a:ln w="9525" cap="flat" cmpd="sng" algn="ctr">
+          <a:solidFill>
+            <a:schemeClr val="phClr">
+              <a:shade val="95000"/>
+              <a:satMod val="105000"/>
+            </a:schemeClr>
+          </a:solidFill>
+          <a:prstDash val="solid"/>
+        </a:ln>
+        <a:ln w="25400" cap="flat" cmpd="sng" algn="ctr">
+          <a:solidFill>
+            <a:schemeClr val="phClr"/>
+          </a:solidFill>
+          <a:prstDash val="solid"/>
+        </a:ln>
+        <a:ln w="38100" cap="flat" cmpd="sng" algn="ctr">
+          <a:solidFill>
+            <a:schemeClr val="phClr"/>
+          </a:solidFill>
+          <a:prstDash val="solid"/>
+        </a:ln>
+      </a:lnStyleLst>
+      <a:effectStyleLst>
+        <a:effectStyle>
+          <a:effectLst>
+            <a:outerShdw blurRad="40000" dist="20000" dir="5400000" rotWithShape="0">
+              <a:srgbClr val="000000">
+                <a:alpha val="38000"/>
+              </a:srgbClr>
+            </a:outerShdw>
+          </a:effectLst>
+        </a:effectStyle>
+        <a:effectStyle>
+          <a:effectLst>
+            <a:outerShdw blurRad="40000" dist="23000" dir="5400000" rotWithShape="0">
+              <a:srgbClr val="000000">
+                <a:alpha val="35000"/>
+              </a:srgbClr>
+            </a:outerShdw>
+          </a:effectLst>
+        </a:effectStyle>
+        <a:effectStyle>
+          <a:effectLst>
+            <a:outerShdw blurRad="40000" dist="23000" dir="5400000" rotWithShape="0">
+              <a:srgbClr val="000000">
+                <a:alpha val="35000"/>
+              </a:srgbClr>
+            </a:outerShdw>
+          </a:effectLst>
+          <a:scene3d>
+            <a:camera prst="orthographicFront">
+              <a:rot lat="0" lon="0" rev="0"/>
+            </a:camera>
+            <a:lightRig rig="threePt" dir="t">
+              <a:rot lat="0" lon="0" rev="1200000"/>
+            </a:lightRig>
+          </a:scene3d>
+          <a:sp3d>
+            <a:bevelT w="63500" h="25400"/>
+          </a:sp3d>
+        </a:effectStyle>
+      </a:effectStyleLst>
+      <a:bgFillStyleLst>
+        <a:solidFill>
+          <a:schemeClr val="phClr"/>
+        </a:solidFill>
+        <a:gradFill rotWithShape="1">
+          <a:gsLst>
+            <a:gs pos="0">
+              <a:schemeClr val="phClr">
+                <a:tint val="40000"/>
+                <a:satMod val="350000"/>
+              </a:schemeClr>
+            </a:gs>
+            <a:gs pos="40000">
+              <a:schemeClr val="phClr">
+                <a:tint val="45000"/>
+                <a:shade val="99000"/>
+                <a:satMod val="350000"/>
+              </a:schemeClr>
+            </a:gs>
+            <a:gs pos="100000">
+              <a:schemeClr val="phClr">
+                <a:shade val="20000"/>
+                <a:satMod val="255000"/>
+              </a:schemeClr>
+            </a:gs>
+          </a:gsLst>
+          <a:path path="circle">
+            <a:fillToRect l="50000" t="-80000" r="50000" b="180000"/>
+          </a:path>
+        </a:gradFill>
+        <a:gradFill rotWithShape="1">
+          <a:gsLst>
+            <a:gs pos="0">
+              <a:schemeClr val="phClr">
+                <a:tint val="80000"/>
+                <a:satMod val="300000"/>
+              </a:schemeClr>
+            </a:gs>
+            <a:gs pos="100000">
+              <a:schemeClr val="phClr">
+                <a:shade val="30000"/>
+                <a:satMod val="200000"/>
+              </a:schemeClr>
+            </a:gs>
+          </a:gsLst>
+          <a:path path="circle">
+            <a:fillToRect l="50000" t="50000" r="50000" b="50000"/>
+          </a:path>
+        </a:gradFill>
+      </a:bgFillStyleLst>
+    </a:fmtScheme>
+  </a:themeElements>
+  <a:objectDefaults>
+    <a:spDef>
+      <a:spPr/>
+      <a:bodyPr/>
+      <a:lstStyle/>
+      <a:style>
+        <a:lnRef idx="1">
+          <a:schemeClr val="accent1"/>
+        </a:lnRef>
+        <a:fillRef idx="3">
+          <a:schemeClr val="accent1"/>
+        </a:fillRef>
+        <a:effectRef idx="2">
+          <a:schemeClr val="accent1"/>
+        </a:effectRef>
+        <a:fontRef idx="minor">
+          <a:schemeClr val="lt1"/>
+        </a:fontRef>
+      </a:style>
+    </a:spDef>
+    <a:lnDef>
+      <a:spPr/>
+      <a:bodyPr/>
+      <a:lstStyle/>
+      <a:style>
+        <a:lnRef idx="2">
+          <a:schemeClr val="accent1"/>
+        </a:lnRef>
+        <a:fillRef idx="0">
+          <a:schemeClr val="accent1"/>
+        </a:fillRef>
+        <a:effectRef idx="1">
+          <a:schemeClr val="accent1"/>
+        </a:effectRef>
+        <a:fontRef idx="minor">
+          <a:schemeClr val="tx1"/>
+        </a:fontRef>
+      </a:style>
+    </a:lnDef>
+  </a:objectDefaults>
+  <a:extraClrSchemeLst/>
+</a:theme>
 </file>
--- a/S1-CL3-Cloud-Infrastructure-Improvement/delivery/topic_08/Topic_08_Slides.pptx
+++ b/S1-CL3-Cloud-Infrastructure-Improvement/delivery/topic_08/Topic_08_Slides.pptx
@@ -5525,7 +5525,7 @@
                 </a:solidFill>
                 <a:latin typeface="Roboto"/>
               </a:rPr>
-              <a:t>This is the cluster's **second** approval: the final sign-off at AT3, on the deployed and tested improvement.</a:t>
+              <a:t>This is the cluster's second approval: the final sign-off at AT3, on the deployed and tested improvement.</a:t>
             </a:r>
           </a:p>
           <a:p>
@@ -5556,7 +5556,7 @@
                 </a:solidFill>
                 <a:latin typeface="Roboto"/>
               </a:rPr>
-              <a:t>The **first** was the AT1 deploy sign-off — the approval to proceed to deployment, on the design (Topic 4).</a:t>
+              <a:t>The first was the AT1 deploy sign-off — the approval to proceed to deployment, on the design (Topic 4).</a:t>
             </a:r>
           </a:p>
           <a:p>
@@ -7304,7 +7304,7 @@
                 </a:solidFill>
                 <a:latin typeface="Roboto"/>
               </a:rPr>
-              <a:t>The deliverable is the **Deployment Report** — the whole system across all four concerns: security, reliability, scalability, cost.</a:t>
+              <a:t>The deliverable is the Deployment Report — the whole system across all four concerns: security, reliability, scalability, cost.</a:t>
             </a:r>
           </a:p>
           <a:p>
@@ -8273,7 +8273,7 @@
                 </a:solidFill>
                 <a:latin typeface="Roboto"/>
               </a:rPr>
-              <a:t>Document the as-deployed architecture and test results, and **highlight the changes and improvements from the approved design** (PC 4.1).</a:t>
+              <a:t>Document the as-deployed architecture and test results, and highlight the changes and improvements from the approved design (PC 4.1).</a:t>
             </a:r>
           </a:p>
           <a:p>
@@ -9857,7 +9857,7 @@
                 </a:solidFill>
                 <a:latin typeface="Roboto"/>
               </a:rPr>
-              <a:t>Describe long-term improvement strategies and their benefits **as applied to the deployed resources** (PC 4.2) — what a next iteration would improve and the benefit it buys.</a:t>
+              <a:t>Describe long-term improvement strategies and their benefits as applied to the deployed resources (PC 4.2) — what a next iteration would improve and the benefit it buys.</a:t>
             </a:r>
           </a:p>
           <a:p>

--- a/S1-CL3-Cloud-Infrastructure-Improvement/delivery/topic_08/Topic_08_Slides.pptx
+++ b/S1-CL3-Cloud-Infrastructure-Improvement/delivery/topic_08/Topic_08_Slides.pptx
@@ -20,6 +20,12 @@
     <p:sldId id="268" r:id="rId20"/>
     <p:sldId id="269" r:id="rId21"/>
     <p:sldId id="270" r:id="rId22"/>
+    <p:sldId id="271" r:id="rId23"/>
+    <p:sldId id="272" r:id="rId24"/>
+    <p:sldId id="273" r:id="rId25"/>
+    <p:sldId id="274" r:id="rId26"/>
+    <p:sldId id="275" r:id="rId27"/>
+    <p:sldId id="276" r:id="rId28"/>
   </p:sldIdLst>
   <p:sldSz cx="12191695" cy="6858000" type="screen4x3"/>
   <p:notesSz cx="6858000" cy="9144000"/>
@@ -516,87 +522,162 @@
           <a:lstStyle/>
           <a:p>
             <a:r>
-              <a:t>Frame Topic 8 as the CLOSE of AT3 and the cluster — Topic 7 built and tested; Topic 8 writes it up and</a:t>
-            </a:r>
-          </a:p>
-          <a:p>
-            <a:r>
-              <a:t>signs it off. No new build.</a:t>
-            </a:r>
-          </a:p>
-          <a:p>
-            <a:r>
-              <a:t>• First bullet: Topic 7 deployed, monitored and tested the improvement; Topic 8 writes it up and closes</a:t>
-            </a:r>
-          </a:p>
-          <a:p>
-            <a:r>
-              <a:t>the cluster.</a:t>
-            </a:r>
-          </a:p>
-          <a:p>
-            <a:r>
-              <a:t>• Second bullet: three moves — document the AS-DEPLOYED system against the approved design, describe</a:t>
-            </a:r>
-          </a:p>
-          <a:p>
-            <a:r>
-              <a:t>the LONG-TERM improvement strategy, and obtain the FINAL SIGN-OFF. Those three are C1, C2, C3.</a:t>
-            </a:r>
-          </a:p>
-          <a:p>
-            <a:r>
-              <a:t>• Third bullet: the deliverable is the DEPLOYMENT REPORT — the whole system across all four concerns:</a:t>
-            </a:r>
-          </a:p>
-          <a:p>
-            <a:r>
-              <a:t>security, reliability, scalability, cost.</a:t>
-            </a:r>
-          </a:p>
-          <a:p>
-            <a:r>
-              <a:t>• Fourth bullet: NO new build — the report is assembled from what you captured LIVE during the Topic 7</a:t>
-            </a:r>
-          </a:p>
-          <a:p>
-            <a:r>
-              <a:t>deploy and test. That's why live capture mattered.</a:t>
-            </a:r>
-          </a:p>
-          <a:p>
-            <a:r>
-              <a:t>Misconception to pre-empt: "documentation is where I finally build the missing bits." No — nothing new</a:t>
-            </a:r>
-          </a:p>
-          <a:p>
-            <a:r>
-              <a:t>is built here; if evidence wasn't captured in Topic 7 you can't manufacture it now. The report assembles</a:t>
-            </a:r>
-          </a:p>
-          <a:p>
-            <a:r>
-              <a:t>what exists.</a:t>
-            </a:r>
-          </a:p>
-          <a:p>
-            <a:r>
-              <a:t>Question to pose: "If you didn't screenshot the SPOF test in Topic 7, can you put it in the report now?"</a:t>
-            </a:r>
-          </a:p>
-          <a:p>
-            <a:r>
-              <a:t>(no — capture was live; reinforces why Topic 7 discipline mattered).</a:t>
-            </a:r>
-          </a:p>
-          <a:p>
-            <a:r>
-              <a:t>UoC/AT3 tie: opens the AT3 finalisation arc — ICTCLD504 el 4; everything today produces the as-deployed</a:t>
-            </a:r>
-          </a:p>
-          <a:p>
-            <a:r>
-              <a:t>report, long-term strategy and sign-off evidenced in AT3.</a:t>
+              <a:t>Workbook tasks 10 to 13, then the written questions Q1–Q2.</a:t>
+            </a:r>
+          </a:p>
+          <a:p>
+            <a:r>
+              <a:t>Thin evidence here is a Topic 7 capture-habit gap surfacing — say so; it's the recurring lesson.</a:t>
+            </a:r>
+          </a:p>
+        </p:txBody>
+      </p:sp>
+      <p:sp>
+        <p:nvSpPr>
+          <p:cNvPr id="4" name="Slide Number Placeholder 3"/>
+          <p:cNvSpPr>
+            <a:spLocks noGrp="1"/>
+          </p:cNvSpPr>
+          <p:nvPr>
+            <p:ph type="sldNum" idx="5" sz="quarter"/>
+          </p:nvPr>
+        </p:nvSpPr>
+        <p:spPr/>
+      </p:sp>
+    </p:spTree>
+  </p:cSld>
+  <p:clrMapOvr>
+    <a:masterClrMapping/>
+  </p:clrMapOvr>
+</p:notes>
+</file>
+
+<file path=ppt/notesSlides/notesSlide10.xml><?xml version="1.0" encoding="utf-8"?>
+<p:notes xmlns:a="http://schemas.openxmlformats.org/drawingml/2006/main" xmlns:p="http://schemas.openxmlformats.org/presentationml/2006/main" xmlns:r="http://schemas.openxmlformats.org/officeDocument/2006/relationships">
+  <p:cSld>
+    <p:spTree>
+      <p:nvGrpSpPr>
+        <p:cNvPr id="1" name=""/>
+        <p:cNvGrpSpPr/>
+        <p:nvPr/>
+      </p:nvGrpSpPr>
+      <p:grpSpPr>
+        <a:xfrm>
+          <a:off x="0" y="0"/>
+          <a:ext cx="0" cy="0"/>
+          <a:chOff x="0" y="0"/>
+          <a:chExt cx="0" cy="0"/>
+        </a:xfrm>
+      </p:grpSpPr>
+      <p:sp>
+        <p:nvSpPr>
+          <p:cNvPr id="2" name="Slide Image Placeholder 1"/>
+          <p:cNvSpPr>
+            <a:spLocks noGrp="1"/>
+          </p:cNvSpPr>
+          <p:nvPr>
+            <p:ph type="sldImg" idx="2"/>
+          </p:nvPr>
+        </p:nvSpPr>
+        <p:spPr/>
+      </p:sp>
+      <p:sp>
+        <p:nvSpPr>
+          <p:cNvPr id="3" name="Notes Placeholder 2"/>
+          <p:cNvSpPr>
+            <a:spLocks noGrp="1"/>
+          </p:cNvSpPr>
+          <p:nvPr>
+            <p:ph type="body" idx="3" sz="quarter"/>
+          </p:nvPr>
+        </p:nvSpPr>
+        <p:spPr/>
+        <p:txBody>
+          <a:bodyPr/>
+          <a:lstStyle/>
+          <a:p>
+            <a:r>
+              <a:t>The assessment carries Q1–Q2; the practice workbook carries none — rehearse with the assessment's, from the practice build.</a:t>
+            </a:r>
+          </a:p>
+          <a:p>
+            <a:r>
+              <a:t>Their task 5–8 test records and task 4 monitoring are the source material.</a:t>
+            </a:r>
+          </a:p>
+        </p:txBody>
+      </p:sp>
+      <p:sp>
+        <p:nvSpPr>
+          <p:cNvPr id="4" name="Slide Number Placeholder 3"/>
+          <p:cNvSpPr>
+            <a:spLocks noGrp="1"/>
+          </p:cNvSpPr>
+          <p:nvPr>
+            <p:ph type="sldNum" idx="5" sz="quarter"/>
+          </p:nvPr>
+        </p:nvSpPr>
+        <p:spPr/>
+      </p:sp>
+    </p:spTree>
+  </p:cSld>
+  <p:clrMapOvr>
+    <a:masterClrMapping/>
+  </p:clrMapOvr>
+</p:notes>
+</file>
+
+<file path=ppt/notesSlides/notesSlide11.xml><?xml version="1.0" encoding="utf-8"?>
+<p:notes xmlns:a="http://schemas.openxmlformats.org/drawingml/2006/main" xmlns:p="http://schemas.openxmlformats.org/presentationml/2006/main" xmlns:r="http://schemas.openxmlformats.org/officeDocument/2006/relationships">
+  <p:cSld>
+    <p:spTree>
+      <p:nvGrpSpPr>
+        <p:cNvPr id="1" name=""/>
+        <p:cNvGrpSpPr/>
+        <p:nvPr/>
+      </p:nvGrpSpPr>
+      <p:grpSpPr>
+        <a:xfrm>
+          <a:off x="0" y="0"/>
+          <a:ext cx="0" cy="0"/>
+          <a:chOff x="0" y="0"/>
+          <a:chExt cx="0" cy="0"/>
+        </a:xfrm>
+      </p:grpSpPr>
+      <p:sp>
+        <p:nvSpPr>
+          <p:cNvPr id="2" name="Slide Image Placeholder 1"/>
+          <p:cNvSpPr>
+            <a:spLocks noGrp="1"/>
+          </p:cNvSpPr>
+          <p:nvPr>
+            <p:ph type="sldImg" idx="2"/>
+          </p:nvPr>
+        </p:nvSpPr>
+        <p:spPr/>
+      </p:sp>
+      <p:sp>
+        <p:nvSpPr>
+          <p:cNvPr id="3" name="Notes Placeholder 2"/>
+          <p:cNvSpPr>
+            <a:spLocks noGrp="1"/>
+          </p:cNvSpPr>
+          <p:nvPr>
+            <p:ph type="body" idx="3" sz="quarter"/>
+          </p:nvPr>
+        </p:nvSpPr>
+        <p:spPr/>
+        <p:txBody>
+          <a:bodyPr/>
+          <a:lstStyle/>
+          <a:p>
+            <a:r>
+              <a:t>Activity = assessment Q1–Q2 rehearsed.</a:t>
+            </a:r>
+          </a:p>
+          <a:p>
+            <a:r>
+              <a:t>Push every answer back to a test they ran or a metric they watched.</a:t>
             </a:r>
           </a:p>
         </p:txBody>
@@ -666,72 +747,7 @@
           <a:lstStyle/>
           <a:p>
             <a:r>
-              <a:t>Open Section 1 — teach what an AS-DEPLOYED record is and what the Deployment Report assembles. PC 4.1</a:t>
-            </a:r>
-          </a:p>
-          <a:p>
-            <a:r>
-              <a:t>and PE 5 land across C1.</a:t>
-            </a:r>
-          </a:p>
-          <a:p>
-            <a:r>
-              <a:t>• First bullet: an as-deployed record documents the system AS IT WAS ACTUALLY DEPLOYED — not the</a:t>
-            </a:r>
-          </a:p>
-          <a:p>
-            <a:r>
-              <a:t>design on paper, the resources actually running. The distinction is the whole idea.</a:t>
-            </a:r>
-          </a:p>
-          <a:p>
-            <a:r>
-              <a:t>• Second bullet: the Deployment Report assembles it — the as-deployed architecture, the test results,</a:t>
-            </a:r>
-          </a:p>
-          <a:p>
-            <a:r>
-              <a:t>the changes from the approved design, and the deployment/testing steps. Name the four parts.</a:t>
-            </a:r>
-          </a:p>
-          <a:p>
-            <a:r>
-              <a:t>• Third bullet: it's COMPLETE and READABLE by someone who wasn't in the room — a reviewer can follow it</a:t>
-            </a:r>
-          </a:p>
-          <a:p>
-            <a:r>
-              <a:t>end to end. Write for the absent reader.</a:t>
-            </a:r>
-          </a:p>
-          <a:p>
-            <a:r>
-              <a:t>Misconception to pre-empt: "as-deployed = the approved design document." No — the point is documenting</a:t>
-            </a:r>
-          </a:p>
-          <a:p>
-            <a:r>
-              <a:t>what ACTUALLY ran (which differs from the design, e.g. DB-tier DR at design level only); copying the</a:t>
-            </a:r>
-          </a:p>
-          <a:p>
-            <a:r>
-              <a:t>design defeats it.</a:t>
-            </a:r>
-          </a:p>
-          <a:p>
-            <a:r>
-              <a:t>Question to pose: "Name one thing that will differ between the approved design and the as-deployed</a:t>
-            </a:r>
-          </a:p>
-          <a:p>
-            <a:r>
-              <a:t>record on this build" (draws out the DB-tier DR / us-east-1 substitution).</a:t>
-            </a:r>
-          </a:p>
-          <a:p>
-            <a:r>
-              <a:t>UoC/AT3 tie: ICTCLD504 PC 4.1 + PE 5 → the as-deployed record and step documentation evidenced in AT3.</a:t>
+              <a:t>Workbook task 10, first half. The differences are not failures — a named, justified difference is exactly what the record is for.</a:t>
             </a:r>
           </a:p>
         </p:txBody>
@@ -801,72 +817,7 @@
           <a:lstStyle/>
           <a:p>
             <a:r>
-              <a:t>The core of C1 — the report must HIGHLIGHT where reality differed from the approved design. PC 4.1</a:t>
-            </a:r>
-          </a:p>
-          <a:p>
-            <a:r>
-              <a:t>lands here.</a:t>
-            </a:r>
-          </a:p>
-          <a:p>
-            <a:r>
-              <a:t>• First bullet: document the as-deployed architecture and test results, and HIGHLIGHT the changes and</a:t>
-            </a:r>
-          </a:p>
-          <a:p>
-            <a:r>
-              <a:t>improvements from the approved design (PC 4.1). Highlighting the deltas is the assessed act.</a:t>
-            </a:r>
-          </a:p>
-          <a:p>
-            <a:r>
-              <a:t>• Second bullet: every difference is NAMED and JUSTIFIED — e.g. DB-tier DR stayed at design level</a:t>
-            </a:r>
-          </a:p>
-          <a:p>
-            <a:r>
-              <a:t>because the lab couldn't modify the database; app-tier Multi-AZ was built and evidenced. Difference +</a:t>
-            </a:r>
-          </a:p>
-          <a:p>
-            <a:r>
-              <a:t>reason, every time.</a:t>
-            </a:r>
-          </a:p>
-          <a:p>
-            <a:r>
-              <a:t>• Third bullet: test results cover ALL FOUR concerns — security, reliability, scalability, cost — each</a:t>
-            </a:r>
-          </a:p>
-          <a:p>
-            <a:r>
-              <a:t>against the goals set in Topic 1. Close the loop back to the AT1 goals.</a:t>
-            </a:r>
-          </a:p>
-          <a:p>
-            <a:r>
-              <a:t>Misconception to pre-empt: "a difference from the design is a failure to hide." No — a named, justified</a:t>
-            </a:r>
-          </a:p>
-          <a:p>
-            <a:r>
-              <a:t>difference is good engineering documentation; the unnamed difference is the problem. Surface them.</a:t>
-            </a:r>
-          </a:p>
-          <a:p>
-            <a:r>
-              <a:t>Question to pose: "The DB-tier DR is design-level, not deployed — how do you write that up so it reads</a:t>
-            </a:r>
-          </a:p>
-          <a:p>
-            <a:r>
-              <a:t>as a justified decision, not a gap?" (rehearses name + justify).</a:t>
-            </a:r>
-          </a:p>
-          <a:p>
-            <a:r>
-              <a:t>UoC/AT3 tie: ICTCLD504 PC 4.1 → the as-deployed-vs-design section of the AT3 report.</a:t>
+              <a:t>Task 10, second half. The repeatability test is the standard: could a stranger re-run the deploy from this record?</a:t>
             </a:r>
           </a:p>
         </p:txBody>
@@ -936,62 +887,12 @@
           <a:lstStyle/>
           <a:p>
             <a:r>
-              <a:t>The step-documentation slide — PE 5 lands here. Teach it as a repeatable record.</a:t>
-            </a:r>
-          </a:p>
-          <a:p>
-            <a:r>
-              <a:t>• First bullet: create the documentation of the DEPLOYMENT AND TESTING STEPS (PE 5) — the step-by-step</a:t>
-            </a:r>
-          </a:p>
-          <a:p>
-            <a:r>
-              <a:t>record of how the improvement was deployed and tested.</a:t>
-            </a:r>
-          </a:p>
-          <a:p>
-            <a:r>
-              <a:t>• Second bullet: written so a reader could REPEAT it — the stacks/changes applied, in order, and each</a:t>
-            </a:r>
-          </a:p>
-          <a:p>
-            <a:r>
-              <a:t>test run with its outcome. Repeatability is the standard.</a:t>
-            </a:r>
-          </a:p>
-          <a:p>
-            <a:r>
-              <a:t>• Third bullet: assembled from the SCREENSHOTS, EXPORTS and LOGS captured as you went in Topic 7 — you</a:t>
-            </a:r>
-          </a:p>
-          <a:p>
-            <a:r>
-              <a:t>can't reconstruct it after the fact. Live capture again.</a:t>
-            </a:r>
-          </a:p>
-          <a:p>
-            <a:r>
-              <a:t>Misconception to pre-empt: "step documentation is a vague summary." No — the bar is 'a reader could</a:t>
-            </a:r>
-          </a:p>
-          <a:p>
-            <a:r>
-              <a:t>repeat it'; a summary that skips the order or the outcomes fails PE 5.</a:t>
-            </a:r>
-          </a:p>
-          <a:p>
-            <a:r>
-              <a:t>Question to pose: "Hand your step doc to someone who wasn't here — could they redeploy and re-test from</a:t>
-            </a:r>
-          </a:p>
-          <a:p>
-            <a:r>
-              <a:t>it alone? What's missing if not?" (tests the repeatability bar).</a:t>
-            </a:r>
-          </a:p>
-          <a:p>
-            <a:r>
-              <a:t>UoC/AT3 tie: ICTCLD504 PE 5 → the deployment/testing-steps documentation evidenced in AT3.</a:t>
+              <a:t>Activity = practice workbook task 10.</a:t>
+            </a:r>
+          </a:p>
+          <a:p>
+            <a:r>
+              <a:t>Every claimed result points at a captured artefact; gaps get noted honestly, not papered over.</a:t>
             </a:r>
           </a:p>
         </p:txBody>
@@ -1061,82 +962,12 @@
           <a:lstStyle/>
           <a:p>
             <a:r>
-              <a:t>Section 2 — LONG-TERM strategy, described (not built). PC 4.2 lands here; contrast with Topic 7's</a:t>
-            </a:r>
-          </a:p>
-          <a:p>
-            <a:r>
-              <a:t>short-term refinements.</a:t>
-            </a:r>
-          </a:p>
-          <a:p>
-            <a:r>
-              <a:t>• First bullet: describe long-term improvement strategies and their benefits AS APPLIED TO the deployed</a:t>
-            </a:r>
-          </a:p>
-          <a:p>
-            <a:r>
-              <a:t>resources (PC 4.2) — what a next iteration would improve and the BENEFIT it buys. Description + benefit,</a:t>
-            </a:r>
-          </a:p>
-          <a:p>
-            <a:r>
-              <a:t>tied to the actual deploy.</a:t>
-            </a:r>
-          </a:p>
-          <a:p>
-            <a:r>
-              <a:t>• Second bullet (the headline): this is where DB-TIER DR lives — built at design level here, it's the</a:t>
-            </a:r>
-          </a:p>
-          <a:p>
-            <a:r>
-              <a:t>headline long-term strategy: cross-Region database resilience and the availability benefit it delivers.</a:t>
-            </a:r>
-          </a:p>
-          <a:p>
-            <a:r>
-              <a:t>• Third bullet: include other future improvements across the four concerns — tighter cost controls,</a:t>
-            </a:r>
-          </a:p>
-          <a:p>
-            <a:r>
-              <a:t>further scalability headroom, security hardening — each tied to a BENEFIT, not a wish-list.</a:t>
-            </a:r>
-          </a:p>
-          <a:p>
-            <a:r>
-              <a:t>Misconception to pre-empt: "long-term strategy is the same as the short-term refinements." No —</a:t>
-            </a:r>
-          </a:p>
-          <a:p>
-            <a:r>
-              <a:t>short-term was APPLIED now on the running stack (Topic 7, PC 3.4); long-term is DESCRIBED for a future</a:t>
-            </a:r>
-          </a:p>
-          <a:p>
-            <a:r>
-              <a:t>iteration (PC 4.2). Different verb, different topic.</a:t>
-            </a:r>
-          </a:p>
-          <a:p>
-            <a:r>
-              <a:t>Question to pose: "DB-tier DR couldn't be deployed in the lab — why does that make it the perfect</a:t>
-            </a:r>
-          </a:p>
-          <a:p>
-            <a:r>
-              <a:t>LONG-TERM strategy item, and what benefit do you cite?" (ties the constraint to the long-term narrative).</a:t>
-            </a:r>
-          </a:p>
-          <a:p>
-            <a:r>
-              <a:t>UoC/AT3 tie: ICTCLD504 PC 4.2 → the long-term-strategy section of the AT3 report; DB-tier DR is the</a:t>
-            </a:r>
-          </a:p>
-          <a:p>
-            <a:r>
-              <a:t>headline item.</a:t>
+              <a:t>Workbook task 11. The short-term/long-term line drawn in Topic 7 pays off: applied then versus described now.</a:t>
+            </a:r>
+          </a:p>
+          <a:p>
+            <a:r>
+              <a:t>The out-of-scope test findings finally get their home.</a:t>
             </a:r>
           </a:p>
         </p:txBody>
@@ -1206,67 +1037,12 @@
           <a:lstStyle/>
           <a:p>
             <a:r>
-              <a:t>Open Section 3 — the FINAL SIGN-OFF, the formal acceptance that closes the cluster. PC 4.3 lands here.</a:t>
-            </a:r>
-          </a:p>
-          <a:p>
-            <a:r>
-              <a:t>• First bullet: obtain final sign-off from the REQUIRED PERSONNEL (PC 4.3) — the formal acceptance of</a:t>
-            </a:r>
-          </a:p>
-          <a:p>
-            <a:r>
-              <a:t>the deployed and tested improvement.</a:t>
-            </a:r>
-          </a:p>
-          <a:p>
-            <a:r>
-              <a:t>• Second bullet: WALK the Deployment Report — the as-deployed system, the test results against the</a:t>
-            </a:r>
-          </a:p>
-          <a:p>
-            <a:r>
-              <a:t>goals, and the long-term strategy — confirm requirements met FOR THE AUDIENCE, not in jargon.</a:t>
-            </a:r>
-          </a:p>
-          <a:p>
-            <a:r>
-              <a:t>• Third bullet: RECORD it — who approved, on what, when — as the closing section of the report. An</a:t>
-            </a:r>
-          </a:p>
-          <a:p>
-            <a:r>
-              <a:t>unrecorded sign-off isn't evidence.</a:t>
-            </a:r>
-          </a:p>
-          <a:p>
-            <a:r>
-              <a:t>Misconception to pre-empt: "sign-off is a rubber stamp at the end." No — you have to demonstrate the</a:t>
-            </a:r>
-          </a:p>
-          <a:p>
-            <a:r>
-              <a:t>goals were met, in the audience's language; the approver accepts on evidence, not assertion.</a:t>
-            </a:r>
-          </a:p>
-          <a:p>
-            <a:r>
-              <a:t>Question to pose: "You're presenting to the YAT sponsor, not an engineer — how do you show 'reliability</a:t>
-            </a:r>
-          </a:p>
-          <a:p>
-            <a:r>
-              <a:t>improved' without the jargon?" (draws out audience-appropriate demonstration).</a:t>
-            </a:r>
-          </a:p>
-          <a:p>
-            <a:r>
-              <a:t>UoC/AT3 tie: ICTCLD504 PC 4.3 (obtain final sign-off from required personnel) → the sign-off record in</a:t>
-            </a:r>
-          </a:p>
-          <a:p>
-            <a:r>
-              <a:t>the AT3 report.</a:t>
+              <a:t>Activity = practice workbook task 11.</a:t>
+            </a:r>
+          </a:p>
+          <a:p>
+            <a:r>
+              <a:t>Each strategy carries a benefit; challenge any that are features without one.</a:t>
             </a:r>
           </a:p>
         </p:txBody>
@@ -1336,77 +1112,12 @@
           <a:lstStyle/>
           <a:p>
             <a:r>
-              <a:t>The clarifier slide — students conflate the cluster's TWO approval moments. Teach the distinction</a:t>
-            </a:r>
-          </a:p>
-          <a:p>
-            <a:r>
-              <a:t>explicitly.</a:t>
-            </a:r>
-          </a:p>
-          <a:p>
-            <a:r>
-              <a:t>• First bullet: this is the cluster's SECOND approval — the final sign-off at AT3, on the DEPLOYED and</a:t>
-            </a:r>
-          </a:p>
-          <a:p>
-            <a:r>
-              <a:t>TESTED improvement.</a:t>
-            </a:r>
-          </a:p>
-          <a:p>
-            <a:r>
-              <a:t>• Second bullet: the FIRST was the AT1 deploy sign-off — the approval to PROCEED to deployment, on the</a:t>
-            </a:r>
-          </a:p>
-          <a:p>
-            <a:r>
-              <a:t>DESIGN (Topic 4). Different object, different moment.</a:t>
-            </a:r>
-          </a:p>
-          <a:p>
-            <a:r>
-              <a:t>• Third bullet: the first gate AUTHORISED the build; this gate ACCEPTS the result and closes the</a:t>
-            </a:r>
-          </a:p>
-          <a:p>
-            <a:r>
-              <a:t>cluster. Authorise vs accept — the two verbs.</a:t>
-            </a:r>
-          </a:p>
-          <a:p>
-            <a:r>
-              <a:t>Misconception to pre-empt: "there's one sign-off at the end." No — there are two: AT1 approved the</a:t>
-            </a:r>
-          </a:p>
-          <a:p>
-            <a:r>
-              <a:t>design to proceed; AT3 accepts the deployed result. Naming which one you're doing is the assessable</a:t>
-            </a:r>
-          </a:p>
-          <a:p>
-            <a:r>
-              <a:t>clarity.</a:t>
-            </a:r>
-          </a:p>
-          <a:p>
-            <a:r>
-              <a:t>Question to pose: "Which sign-off approved a DESIGN, and which accepts a RUNNING SYSTEM — and what's the</a:t>
-            </a:r>
-          </a:p>
-          <a:p>
-            <a:r>
-              <a:t>object of each?" (forces the authorise-vs-accept distinction).</a:t>
-            </a:r>
-          </a:p>
-          <a:p>
-            <a:r>
-              <a:t>UoC/AT3 tie: ICTCLD504 PC 4.3 → the final (second) sign-off in AT3; distinct from the AT1 deploy</a:t>
-            </a:r>
-          </a:p>
-          <a:p>
-            <a:r>
-              <a:t>sign-off (Topic 4).</a:t>
+              <a:t>Workbook task 12. Call back to the Topic 4 sign-off explicitly — authorise versus accept is the distinction students blur.</a:t>
+            </a:r>
+          </a:p>
+          <a:p>
+            <a:r>
+              <a:t>The recorded decision is the evidence, same as every sign-off in the semester.</a:t>
             </a:r>
           </a:p>
         </p:txBody>
@@ -1476,102 +1187,82 @@
           <a:lstStyle/>
           <a:p>
             <a:r>
-              <a:t>Facilitation — the Topic 8 practice; students write the as-deployed report section AND rehearse the</a:t>
-            </a:r>
-          </a:p>
-          <a:p>
-            <a:r>
-              <a:t>sign-off conversation for the PRACTICE engagement (the website vehicle).</a:t>
-            </a:r>
-          </a:p>
-          <a:p>
-            <a:r>
-              <a:t>Tell students, in these words: "For the practice engagement, write the as-deployed / test-results</a:t>
-            </a:r>
-          </a:p>
-          <a:p>
-            <a:r>
-              <a:t>section of the Deployment Report — highlight the changes from the approved design. Then rehearse the</a:t>
-            </a:r>
-          </a:p>
-          <a:p>
-            <a:r>
-              <a:t>final sign-off conversation to a mock panel: walk the report, confirm the goals met, and obtain</a:t>
-            </a:r>
-          </a:p>
-          <a:p>
-            <a:r>
-              <a:t>acceptance."</a:t>
-            </a:r>
-          </a:p>
-          <a:p>
-            <a:r>
-              <a:t>Steps (put on the board):</a:t>
-            </a:r>
-          </a:p>
-          <a:p>
-            <a:r>
-              <a:t>1. Write the as-deployed architecture + test results section; highlight and justify each change from</a:t>
-            </a:r>
-          </a:p>
-          <a:p>
-            <a:r>
-              <a:t>the approved design.</a:t>
-            </a:r>
-          </a:p>
-          <a:p>
-            <a:r>
-              <a:t>2. Prepare to present it to a non-technical panel — goals met, in plain language.</a:t>
-            </a:r>
-          </a:p>
-          <a:p>
-            <a:r>
-              <a:t>3. Rehearse the sign-off conversation; obtain (mock) acceptance and record who/what/when.</a:t>
-            </a:r>
-          </a:p>
-          <a:p>
-            <a:r>
-              <a:t>Must produce: an as-deployed / test-results report section (changes highlighted) plus a rehearsed</a:t>
-            </a:r>
-          </a:p>
-          <a:p>
-            <a:r>
-              <a:t>sign-off with a recorded acceptance — the practice run of the AT3 finalisation.</a:t>
-            </a:r>
-          </a:p>
-          <a:p>
-            <a:r>
-              <a:t>Timing: ~30 min. Where they get stuck: the report reads as the approved DESIGN rather than what was</a:t>
-            </a:r>
-          </a:p>
-          <a:p>
-            <a:r>
-              <a:t>actually deployed — push "what actually ran, and where did it differ?"; and in the sign-off they slip</a:t>
-            </a:r>
-          </a:p>
-          <a:p>
-            <a:r>
-              <a:t>into jargon — make them confirm goals for the AUDIENCE.</a:t>
-            </a:r>
-          </a:p>
-          <a:p>
-            <a:r>
-              <a:t>Share-back prompt: pick one pair, have them run 60 seconds of the sign-off; ask the room whether the</a:t>
-            </a:r>
-          </a:p>
-          <a:p>
-            <a:r>
-              <a:t>goals were shown met in plain language.</a:t>
-            </a:r>
-          </a:p>
-          <a:p>
-            <a:r>
-              <a:t>No-leakage note: the website is the PRACTICE vehicle — AT3 assesses the same finalisation on the</a:t>
-            </a:r>
-          </a:p>
-          <a:p>
-            <a:r>
-              <a:t>Ledgerline implementation (comparable, not identical); keep them on the practice engagement.</a:t>
+              <a:t>Workbook task 13. The confirm-after-delete habit from the whole semester closes the loop here.</a:t>
+            </a:r>
+          </a:p>
+        </p:txBody>
+      </p:sp>
+      <p:sp>
+        <p:nvSpPr>
+          <p:cNvPr id="4" name="Slide Number Placeholder 3"/>
+          <p:cNvSpPr>
+            <a:spLocks noGrp="1"/>
+          </p:cNvSpPr>
+          <p:nvPr>
+            <p:ph type="sldNum" idx="5" sz="quarter"/>
+          </p:nvPr>
+        </p:nvSpPr>
+        <p:spPr/>
+      </p:sp>
+    </p:spTree>
+  </p:cSld>
+  <p:clrMapOvr>
+    <a:masterClrMapping/>
+  </p:clrMapOvr>
+</p:notes>
+</file>
+
+<file path=ppt/notesSlides/notesSlide9.xml><?xml version="1.0" encoding="utf-8"?>
+<p:notes xmlns:a="http://schemas.openxmlformats.org/drawingml/2006/main" xmlns:p="http://schemas.openxmlformats.org/presentationml/2006/main" xmlns:r="http://schemas.openxmlformats.org/officeDocument/2006/relationships">
+  <p:cSld>
+    <p:spTree>
+      <p:nvGrpSpPr>
+        <p:cNvPr id="1" name=""/>
+        <p:cNvGrpSpPr/>
+        <p:nvPr/>
+      </p:nvGrpSpPr>
+      <p:grpSpPr>
+        <a:xfrm>
+          <a:off x="0" y="0"/>
+          <a:ext cx="0" cy="0"/>
+          <a:chOff x="0" y="0"/>
+          <a:chExt cx="0" cy="0"/>
+        </a:xfrm>
+      </p:grpSpPr>
+      <p:sp>
+        <p:nvSpPr>
+          <p:cNvPr id="2" name="Slide Image Placeholder 1"/>
+          <p:cNvSpPr>
+            <a:spLocks noGrp="1"/>
+          </p:cNvSpPr>
+          <p:nvPr>
+            <p:ph type="sldImg" idx="2"/>
+          </p:nvPr>
+        </p:nvSpPr>
+        <p:spPr/>
+      </p:sp>
+      <p:sp>
+        <p:nvSpPr>
+          <p:cNvPr id="3" name="Notes Placeholder 2"/>
+          <p:cNvSpPr>
+            <a:spLocks noGrp="1"/>
+          </p:cNvSpPr>
+          <p:nvPr>
+            <p:ph type="body" idx="3" sz="quarter"/>
+          </p:nvPr>
+        </p:nvSpPr>
+        <p:spPr/>
+        <p:txBody>
+          <a:bodyPr/>
+          <a:lstStyle/>
+          <a:p>
+            <a:r>
+              <a:t>Activity = practice workbook tasks 12–13, sign-off in pairs with roles swapped.</a:t>
+            </a:r>
+          </a:p>
+          <a:p>
+            <a:r>
+              <a:t>Nobody leaves with a stack still running — the teardown confirmation is part of the exercise.</a:t>
             </a:r>
           </a:p>
         </p:txBody>
@@ -4674,7 +4365,7 @@
                 </a:solidFill>
                 <a:latin typeface="Roboto"/>
               </a:rPr>
-              <a:t>Testing, refining and documenting the whole system; final sign-off</a:t>
+              <a:t>Documenting, handover and close</a:t>
             </a:r>
           </a:p>
           <a:p>
@@ -4690,7 +4381,7 @@
                 </a:solidFill>
                 <a:latin typeface="Roboto Light"/>
               </a:rPr>
-              <a:t>Document the as-deployed system against the approved design, describe the long-term strategy, and obtain the final sign-off</a:t>
+              <a:t>Document the as-deployed system, set the long-term strategy, hand over, and take it down</a:t>
             </a:r>
           </a:p>
         </p:txBody>
@@ -4773,13 +4464,13 @@
         <p:spPr>
           <a:xfrm>
             <a:off x="0" y="0"/>
-            <a:ext cx="3931920" cy="6858000"/>
+            <a:ext cx="12191695" cy="1234440"/>
           </a:xfrm>
           <a:prstGeom prst="rect">
             <a:avLst/>
           </a:prstGeom>
           <a:solidFill>
-            <a:srgbClr val="205F61"/>
+            <a:srgbClr val="27B5CE"/>
           </a:solidFill>
           <a:ln>
             <a:noFill/>
@@ -4810,120 +4501,20 @@
       </p:sp>
       <p:sp>
         <p:nvSpPr>
-          <p:cNvPr id="3" name="TextBox 2"/>
-          <p:cNvSpPr txBox="1"/>
-          <p:nvPr/>
-        </p:nvSpPr>
-        <p:spPr>
-          <a:xfrm>
-            <a:off x="365760" y="2103120"/>
-            <a:ext cx="3291840" cy="2194560"/>
-          </a:xfrm>
-          <a:prstGeom prst="rect">
-            <a:avLst/>
-          </a:prstGeom>
-          <a:noFill/>
-        </p:spPr>
-        <p:txBody>
-          <a:bodyPr wrap="square" anchor="t" lIns="0" rIns="0" tIns="0" bIns="0">
-            <a:spAutoFit/>
-          </a:bodyPr>
-          <a:lstStyle/>
-          <a:p>
-            <a:r>
-              <a:rPr sz="13000" b="1" i="0">
-                <a:solidFill>
-                  <a:srgbClr val="FFFFFF"/>
-                </a:solidFill>
-                <a:latin typeface="Roboto"/>
-              </a:rPr>
-              <a:t>03</a:t>
-            </a:r>
-          </a:p>
-        </p:txBody>
-      </p:sp>
-      <p:sp>
-        <p:nvSpPr>
-          <p:cNvPr id="4" name="TextBox 3"/>
-          <p:cNvSpPr txBox="1"/>
-          <p:nvPr/>
-        </p:nvSpPr>
-        <p:spPr>
-          <a:xfrm>
-            <a:off x="4480560" y="2468880"/>
-            <a:ext cx="7132320" cy="2194560"/>
-          </a:xfrm>
-          <a:prstGeom prst="rect">
-            <a:avLst/>
-          </a:prstGeom>
-          <a:noFill/>
-        </p:spPr>
-        <p:txBody>
-          <a:bodyPr wrap="square" anchor="t" lIns="0" rIns="0" tIns="0" bIns="0">
-            <a:spAutoFit/>
-          </a:bodyPr>
-          <a:lstStyle/>
-          <a:p>
-            <a:r>
-              <a:rPr sz="1600" b="1" i="0">
-                <a:solidFill>
-                  <a:srgbClr val="205F61"/>
-                </a:solidFill>
-                <a:latin typeface="Roboto"/>
-              </a:rPr>
-              <a:t>SECTION</a:t>
-            </a:r>
-          </a:p>
-          <a:p>
-            <a:pPr>
-              <a:spcBef>
-                <a:spcPts val="600"/>
-              </a:spcBef>
-            </a:pPr>
-            <a:r>
-              <a:rPr sz="3800" b="1" i="0">
-                <a:solidFill>
-                  <a:srgbClr val="2A2929"/>
-                </a:solidFill>
-                <a:latin typeface="Roboto"/>
-              </a:rPr>
-              <a:t>Final sign-off</a:t>
-            </a:r>
-          </a:p>
-          <a:p>
-            <a:pPr>
-              <a:spcBef>
-                <a:spcPts val="1000"/>
-              </a:spcBef>
-            </a:pPr>
-            <a:r>
-              <a:rPr sz="2000" b="0" i="1">
-                <a:solidFill>
-                  <a:srgbClr val="484848"/>
-                </a:solidFill>
-                <a:latin typeface="Roboto Light"/>
-              </a:rPr>
-              <a:t>get the deployed system accepted</a:t>
-            </a:r>
-          </a:p>
-        </p:txBody>
-      </p:sp>
-      <p:sp>
-        <p:nvSpPr>
-          <p:cNvPr id="5" name="Rectangle 4"/>
+          <p:cNvPr id="3" name="Rounded Rectangle 2"/>
           <p:cNvSpPr/>
           <p:nvPr/>
         </p:nvSpPr>
         <p:spPr>
           <a:xfrm>
-            <a:off x="0" y="6565392"/>
-            <a:ext cx="12191695" cy="38100"/>
-          </a:xfrm>
-          <a:prstGeom prst="rect">
+            <a:off x="640080" y="384048"/>
+            <a:ext cx="1691640" cy="457200"/>
+          </a:xfrm>
+          <a:prstGeom prst="roundRect">
             <a:avLst/>
           </a:prstGeom>
           <a:solidFill>
-            <a:srgbClr val="205F61"/>
+            <a:srgbClr val="2A2929"/>
           </a:solidFill>
           <a:ln>
             <a:noFill/>
@@ -4949,19 +4540,62 @@
           <a:lstStyle/>
           <a:p>
             <a:pPr algn="ctr"/>
-          </a:p>
-        </p:txBody>
-      </p:sp>
-      <p:sp>
-        <p:nvSpPr>
-          <p:cNvPr id="6" name="TextBox 5"/>
+            <a:r>
+              <a:rPr sz="1400" b="1" i="0">
+                <a:solidFill>
+                  <a:srgbClr val="FBB900"/>
+                </a:solidFill>
+                <a:latin typeface="Roboto"/>
+              </a:rPr>
+              <a:t>ACTIVITY</a:t>
+            </a:r>
+          </a:p>
+        </p:txBody>
+      </p:sp>
+      <p:sp>
+        <p:nvSpPr>
+          <p:cNvPr id="4" name="TextBox 3"/>
           <p:cNvSpPr txBox="1"/>
           <p:nvPr/>
         </p:nvSpPr>
         <p:spPr>
           <a:xfrm>
-            <a:off x="502920" y="6400800"/>
-            <a:ext cx="5486400" cy="320040"/>
+            <a:off x="2560320" y="310896"/>
+            <a:ext cx="8961120" cy="685800"/>
+          </a:xfrm>
+          <a:prstGeom prst="rect">
+            <a:avLst/>
+          </a:prstGeom>
+          <a:noFill/>
+        </p:spPr>
+        <p:txBody>
+          <a:bodyPr wrap="square" anchor="ctr" lIns="0" rIns="0" tIns="0" bIns="0">
+            <a:spAutoFit/>
+          </a:bodyPr>
+          <a:lstStyle/>
+          <a:p>
+            <a:r>
+              <a:rPr sz="2600" b="1" i="0">
+                <a:solidFill>
+                  <a:srgbClr val="FFFFFF"/>
+                </a:solidFill>
+                <a:latin typeface="Roboto"/>
+              </a:rPr>
+              <a:t>Describe the strategy</a:t>
+            </a:r>
+          </a:p>
+        </p:txBody>
+      </p:sp>
+      <p:sp>
+        <p:nvSpPr>
+          <p:cNvPr id="5" name="TextBox 4"/>
+          <p:cNvSpPr txBox="1"/>
+          <p:nvPr/>
+        </p:nvSpPr>
+        <p:spPr>
+          <a:xfrm>
+            <a:off x="658368" y="1554480"/>
+            <a:ext cx="10881360" cy="4297680"/>
           </a:xfrm>
           <a:prstGeom prst="rect">
             <a:avLst/>
@@ -4974,24 +4608,112 @@
           </a:bodyPr>
           <a:lstStyle/>
           <a:p>
-            <a:r>
-              <a:rPr sz="1100" b="1" i="0">
+            <a:pPr marL="0" indent="0">
+              <a:lnSpc>
+                <a:spcPct val="105000"/>
+              </a:lnSpc>
+              <a:spcBef>
+                <a:spcPts val="0"/>
+              </a:spcBef>
+              <a:spcAft>
+                <a:spcPts val="1000"/>
+              </a:spcAft>
+            </a:pPr>
+            <a:r>
+              <a:rPr sz="1700" b="1" i="0">
+                <a:solidFill>
+                  <a:srgbClr val="EDAB0C"/>
+                </a:solidFill>
+                <a:latin typeface="Roboto"/>
+              </a:rPr>
+              <a:t>■  </a:t>
+            </a:r>
+            <a:r>
+              <a:rPr sz="1700" b="0" i="0">
                 <a:solidFill>
                   <a:srgbClr val="2A2929"/>
                 </a:solidFill>
                 <a:latin typeface="Roboto"/>
               </a:rPr>
-              <a:t>Kangan </a:t>
-            </a:r>
-            <a:r>
-              <a:rPr sz="1100" b="1" i="0">
-                <a:solidFill>
-                  <a:srgbClr val="D68E10"/>
-                </a:solidFill>
-                <a:latin typeface="Roboto"/>
-              </a:rPr>
-              <a:t>Institute</a:t>
-            </a:r>
+              <a:t>Workbook — task 11.</a:t>
+            </a:r>
+          </a:p>
+          <a:p>
+            <a:pPr marL="0" indent="0">
+              <a:lnSpc>
+                <a:spcPct val="105000"/>
+              </a:lnSpc>
+              <a:spcBef>
+                <a:spcPts val="0"/>
+              </a:spcBef>
+              <a:spcAft>
+                <a:spcPts val="1000"/>
+              </a:spcAft>
+            </a:pPr>
+            <a:r>
+              <a:rPr sz="1700" b="1" i="0">
+                <a:solidFill>
+                  <a:srgbClr val="EDAB0C"/>
+                </a:solidFill>
+                <a:latin typeface="Roboto"/>
+              </a:rPr>
+              <a:t>■  </a:t>
+            </a:r>
+            <a:r>
+              <a:rPr sz="1700" b="0" i="0">
+                <a:solidFill>
+                  <a:srgbClr val="2A2929"/>
+                </a:solidFill>
+                <a:latin typeface="Roboto"/>
+              </a:rPr>
+              <a:t>Describe the long-term improvement strategies for your deployed system and the benefit each delivers.</a:t>
+            </a:r>
+          </a:p>
+        </p:txBody>
+      </p:sp>
+      <p:sp>
+        <p:nvSpPr>
+          <p:cNvPr id="6" name="Rounded Rectangle 5"/>
+          <p:cNvSpPr/>
+          <p:nvPr/>
+        </p:nvSpPr>
+        <p:spPr>
+          <a:xfrm>
+            <a:off x="640080" y="5897880"/>
+            <a:ext cx="4023360" cy="457200"/>
+          </a:xfrm>
+          <a:prstGeom prst="roundRect">
+            <a:avLst/>
+          </a:prstGeom>
+          <a:solidFill>
+            <a:srgbClr val="F9F9F9"/>
+          </a:solidFill>
+          <a:ln w="12700">
+            <a:solidFill>
+              <a:srgbClr val="CCCCCC"/>
+            </a:solidFill>
+          </a:ln>
+          <a:effectLst/>
+        </p:spPr>
+        <p:style>
+          <a:lnRef idx="1">
+            <a:schemeClr val="accent1"/>
+          </a:lnRef>
+          <a:fillRef idx="3">
+            <a:schemeClr val="accent1"/>
+          </a:fillRef>
+          <a:effectRef idx="2">
+            <a:schemeClr val="accent1"/>
+          </a:effectRef>
+          <a:fontRef idx="minor">
+            <a:schemeClr val="lt1"/>
+          </a:fontRef>
+        </p:style>
+        <p:txBody>
+          <a:bodyPr rtlCol="0" anchor="ctr"/>
+          <a:lstStyle/>
+          <a:p>
+            <a:pPr algn="ctr"/>
           </a:p>
         </p:txBody>
       </p:sp>
@@ -5003,8 +4725,86 @@
         </p:nvSpPr>
         <p:spPr>
           <a:xfrm>
-            <a:off x="10515600" y="6400800"/>
-            <a:ext cx="1188720" cy="320040"/>
+            <a:off x="822960" y="5943600"/>
+            <a:ext cx="3657600" cy="365760"/>
+          </a:xfrm>
+          <a:prstGeom prst="rect">
+            <a:avLst/>
+          </a:prstGeom>
+          <a:noFill/>
+        </p:spPr>
+        <p:txBody>
+          <a:bodyPr wrap="square" anchor="ctr" lIns="0" rIns="0" tIns="0" bIns="0">
+            <a:spAutoFit/>
+          </a:bodyPr>
+          <a:lstStyle/>
+          <a:p>
+            <a:r>
+              <a:rPr sz="1500" b="1" i="0">
+                <a:solidFill>
+                  <a:srgbClr val="2A2929"/>
+                </a:solidFill>
+                <a:latin typeface="Roboto"/>
+              </a:rPr>
+              <a:t>⏱  ~20 min</a:t>
+            </a:r>
+          </a:p>
+        </p:txBody>
+      </p:sp>
+      <p:sp>
+        <p:nvSpPr>
+          <p:cNvPr id="8" name="Rectangle 7"/>
+          <p:cNvSpPr/>
+          <p:nvPr/>
+        </p:nvSpPr>
+        <p:spPr>
+          <a:xfrm>
+            <a:off x="0" y="6565392"/>
+            <a:ext cx="12191695" cy="38100"/>
+          </a:xfrm>
+          <a:prstGeom prst="rect">
+            <a:avLst/>
+          </a:prstGeom>
+          <a:solidFill>
+            <a:srgbClr val="27B5CE"/>
+          </a:solidFill>
+          <a:ln>
+            <a:noFill/>
+          </a:ln>
+          <a:effectLst/>
+        </p:spPr>
+        <p:style>
+          <a:lnRef idx="1">
+            <a:schemeClr val="accent1"/>
+          </a:lnRef>
+          <a:fillRef idx="3">
+            <a:schemeClr val="accent1"/>
+          </a:fillRef>
+          <a:effectRef idx="2">
+            <a:schemeClr val="accent1"/>
+          </a:effectRef>
+          <a:fontRef idx="minor">
+            <a:schemeClr val="lt1"/>
+          </a:fontRef>
+        </p:style>
+        <p:txBody>
+          <a:bodyPr rtlCol="0" anchor="ctr"/>
+          <a:lstStyle/>
+          <a:p>
+            <a:pPr algn="ctr"/>
+          </a:p>
+        </p:txBody>
+      </p:sp>
+      <p:sp>
+        <p:nvSpPr>
+          <p:cNvPr id="9" name="TextBox 8"/>
+          <p:cNvSpPr txBox="1"/>
+          <p:nvPr/>
+        </p:nvSpPr>
+        <p:spPr>
+          <a:xfrm>
+            <a:off x="502920" y="6400800"/>
+            <a:ext cx="5486400" cy="320040"/>
           </a:xfrm>
           <a:prstGeom prst="rect">
             <a:avLst/>
@@ -5017,6 +4817,49 @@
           </a:bodyPr>
           <a:lstStyle/>
           <a:p>
+            <a:r>
+              <a:rPr sz="1100" b="1" i="0">
+                <a:solidFill>
+                  <a:srgbClr val="2A2929"/>
+                </a:solidFill>
+                <a:latin typeface="Roboto"/>
+              </a:rPr>
+              <a:t>Kangan </a:t>
+            </a:r>
+            <a:r>
+              <a:rPr sz="1100" b="1" i="0">
+                <a:solidFill>
+                  <a:srgbClr val="D68E10"/>
+                </a:solidFill>
+                <a:latin typeface="Roboto"/>
+              </a:rPr>
+              <a:t>Institute</a:t>
+            </a:r>
+          </a:p>
+        </p:txBody>
+      </p:sp>
+      <p:sp>
+        <p:nvSpPr>
+          <p:cNvPr id="10" name="TextBox 9"/>
+          <p:cNvSpPr txBox="1"/>
+          <p:nvPr/>
+        </p:nvSpPr>
+        <p:spPr>
+          <a:xfrm>
+            <a:off x="10515600" y="6400800"/>
+            <a:ext cx="1188720" cy="320040"/>
+          </a:xfrm>
+          <a:prstGeom prst="rect">
+            <a:avLst/>
+          </a:prstGeom>
+          <a:noFill/>
+        </p:spPr>
+        <p:txBody>
+          <a:bodyPr wrap="square" anchor="t" lIns="0" rIns="0" tIns="0" bIns="0">
+            <a:spAutoFit/>
+          </a:bodyPr>
+          <a:lstStyle/>
+          <a:p>
             <a:pPr algn="r"/>
             <a:r>
               <a:rPr sz="1100" b="0" i="0">
@@ -5025,7 +4868,7 @@
                 </a:solidFill>
                 <a:latin typeface="Roboto"/>
               </a:rPr>
-              <a:t/>
+              <a:t>7</a:t>
             </a:r>
           </a:p>
         </p:txBody>
@@ -5044,7 +4887,7 @@
     <p:bg>
       <p:bgPr>
         <a:solidFill>
-          <a:srgbClr val="FFFFFF"/>
+          <a:srgbClr val="F9F9F9"/>
         </a:solidFill>
         <a:effectLst/>
       </p:bgPr>
@@ -5064,8 +4907,8 @@
         </p:nvSpPr>
         <p:spPr>
           <a:xfrm>
-            <a:off x="640080" y="457200"/>
-            <a:ext cx="10881360" cy="960120"/>
+            <a:off x="640080" y="548640"/>
+            <a:ext cx="10881360" cy="1097280"/>
           </a:xfrm>
           <a:prstGeom prst="rect">
             <a:avLst/>
@@ -5079,13 +4922,29 @@
           <a:lstStyle/>
           <a:p>
             <a:r>
-              <a:rPr sz="2800" b="1" i="0">
+              <a:rPr sz="3200" b="1" i="0">
                 <a:solidFill>
                   <a:srgbClr val="2A2929"/>
                 </a:solidFill>
                 <a:latin typeface="Roboto"/>
               </a:rPr>
-              <a:t>Obtain the final sign-off</a:t>
+              <a:t>Key takeaways</a:t>
+            </a:r>
+          </a:p>
+          <a:p>
+            <a:pPr>
+              <a:spcBef>
+                <a:spcPts val="200"/>
+              </a:spcBef>
+            </a:pPr>
+            <a:r>
+              <a:rPr sz="1800" b="1" i="0">
+                <a:solidFill>
+                  <a:srgbClr val="27B5CE"/>
+                </a:solidFill>
+                <a:latin typeface="Roboto"/>
+              </a:rPr>
+              <a:t>Section 2 · The strategy</a:t>
             </a:r>
           </a:p>
         </p:txBody>
@@ -5098,14 +4957,14 @@
         </p:nvSpPr>
         <p:spPr>
           <a:xfrm>
-            <a:off x="658368" y="1371600"/>
+            <a:off x="658368" y="1600200"/>
             <a:ext cx="1463040" cy="50800"/>
           </a:xfrm>
           <a:prstGeom prst="rect">
             <a:avLst/>
           </a:prstGeom>
           <a:solidFill>
-            <a:srgbClr val="205F61"/>
+            <a:srgbClr val="27B5CE"/>
           </a:solidFill>
           <a:ln>
             <a:noFill/>
@@ -5136,117 +4995,47 @@
       </p:sp>
       <p:sp>
         <p:nvSpPr>
-          <p:cNvPr id="4" name="TextBox 3"/>
-          <p:cNvSpPr txBox="1"/>
-          <p:nvPr/>
-        </p:nvSpPr>
-        <p:spPr>
-          <a:xfrm>
-            <a:off x="658368" y="1691640"/>
-            <a:ext cx="10881360" cy="4480560"/>
-          </a:xfrm>
-          <a:prstGeom prst="rect">
-            <a:avLst/>
-          </a:prstGeom>
-          <a:noFill/>
-        </p:spPr>
-        <p:txBody>
-          <a:bodyPr wrap="square" anchor="ctr" lIns="0" rIns="0" tIns="0" bIns="0">
-            <a:spAutoFit/>
-          </a:bodyPr>
-          <a:lstStyle/>
-          <a:p>
-            <a:pPr marL="0" indent="0">
-              <a:lnSpc>
-                <a:spcPct val="105000"/>
-              </a:lnSpc>
-              <a:spcBef>
-                <a:spcPts val="0"/>
-              </a:spcBef>
-              <a:spcAft>
-                <a:spcPts val="1000"/>
-              </a:spcAft>
-            </a:pPr>
-            <a:r>
-              <a:rPr sz="2400" b="1" i="0">
-                <a:solidFill>
-                  <a:srgbClr val="EDAB0C"/>
-                </a:solidFill>
-                <a:latin typeface="Roboto"/>
-              </a:rPr>
-              <a:t>■  </a:t>
-            </a:r>
-            <a:r>
-              <a:rPr sz="2400" b="0" i="0">
-                <a:solidFill>
-                  <a:srgbClr val="2A2929"/>
-                </a:solidFill>
-                <a:latin typeface="Roboto"/>
-              </a:rPr>
-              <a:t>Obtain final sign-off from the required personnel (PC 4.3) — the formal acceptance of the deployed and tested improvement.</a:t>
-            </a:r>
-          </a:p>
-          <a:p>
-            <a:pPr marL="0" indent="0">
-              <a:lnSpc>
-                <a:spcPct val="105000"/>
-              </a:lnSpc>
-              <a:spcBef>
-                <a:spcPts val="0"/>
-              </a:spcBef>
-              <a:spcAft>
-                <a:spcPts val="1000"/>
-              </a:spcAft>
-            </a:pPr>
-            <a:r>
-              <a:rPr sz="2400" b="1" i="0">
-                <a:solidFill>
-                  <a:srgbClr val="EDAB0C"/>
-                </a:solidFill>
-                <a:latin typeface="Roboto"/>
-              </a:rPr>
-              <a:t>■  </a:t>
-            </a:r>
-            <a:r>
-              <a:rPr sz="2400" b="0" i="0">
-                <a:solidFill>
-                  <a:srgbClr val="2A2929"/>
-                </a:solidFill>
-                <a:latin typeface="Roboto"/>
-              </a:rPr>
-              <a:t>Walk the Deployment Report: the as-deployed system, the test results against the goals, and the long-term strategy — confirm requirements met for the audience, not in jargon.</a:t>
-            </a:r>
-          </a:p>
-          <a:p>
-            <a:pPr marL="0" indent="0">
-              <a:lnSpc>
-                <a:spcPct val="105000"/>
-              </a:lnSpc>
-              <a:spcBef>
-                <a:spcPts val="0"/>
-              </a:spcBef>
-              <a:spcAft>
-                <a:spcPts val="1000"/>
-              </a:spcAft>
-            </a:pPr>
-            <a:r>
-              <a:rPr sz="2400" b="1" i="0">
-                <a:solidFill>
-                  <a:srgbClr val="EDAB0C"/>
-                </a:solidFill>
-                <a:latin typeface="Roboto"/>
-              </a:rPr>
-              <a:t>■  </a:t>
-            </a:r>
-            <a:r>
-              <a:rPr sz="2400" b="0" i="0">
-                <a:solidFill>
-                  <a:srgbClr val="2A2929"/>
-                </a:solidFill>
-                <a:latin typeface="Roboto"/>
-              </a:rPr>
-              <a:t>Record it — who approved, on what, when — as the closing section of the report.</a:t>
-            </a:r>
+          <p:cNvPr id="4" name="Rectangle 3"/>
+          <p:cNvSpPr/>
+          <p:nvPr/>
+        </p:nvSpPr>
+        <p:spPr>
+          <a:xfrm>
+            <a:off x="640080" y="1965960"/>
+            <a:ext cx="10927080" cy="841248"/>
+          </a:xfrm>
+          <a:prstGeom prst="rect">
+            <a:avLst/>
+          </a:prstGeom>
+          <a:solidFill>
+            <a:srgbClr val="FFFFFF"/>
+          </a:solidFill>
+          <a:ln w="12700">
+            <a:solidFill>
+              <a:srgbClr val="CCCCCC"/>
+            </a:solidFill>
+          </a:ln>
+          <a:effectLst/>
+        </p:spPr>
+        <p:style>
+          <a:lnRef idx="1">
+            <a:schemeClr val="accent1"/>
+          </a:lnRef>
+          <a:fillRef idx="3">
+            <a:schemeClr val="accent1"/>
+          </a:fillRef>
+          <a:effectRef idx="2">
+            <a:schemeClr val="accent1"/>
+          </a:effectRef>
+          <a:fontRef idx="minor">
+            <a:schemeClr val="lt1"/>
+          </a:fontRef>
+        </p:style>
+        <p:txBody>
+          <a:bodyPr rtlCol="0" anchor="ctr"/>
+          <a:lstStyle/>
+          <a:p>
+            <a:pPr algn="ctr"/>
           </a:p>
         </p:txBody>
       </p:sp>
@@ -5258,14 +5047,14 @@
         </p:nvSpPr>
         <p:spPr>
           <a:xfrm>
-            <a:off x="0" y="6565392"/>
-            <a:ext cx="12191695" cy="38100"/>
+            <a:off x="640080" y="1965960"/>
+            <a:ext cx="109728" cy="841248"/>
           </a:xfrm>
           <a:prstGeom prst="rect">
             <a:avLst/>
           </a:prstGeom>
           <a:solidFill>
-            <a:srgbClr val="205F61"/>
+            <a:srgbClr val="27B5CE"/>
           </a:solidFill>
           <a:ln>
             <a:noFill/>
@@ -5302,6 +5091,218 @@
         </p:nvSpPr>
         <p:spPr>
           <a:xfrm>
+            <a:off x="960120" y="1965960"/>
+            <a:ext cx="10424160" cy="841248"/>
+          </a:xfrm>
+          <a:prstGeom prst="rect">
+            <a:avLst/>
+          </a:prstGeom>
+          <a:noFill/>
+        </p:spPr>
+        <p:txBody>
+          <a:bodyPr wrap="square" anchor="ctr" lIns="0" rIns="0" tIns="0" bIns="0">
+            <a:spAutoFit/>
+          </a:bodyPr>
+          <a:lstStyle/>
+          <a:p>
+            <a:pPr>
+              <a:lnSpc>
+                <a:spcPct val="100000"/>
+              </a:lnSpc>
+            </a:pPr>
+            <a:r>
+              <a:rPr sz="1700" b="0" i="0">
+                <a:solidFill>
+                  <a:srgbClr val="2A2929"/>
+                </a:solidFill>
+                <a:latin typeface="Roboto"/>
+              </a:rPr>
+              <a:t>Next-iteration improvements, each with its benefit.</a:t>
+            </a:r>
+          </a:p>
+        </p:txBody>
+      </p:sp>
+      <p:sp>
+        <p:nvSpPr>
+          <p:cNvPr id="7" name="Rectangle 6"/>
+          <p:cNvSpPr/>
+          <p:nvPr/>
+        </p:nvSpPr>
+        <p:spPr>
+          <a:xfrm>
+            <a:off x="640080" y="2916936"/>
+            <a:ext cx="10927080" cy="841248"/>
+          </a:xfrm>
+          <a:prstGeom prst="rect">
+            <a:avLst/>
+          </a:prstGeom>
+          <a:solidFill>
+            <a:srgbClr val="FFFFFF"/>
+          </a:solidFill>
+          <a:ln w="12700">
+            <a:solidFill>
+              <a:srgbClr val="CCCCCC"/>
+            </a:solidFill>
+          </a:ln>
+          <a:effectLst/>
+        </p:spPr>
+        <p:style>
+          <a:lnRef idx="1">
+            <a:schemeClr val="accent1"/>
+          </a:lnRef>
+          <a:fillRef idx="3">
+            <a:schemeClr val="accent1"/>
+          </a:fillRef>
+          <a:effectRef idx="2">
+            <a:schemeClr val="accent1"/>
+          </a:effectRef>
+          <a:fontRef idx="minor">
+            <a:schemeClr val="lt1"/>
+          </a:fontRef>
+        </p:style>
+        <p:txBody>
+          <a:bodyPr rtlCol="0" anchor="ctr"/>
+          <a:lstStyle/>
+          <a:p>
+            <a:pPr algn="ctr"/>
+          </a:p>
+        </p:txBody>
+      </p:sp>
+      <p:sp>
+        <p:nvSpPr>
+          <p:cNvPr id="8" name="Rectangle 7"/>
+          <p:cNvSpPr/>
+          <p:nvPr/>
+        </p:nvSpPr>
+        <p:spPr>
+          <a:xfrm>
+            <a:off x="640080" y="2916936"/>
+            <a:ext cx="109728" cy="841248"/>
+          </a:xfrm>
+          <a:prstGeom prst="rect">
+            <a:avLst/>
+          </a:prstGeom>
+          <a:solidFill>
+            <a:srgbClr val="27B5CE"/>
+          </a:solidFill>
+          <a:ln>
+            <a:noFill/>
+          </a:ln>
+          <a:effectLst/>
+        </p:spPr>
+        <p:style>
+          <a:lnRef idx="1">
+            <a:schemeClr val="accent1"/>
+          </a:lnRef>
+          <a:fillRef idx="3">
+            <a:schemeClr val="accent1"/>
+          </a:fillRef>
+          <a:effectRef idx="2">
+            <a:schemeClr val="accent1"/>
+          </a:effectRef>
+          <a:fontRef idx="minor">
+            <a:schemeClr val="lt1"/>
+          </a:fontRef>
+        </p:style>
+        <p:txBody>
+          <a:bodyPr rtlCol="0" anchor="ctr"/>
+          <a:lstStyle/>
+          <a:p>
+            <a:pPr algn="ctr"/>
+          </a:p>
+        </p:txBody>
+      </p:sp>
+      <p:sp>
+        <p:nvSpPr>
+          <p:cNvPr id="9" name="TextBox 8"/>
+          <p:cNvSpPr txBox="1"/>
+          <p:nvPr/>
+        </p:nvSpPr>
+        <p:spPr>
+          <a:xfrm>
+            <a:off x="960120" y="2916936"/>
+            <a:ext cx="10424160" cy="841248"/>
+          </a:xfrm>
+          <a:prstGeom prst="rect">
+            <a:avLst/>
+          </a:prstGeom>
+          <a:noFill/>
+        </p:spPr>
+        <p:txBody>
+          <a:bodyPr wrap="square" anchor="ctr" lIns="0" rIns="0" tIns="0" bIns="0">
+            <a:spAutoFit/>
+          </a:bodyPr>
+          <a:lstStyle/>
+          <a:p>
+            <a:pPr>
+              <a:lnSpc>
+                <a:spcPct val="100000"/>
+              </a:lnSpc>
+            </a:pPr>
+            <a:r>
+              <a:rPr sz="1700" b="0" i="0">
+                <a:solidFill>
+                  <a:srgbClr val="2A2929"/>
+                </a:solidFill>
+                <a:latin typeface="Roboto"/>
+              </a:rPr>
+              <a:t>The design-level DR is the headline; out-of-scope findings land here.</a:t>
+            </a:r>
+          </a:p>
+        </p:txBody>
+      </p:sp>
+      <p:sp>
+        <p:nvSpPr>
+          <p:cNvPr id="10" name="Rectangle 9"/>
+          <p:cNvSpPr/>
+          <p:nvPr/>
+        </p:nvSpPr>
+        <p:spPr>
+          <a:xfrm>
+            <a:off x="0" y="6565392"/>
+            <a:ext cx="12191695" cy="38100"/>
+          </a:xfrm>
+          <a:prstGeom prst="rect">
+            <a:avLst/>
+          </a:prstGeom>
+          <a:solidFill>
+            <a:srgbClr val="27B5CE"/>
+          </a:solidFill>
+          <a:ln>
+            <a:noFill/>
+          </a:ln>
+          <a:effectLst/>
+        </p:spPr>
+        <p:style>
+          <a:lnRef idx="1">
+            <a:schemeClr val="accent1"/>
+          </a:lnRef>
+          <a:fillRef idx="3">
+            <a:schemeClr val="accent1"/>
+          </a:fillRef>
+          <a:effectRef idx="2">
+            <a:schemeClr val="accent1"/>
+          </a:effectRef>
+          <a:fontRef idx="minor">
+            <a:schemeClr val="lt1"/>
+          </a:fontRef>
+        </p:style>
+        <p:txBody>
+          <a:bodyPr rtlCol="0" anchor="ctr"/>
+          <a:lstStyle/>
+          <a:p>
+            <a:pPr algn="ctr"/>
+          </a:p>
+        </p:txBody>
+      </p:sp>
+      <p:sp>
+        <p:nvSpPr>
+          <p:cNvPr id="11" name="TextBox 10"/>
+          <p:cNvSpPr txBox="1"/>
+          <p:nvPr/>
+        </p:nvSpPr>
+        <p:spPr>
+          <a:xfrm>
             <a:off x="502920" y="6400800"/>
             <a:ext cx="5486400" cy="320040"/>
           </a:xfrm>
@@ -5339,7 +5340,7 @@
       </p:sp>
       <p:sp>
         <p:nvSpPr>
-          <p:cNvPr id="7" name="TextBox 6"/>
+          <p:cNvPr id="12" name="TextBox 11"/>
           <p:cNvSpPr txBox="1"/>
           <p:nvPr/>
         </p:nvSpPr>
@@ -5367,7 +5368,7 @@
                 </a:solidFill>
                 <a:latin typeface="Roboto"/>
               </a:rPr>
-              <a:t>7</a:t>
+              <a:t>8</a:t>
             </a:r>
           </a:p>
         </p:txBody>
@@ -5400,48 +5401,14 @@
       <p:grpSpPr/>
       <p:sp>
         <p:nvSpPr>
-          <p:cNvPr id="2" name="TextBox 1"/>
-          <p:cNvSpPr txBox="1"/>
-          <p:nvPr/>
-        </p:nvSpPr>
-        <p:spPr>
-          <a:xfrm>
-            <a:off x="640080" y="457200"/>
-            <a:ext cx="10881360" cy="960120"/>
-          </a:xfrm>
-          <a:prstGeom prst="rect">
-            <a:avLst/>
-          </a:prstGeom>
-          <a:noFill/>
-        </p:spPr>
-        <p:txBody>
-          <a:bodyPr wrap="square" anchor="t" lIns="0" rIns="0" tIns="0" bIns="0">
-            <a:spAutoFit/>
-          </a:bodyPr>
-          <a:lstStyle/>
-          <a:p>
-            <a:r>
-              <a:rPr sz="2800" b="1" i="0">
-                <a:solidFill>
-                  <a:srgbClr val="2A2929"/>
-                </a:solidFill>
-                <a:latin typeface="Roboto"/>
-              </a:rPr>
-              <a:t>Two approval moments — don't confuse them</a:t>
-            </a:r>
-          </a:p>
-        </p:txBody>
-      </p:sp>
-      <p:sp>
-        <p:nvSpPr>
-          <p:cNvPr id="3" name="Rectangle 2"/>
+          <p:cNvPr id="2" name="Rectangle 1"/>
           <p:cNvSpPr/>
           <p:nvPr/>
         </p:nvSpPr>
         <p:spPr>
           <a:xfrm>
-            <a:off x="658368" y="1371600"/>
-            <a:ext cx="1463040" cy="50800"/>
+            <a:off x="0" y="0"/>
+            <a:ext cx="3931920" cy="6858000"/>
           </a:xfrm>
           <a:prstGeom prst="rect">
             <a:avLst/>
@@ -5478,14 +5445,48 @@
       </p:sp>
       <p:sp>
         <p:nvSpPr>
+          <p:cNvPr id="3" name="TextBox 2"/>
+          <p:cNvSpPr txBox="1"/>
+          <p:nvPr/>
+        </p:nvSpPr>
+        <p:spPr>
+          <a:xfrm>
+            <a:off x="365760" y="2103120"/>
+            <a:ext cx="3291840" cy="2194560"/>
+          </a:xfrm>
+          <a:prstGeom prst="rect">
+            <a:avLst/>
+          </a:prstGeom>
+          <a:noFill/>
+        </p:spPr>
+        <p:txBody>
+          <a:bodyPr wrap="square" anchor="t" lIns="0" rIns="0" tIns="0" bIns="0">
+            <a:spAutoFit/>
+          </a:bodyPr>
+          <a:lstStyle/>
+          <a:p>
+            <a:r>
+              <a:rPr sz="13000" b="1" i="0">
+                <a:solidFill>
+                  <a:srgbClr val="FFFFFF"/>
+                </a:solidFill>
+                <a:latin typeface="Roboto"/>
+              </a:rPr>
+              <a:t>03</a:t>
+            </a:r>
+          </a:p>
+        </p:txBody>
+      </p:sp>
+      <p:sp>
+        <p:nvSpPr>
           <p:cNvPr id="4" name="TextBox 3"/>
           <p:cNvSpPr txBox="1"/>
           <p:nvPr/>
         </p:nvSpPr>
         <p:spPr>
           <a:xfrm>
-            <a:off x="658368" y="1691640"/>
-            <a:ext cx="10881360" cy="4480560"/>
+            <a:off x="4480560" y="2468880"/>
+            <a:ext cx="7132320" cy="2194560"/>
           </a:xfrm>
           <a:prstGeom prst="rect">
             <a:avLst/>
@@ -5493,101 +5494,51 @@
           <a:noFill/>
         </p:spPr>
         <p:txBody>
-          <a:bodyPr wrap="square" anchor="ctr" lIns="0" rIns="0" tIns="0" bIns="0">
+          <a:bodyPr wrap="square" anchor="t" lIns="0" rIns="0" tIns="0" bIns="0">
             <a:spAutoFit/>
           </a:bodyPr>
           <a:lstStyle/>
           <a:p>
-            <a:pPr marL="0" indent="0">
-              <a:lnSpc>
-                <a:spcPct val="105000"/>
-              </a:lnSpc>
+            <a:r>
+              <a:rPr sz="1600" b="1" i="0">
+                <a:solidFill>
+                  <a:srgbClr val="205F61"/>
+                </a:solidFill>
+                <a:latin typeface="Roboto"/>
+              </a:rPr>
+              <a:t>SECTION</a:t>
+            </a:r>
+          </a:p>
+          <a:p>
+            <a:pPr>
               <a:spcBef>
-                <a:spcPts val="0"/>
+                <a:spcPts val="600"/>
               </a:spcBef>
-              <a:spcAft>
+            </a:pPr>
+            <a:r>
+              <a:rPr sz="3800" b="1" i="0">
+                <a:solidFill>
+                  <a:srgbClr val="2A2929"/>
+                </a:solidFill>
+                <a:latin typeface="Roboto"/>
+              </a:rPr>
+              <a:t>Hand over, sign off, take it down</a:t>
+            </a:r>
+          </a:p>
+          <a:p>
+            <a:pPr>
+              <a:spcBef>
                 <a:spcPts val="1000"/>
-              </a:spcAft>
+              </a:spcBef>
             </a:pPr>
             <a:r>
-              <a:rPr sz="2400" b="1" i="0">
-                <a:solidFill>
-                  <a:srgbClr val="EDAB0C"/>
-                </a:solidFill>
-                <a:latin typeface="Roboto"/>
-              </a:rPr>
-              <a:t>■  </a:t>
-            </a:r>
-            <a:r>
-              <a:rPr sz="2400" b="0" i="0">
-                <a:solidFill>
-                  <a:srgbClr val="2A2929"/>
-                </a:solidFill>
-                <a:latin typeface="Roboto"/>
-              </a:rPr>
-              <a:t>This is the cluster's second approval: the final sign-off at AT3, on the deployed and tested improvement.</a:t>
-            </a:r>
-          </a:p>
-          <a:p>
-            <a:pPr marL="0" indent="0">
-              <a:lnSpc>
-                <a:spcPct val="105000"/>
-              </a:lnSpc>
-              <a:spcBef>
-                <a:spcPts val="0"/>
-              </a:spcBef>
-              <a:spcAft>
-                <a:spcPts val="1000"/>
-              </a:spcAft>
-            </a:pPr>
-            <a:r>
-              <a:rPr sz="2400" b="1" i="0">
-                <a:solidFill>
-                  <a:srgbClr val="EDAB0C"/>
-                </a:solidFill>
-                <a:latin typeface="Roboto"/>
-              </a:rPr>
-              <a:t>■  </a:t>
-            </a:r>
-            <a:r>
-              <a:rPr sz="2400" b="0" i="0">
-                <a:solidFill>
-                  <a:srgbClr val="2A2929"/>
-                </a:solidFill>
-                <a:latin typeface="Roboto"/>
-              </a:rPr>
-              <a:t>The first was the AT1 deploy sign-off — the approval to proceed to deployment, on the design (Topic 4).</a:t>
-            </a:r>
-          </a:p>
-          <a:p>
-            <a:pPr marL="0" indent="0">
-              <a:lnSpc>
-                <a:spcPct val="105000"/>
-              </a:lnSpc>
-              <a:spcBef>
-                <a:spcPts val="0"/>
-              </a:spcBef>
-              <a:spcAft>
-                <a:spcPts val="1000"/>
-              </a:spcAft>
-            </a:pPr>
-            <a:r>
-              <a:rPr sz="2400" b="1" i="0">
-                <a:solidFill>
-                  <a:srgbClr val="EDAB0C"/>
-                </a:solidFill>
-                <a:latin typeface="Roboto"/>
-              </a:rPr>
-              <a:t>■  </a:t>
-            </a:r>
-            <a:r>
-              <a:rPr sz="2400" b="0" i="0">
-                <a:solidFill>
-                  <a:srgbClr val="2A2929"/>
-                </a:solidFill>
-                <a:latin typeface="Roboto"/>
-              </a:rPr>
-              <a:t>The first gate authorised the build; this gate accepts the result and closes the cluster.</a:t>
+              <a:rPr sz="2000" b="0" i="1">
+                <a:solidFill>
+                  <a:srgbClr val="484848"/>
+                </a:solidFill>
+                <a:latin typeface="Roboto Light"/>
+              </a:rPr>
+              <a:t>accepted, recorded, removed</a:t>
             </a:r>
           </a:p>
         </p:txBody>
@@ -5709,7 +5660,7 @@
                 </a:solidFill>
                 <a:latin typeface="Roboto"/>
               </a:rPr>
-              <a:t>8</a:t>
+              <a:t/>
             </a:r>
           </a:p>
         </p:txBody>
@@ -5742,14 +5693,48 @@
       <p:grpSpPr/>
       <p:sp>
         <p:nvSpPr>
-          <p:cNvPr id="2" name="Rectangle 1"/>
+          <p:cNvPr id="2" name="TextBox 1"/>
+          <p:cNvSpPr txBox="1"/>
+          <p:nvPr/>
+        </p:nvSpPr>
+        <p:spPr>
+          <a:xfrm>
+            <a:off x="640080" y="457200"/>
+            <a:ext cx="10881360" cy="960120"/>
+          </a:xfrm>
+          <a:prstGeom prst="rect">
+            <a:avLst/>
+          </a:prstGeom>
+          <a:noFill/>
+        </p:spPr>
+        <p:txBody>
+          <a:bodyPr wrap="square" anchor="t" lIns="0" rIns="0" tIns="0" bIns="0">
+            <a:spAutoFit/>
+          </a:bodyPr>
+          <a:lstStyle/>
+          <a:p>
+            <a:r>
+              <a:rPr sz="2800" b="1" i="0">
+                <a:solidFill>
+                  <a:srgbClr val="2A2929"/>
+                </a:solidFill>
+                <a:latin typeface="Roboto"/>
+              </a:rPr>
+              <a:t>The final sign-off</a:t>
+            </a:r>
+          </a:p>
+        </p:txBody>
+      </p:sp>
+      <p:sp>
+        <p:nvSpPr>
+          <p:cNvPr id="3" name="Rectangle 2"/>
           <p:cNvSpPr/>
           <p:nvPr/>
         </p:nvSpPr>
         <p:spPr>
           <a:xfrm>
-            <a:off x="0" y="0"/>
-            <a:ext cx="12191695" cy="1234440"/>
+            <a:off x="658368" y="1371600"/>
+            <a:ext cx="1463040" cy="50800"/>
           </a:xfrm>
           <a:prstGeom prst="rect">
             <a:avLst/>
@@ -5786,67 +5771,14 @@
       </p:sp>
       <p:sp>
         <p:nvSpPr>
-          <p:cNvPr id="3" name="Rounded Rectangle 2"/>
-          <p:cNvSpPr/>
-          <p:nvPr/>
-        </p:nvSpPr>
-        <p:spPr>
-          <a:xfrm>
-            <a:off x="640080" y="384048"/>
-            <a:ext cx="1691640" cy="457200"/>
-          </a:xfrm>
-          <a:prstGeom prst="roundRect">
-            <a:avLst/>
-          </a:prstGeom>
-          <a:solidFill>
-            <a:srgbClr val="2A2929"/>
-          </a:solidFill>
-          <a:ln>
-            <a:noFill/>
-          </a:ln>
-          <a:effectLst/>
-        </p:spPr>
-        <p:style>
-          <a:lnRef idx="1">
-            <a:schemeClr val="accent1"/>
-          </a:lnRef>
-          <a:fillRef idx="3">
-            <a:schemeClr val="accent1"/>
-          </a:fillRef>
-          <a:effectRef idx="2">
-            <a:schemeClr val="accent1"/>
-          </a:effectRef>
-          <a:fontRef idx="minor">
-            <a:schemeClr val="lt1"/>
-          </a:fontRef>
-        </p:style>
-        <p:txBody>
-          <a:bodyPr rtlCol="0" anchor="ctr"/>
-          <a:lstStyle/>
-          <a:p>
-            <a:pPr algn="ctr"/>
-            <a:r>
-              <a:rPr sz="1400" b="1" i="0">
-                <a:solidFill>
-                  <a:srgbClr val="FBB900"/>
-                </a:solidFill>
-                <a:latin typeface="Roboto"/>
-              </a:rPr>
-              <a:t>ACTIVITY</a:t>
-            </a:r>
-          </a:p>
-        </p:txBody>
-      </p:sp>
-      <p:sp>
-        <p:nvSpPr>
           <p:cNvPr id="4" name="TextBox 3"/>
           <p:cNvSpPr txBox="1"/>
           <p:nvPr/>
         </p:nvSpPr>
         <p:spPr>
           <a:xfrm>
-            <a:off x="2560320" y="310896"/>
-            <a:ext cx="8961120" cy="685800"/>
+            <a:off x="658368" y="1691640"/>
+            <a:ext cx="10881360" cy="4480560"/>
           </a:xfrm>
           <a:prstGeom prst="rect">
             <a:avLst/>
@@ -5855,40 +5787,6 @@
         </p:spPr>
         <p:txBody>
           <a:bodyPr wrap="square" anchor="ctr" lIns="0" rIns="0" tIns="0" bIns="0">
-            <a:spAutoFit/>
-          </a:bodyPr>
-          <a:lstStyle/>
-          <a:p>
-            <a:r>
-              <a:rPr sz="2600" b="1" i="0">
-                <a:solidFill>
-                  <a:srgbClr val="FFFFFF"/>
-                </a:solidFill>
-                <a:latin typeface="Roboto"/>
-              </a:rPr>
-              <a:t>Write the report section &amp; rehearse the final sign-off</a:t>
-            </a:r>
-          </a:p>
-        </p:txBody>
-      </p:sp>
-      <p:sp>
-        <p:nvSpPr>
-          <p:cNvPr id="5" name="TextBox 4"/>
-          <p:cNvSpPr txBox="1"/>
-          <p:nvPr/>
-        </p:nvSpPr>
-        <p:spPr>
-          <a:xfrm>
-            <a:off x="658368" y="1554480"/>
-            <a:ext cx="10881360" cy="4297680"/>
-          </a:xfrm>
-          <a:prstGeom prst="rect">
-            <a:avLst/>
-          </a:prstGeom>
-          <a:noFill/>
-        </p:spPr>
-        <p:txBody>
-          <a:bodyPr wrap="square" anchor="t" lIns="0" rIns="0" tIns="0" bIns="0">
             <a:spAutoFit/>
           </a:bodyPr>
           <a:lstStyle/>
@@ -5905,7 +5803,7 @@
               </a:spcAft>
             </a:pPr>
             <a:r>
-              <a:rPr sz="1700" b="1" i="0">
+              <a:rPr sz="2400" b="1" i="0">
                 <a:solidFill>
                   <a:srgbClr val="EDAB0C"/>
                 </a:solidFill>
@@ -5914,13 +5812,13 @@
               <a:t>■  </a:t>
             </a:r>
             <a:r>
-              <a:rPr sz="1700" b="0" i="0">
+              <a:rPr sz="2400" b="0" i="0">
                 <a:solidFill>
                   <a:srgbClr val="2A2929"/>
                 </a:solidFill>
                 <a:latin typeface="Roboto"/>
               </a:rPr>
-              <a:t>For the practice engagement (the website vehicle), write the as-deployed / test-results section of the Deployment Report — highlight the changes from the approved design.</a:t>
+              <a:t>Walk the client through the record: the as-deployed system, the results against the goals, the long-term strategy — plain language for the audience.</a:t>
             </a:r>
           </a:p>
           <a:p>
@@ -5936,7 +5834,7 @@
               </a:spcAft>
             </a:pPr>
             <a:r>
-              <a:rPr sz="1700" b="1" i="0">
+              <a:rPr sz="2400" b="1" i="0">
                 <a:solidFill>
                   <a:srgbClr val="EDAB0C"/>
                 </a:solidFill>
@@ -5945,13 +5843,13 @@
               <a:t>■  </a:t>
             </a:r>
             <a:r>
-              <a:rPr sz="1700" b="0" i="0">
+              <a:rPr sz="2400" b="0" i="0">
                 <a:solidFill>
                   <a:srgbClr val="2A2929"/>
                 </a:solidFill>
                 <a:latin typeface="Roboto"/>
               </a:rPr>
-              <a:t>Rehearse the final sign-off conversation to a mock panel: walk the report, confirm the goals met, and obtain acceptance.</a:t>
+              <a:t>This is the cluster's second approval: it accepts the deployed and tested result. The first approved the design; different moment, different question.</a:t>
             </a:r>
           </a:p>
           <a:p>
@@ -5967,6 +5865,681 @@
               </a:spcAft>
             </a:pPr>
             <a:r>
+              <a:rPr sz="2400" b="1" i="0">
+                <a:solidFill>
+                  <a:srgbClr val="EDAB0C"/>
+                </a:solidFill>
+                <a:latin typeface="Roboto"/>
+              </a:rPr>
+              <a:t>■  </a:t>
+            </a:r>
+            <a:r>
+              <a:rPr sz="2400" b="0" i="0">
+                <a:solidFill>
+                  <a:srgbClr val="2A2929"/>
+                </a:solidFill>
+                <a:latin typeface="Roboto"/>
+              </a:rPr>
+              <a:t>Record the decision — who accepted, what, when — conditions and all.</a:t>
+            </a:r>
+          </a:p>
+        </p:txBody>
+      </p:sp>
+      <p:sp>
+        <p:nvSpPr>
+          <p:cNvPr id="5" name="Rectangle 4"/>
+          <p:cNvSpPr/>
+          <p:nvPr/>
+        </p:nvSpPr>
+        <p:spPr>
+          <a:xfrm>
+            <a:off x="0" y="6565392"/>
+            <a:ext cx="12191695" cy="38100"/>
+          </a:xfrm>
+          <a:prstGeom prst="rect">
+            <a:avLst/>
+          </a:prstGeom>
+          <a:solidFill>
+            <a:srgbClr val="205F61"/>
+          </a:solidFill>
+          <a:ln>
+            <a:noFill/>
+          </a:ln>
+          <a:effectLst/>
+        </p:spPr>
+        <p:style>
+          <a:lnRef idx="1">
+            <a:schemeClr val="accent1"/>
+          </a:lnRef>
+          <a:fillRef idx="3">
+            <a:schemeClr val="accent1"/>
+          </a:fillRef>
+          <a:effectRef idx="2">
+            <a:schemeClr val="accent1"/>
+          </a:effectRef>
+          <a:fontRef idx="minor">
+            <a:schemeClr val="lt1"/>
+          </a:fontRef>
+        </p:style>
+        <p:txBody>
+          <a:bodyPr rtlCol="0" anchor="ctr"/>
+          <a:lstStyle/>
+          <a:p>
+            <a:pPr algn="ctr"/>
+          </a:p>
+        </p:txBody>
+      </p:sp>
+      <p:sp>
+        <p:nvSpPr>
+          <p:cNvPr id="6" name="TextBox 5"/>
+          <p:cNvSpPr txBox="1"/>
+          <p:nvPr/>
+        </p:nvSpPr>
+        <p:spPr>
+          <a:xfrm>
+            <a:off x="502920" y="6400800"/>
+            <a:ext cx="5486400" cy="320040"/>
+          </a:xfrm>
+          <a:prstGeom prst="rect">
+            <a:avLst/>
+          </a:prstGeom>
+          <a:noFill/>
+        </p:spPr>
+        <p:txBody>
+          <a:bodyPr wrap="square" anchor="t" lIns="0" rIns="0" tIns="0" bIns="0">
+            <a:spAutoFit/>
+          </a:bodyPr>
+          <a:lstStyle/>
+          <a:p>
+            <a:r>
+              <a:rPr sz="1100" b="1" i="0">
+                <a:solidFill>
+                  <a:srgbClr val="2A2929"/>
+                </a:solidFill>
+                <a:latin typeface="Roboto"/>
+              </a:rPr>
+              <a:t>Kangan </a:t>
+            </a:r>
+            <a:r>
+              <a:rPr sz="1100" b="1" i="0">
+                <a:solidFill>
+                  <a:srgbClr val="D68E10"/>
+                </a:solidFill>
+                <a:latin typeface="Roboto"/>
+              </a:rPr>
+              <a:t>Institute</a:t>
+            </a:r>
+          </a:p>
+        </p:txBody>
+      </p:sp>
+      <p:sp>
+        <p:nvSpPr>
+          <p:cNvPr id="7" name="TextBox 6"/>
+          <p:cNvSpPr txBox="1"/>
+          <p:nvPr/>
+        </p:nvSpPr>
+        <p:spPr>
+          <a:xfrm>
+            <a:off x="10515600" y="6400800"/>
+            <a:ext cx="1188720" cy="320040"/>
+          </a:xfrm>
+          <a:prstGeom prst="rect">
+            <a:avLst/>
+          </a:prstGeom>
+          <a:noFill/>
+        </p:spPr>
+        <p:txBody>
+          <a:bodyPr wrap="square" anchor="t" lIns="0" rIns="0" tIns="0" bIns="0">
+            <a:spAutoFit/>
+          </a:bodyPr>
+          <a:lstStyle/>
+          <a:p>
+            <a:pPr algn="r"/>
+            <a:r>
+              <a:rPr sz="1100" b="0" i="0">
+                <a:solidFill>
+                  <a:srgbClr val="7A7A7A"/>
+                </a:solidFill>
+                <a:latin typeface="Roboto"/>
+              </a:rPr>
+              <a:t>9</a:t>
+            </a:r>
+          </a:p>
+        </p:txBody>
+      </p:sp>
+    </p:spTree>
+  </p:cSld>
+  <p:clrMapOvr>
+    <a:masterClrMapping/>
+  </p:clrMapOvr>
+</p:sld>
+</file>
+
+<file path=ppt/slides/slide14.xml><?xml version="1.0" encoding="utf-8"?>
+<p:sld xmlns:a="http://schemas.openxmlformats.org/drawingml/2006/main" xmlns:p="http://schemas.openxmlformats.org/presentationml/2006/main" xmlns:r="http://schemas.openxmlformats.org/officeDocument/2006/relationships">
+  <p:cSld>
+    <p:bg>
+      <p:bgPr>
+        <a:solidFill>
+          <a:srgbClr val="FFFFFF"/>
+        </a:solidFill>
+        <a:effectLst/>
+      </p:bgPr>
+    </p:bg>
+    <p:spTree>
+      <p:nvGrpSpPr>
+        <p:cNvPr id="1" name=""/>
+        <p:cNvGrpSpPr/>
+        <p:nvPr/>
+      </p:nvGrpSpPr>
+      <p:grpSpPr/>
+      <p:sp>
+        <p:nvSpPr>
+          <p:cNvPr id="2" name="TextBox 1"/>
+          <p:cNvSpPr txBox="1"/>
+          <p:nvPr/>
+        </p:nvSpPr>
+        <p:spPr>
+          <a:xfrm>
+            <a:off x="640080" y="457200"/>
+            <a:ext cx="10881360" cy="960120"/>
+          </a:xfrm>
+          <a:prstGeom prst="rect">
+            <a:avLst/>
+          </a:prstGeom>
+          <a:noFill/>
+        </p:spPr>
+        <p:txBody>
+          <a:bodyPr wrap="square" anchor="t" lIns="0" rIns="0" tIns="0" bIns="0">
+            <a:spAutoFit/>
+          </a:bodyPr>
+          <a:lstStyle/>
+          <a:p>
+            <a:r>
+              <a:rPr sz="2800" b="1" i="0">
+                <a:solidFill>
+                  <a:srgbClr val="2A2929"/>
+                </a:solidFill>
+                <a:latin typeface="Roboto"/>
+              </a:rPr>
+              <a:t>Remove what you deployed</a:t>
+            </a:r>
+          </a:p>
+        </p:txBody>
+      </p:sp>
+      <p:sp>
+        <p:nvSpPr>
+          <p:cNvPr id="3" name="Rectangle 2"/>
+          <p:cNvSpPr/>
+          <p:nvPr/>
+        </p:nvSpPr>
+        <p:spPr>
+          <a:xfrm>
+            <a:off x="658368" y="1371600"/>
+            <a:ext cx="1463040" cy="50800"/>
+          </a:xfrm>
+          <a:prstGeom prst="rect">
+            <a:avLst/>
+          </a:prstGeom>
+          <a:solidFill>
+            <a:srgbClr val="205F61"/>
+          </a:solidFill>
+          <a:ln>
+            <a:noFill/>
+          </a:ln>
+          <a:effectLst/>
+        </p:spPr>
+        <p:style>
+          <a:lnRef idx="1">
+            <a:schemeClr val="accent1"/>
+          </a:lnRef>
+          <a:fillRef idx="3">
+            <a:schemeClr val="accent1"/>
+          </a:fillRef>
+          <a:effectRef idx="2">
+            <a:schemeClr val="accent1"/>
+          </a:effectRef>
+          <a:fontRef idx="minor">
+            <a:schemeClr val="lt1"/>
+          </a:fontRef>
+        </p:style>
+        <p:txBody>
+          <a:bodyPr rtlCol="0" anchor="ctr"/>
+          <a:lstStyle/>
+          <a:p>
+            <a:pPr algn="ctr"/>
+          </a:p>
+        </p:txBody>
+      </p:sp>
+      <p:sp>
+        <p:nvSpPr>
+          <p:cNvPr id="4" name="TextBox 3"/>
+          <p:cNvSpPr txBox="1"/>
+          <p:nvPr/>
+        </p:nvSpPr>
+        <p:spPr>
+          <a:xfrm>
+            <a:off x="658368" y="1691640"/>
+            <a:ext cx="10881360" cy="4480560"/>
+          </a:xfrm>
+          <a:prstGeom prst="rect">
+            <a:avLst/>
+          </a:prstGeom>
+          <a:noFill/>
+        </p:spPr>
+        <p:txBody>
+          <a:bodyPr wrap="square" anchor="ctr" lIns="0" rIns="0" tIns="0" bIns="0">
+            <a:spAutoFit/>
+          </a:bodyPr>
+          <a:lstStyle/>
+          <a:p>
+            <a:pPr marL="0" indent="0">
+              <a:lnSpc>
+                <a:spcPct val="105000"/>
+              </a:lnSpc>
+              <a:spcBef>
+                <a:spcPts val="0"/>
+              </a:spcBef>
+              <a:spcAft>
+                <a:spcPts val="1000"/>
+              </a:spcAft>
+            </a:pPr>
+            <a:r>
+              <a:rPr sz="2400" b="1" i="0">
+                <a:solidFill>
+                  <a:srgbClr val="EDAB0C"/>
+                </a:solidFill>
+                <a:latin typeface="Roboto"/>
+              </a:rPr>
+              <a:t>■  </a:t>
+            </a:r>
+            <a:r>
+              <a:rPr sz="2400" b="0" i="0">
+                <a:solidFill>
+                  <a:srgbClr val="2A2929"/>
+                </a:solidFill>
+                <a:latin typeface="Roboto"/>
+              </a:rPr>
+              <a:t>Tear down through the tooling, in reverse dependency order — the stack comes down the way it went up.</a:t>
+            </a:r>
+          </a:p>
+          <a:p>
+            <a:pPr marL="0" indent="0">
+              <a:lnSpc>
+                <a:spcPct val="105000"/>
+              </a:lnSpc>
+              <a:spcBef>
+                <a:spcPts val="0"/>
+              </a:spcBef>
+              <a:spcAft>
+                <a:spcPts val="1000"/>
+              </a:spcAft>
+            </a:pPr>
+            <a:r>
+              <a:rPr sz="2400" b="1" i="0">
+                <a:solidFill>
+                  <a:srgbClr val="EDAB0C"/>
+                </a:solidFill>
+                <a:latin typeface="Roboto"/>
+              </a:rPr>
+              <a:t>■  </a:t>
+            </a:r>
+            <a:r>
+              <a:rPr sz="2400" b="0" i="0">
+                <a:solidFill>
+                  <a:srgbClr val="2A2929"/>
+                </a:solidFill>
+                <a:latin typeface="Roboto"/>
+              </a:rPr>
+              <a:t>Confirm the removal; orphans keep billing and block rebuilds.</a:t>
+            </a:r>
+          </a:p>
+          <a:p>
+            <a:pPr marL="0" indent="0">
+              <a:lnSpc>
+                <a:spcPct val="105000"/>
+              </a:lnSpc>
+              <a:spcBef>
+                <a:spcPts val="0"/>
+              </a:spcBef>
+              <a:spcAft>
+                <a:spcPts val="1000"/>
+              </a:spcAft>
+            </a:pPr>
+            <a:r>
+              <a:rPr sz="2400" b="1" i="0">
+                <a:solidFill>
+                  <a:srgbClr val="EDAB0C"/>
+                </a:solidFill>
+                <a:latin typeface="Roboto"/>
+              </a:rPr>
+              <a:t>■  </a:t>
+            </a:r>
+            <a:r>
+              <a:rPr sz="2400" b="0" i="0">
+                <a:solidFill>
+                  <a:srgbClr val="2A2929"/>
+                </a:solidFill>
+                <a:latin typeface="Roboto"/>
+              </a:rPr>
+              <a:t>An engagement ends when the environment is gone and the record survives.</a:t>
+            </a:r>
+          </a:p>
+        </p:txBody>
+      </p:sp>
+      <p:sp>
+        <p:nvSpPr>
+          <p:cNvPr id="5" name="Rectangle 4"/>
+          <p:cNvSpPr/>
+          <p:nvPr/>
+        </p:nvSpPr>
+        <p:spPr>
+          <a:xfrm>
+            <a:off x="0" y="6565392"/>
+            <a:ext cx="12191695" cy="38100"/>
+          </a:xfrm>
+          <a:prstGeom prst="rect">
+            <a:avLst/>
+          </a:prstGeom>
+          <a:solidFill>
+            <a:srgbClr val="205F61"/>
+          </a:solidFill>
+          <a:ln>
+            <a:noFill/>
+          </a:ln>
+          <a:effectLst/>
+        </p:spPr>
+        <p:style>
+          <a:lnRef idx="1">
+            <a:schemeClr val="accent1"/>
+          </a:lnRef>
+          <a:fillRef idx="3">
+            <a:schemeClr val="accent1"/>
+          </a:fillRef>
+          <a:effectRef idx="2">
+            <a:schemeClr val="accent1"/>
+          </a:effectRef>
+          <a:fontRef idx="minor">
+            <a:schemeClr val="lt1"/>
+          </a:fontRef>
+        </p:style>
+        <p:txBody>
+          <a:bodyPr rtlCol="0" anchor="ctr"/>
+          <a:lstStyle/>
+          <a:p>
+            <a:pPr algn="ctr"/>
+          </a:p>
+        </p:txBody>
+      </p:sp>
+      <p:sp>
+        <p:nvSpPr>
+          <p:cNvPr id="6" name="TextBox 5"/>
+          <p:cNvSpPr txBox="1"/>
+          <p:nvPr/>
+        </p:nvSpPr>
+        <p:spPr>
+          <a:xfrm>
+            <a:off x="502920" y="6400800"/>
+            <a:ext cx="5486400" cy="320040"/>
+          </a:xfrm>
+          <a:prstGeom prst="rect">
+            <a:avLst/>
+          </a:prstGeom>
+          <a:noFill/>
+        </p:spPr>
+        <p:txBody>
+          <a:bodyPr wrap="square" anchor="t" lIns="0" rIns="0" tIns="0" bIns="0">
+            <a:spAutoFit/>
+          </a:bodyPr>
+          <a:lstStyle/>
+          <a:p>
+            <a:r>
+              <a:rPr sz="1100" b="1" i="0">
+                <a:solidFill>
+                  <a:srgbClr val="2A2929"/>
+                </a:solidFill>
+                <a:latin typeface="Roboto"/>
+              </a:rPr>
+              <a:t>Kangan </a:t>
+            </a:r>
+            <a:r>
+              <a:rPr sz="1100" b="1" i="0">
+                <a:solidFill>
+                  <a:srgbClr val="D68E10"/>
+                </a:solidFill>
+                <a:latin typeface="Roboto"/>
+              </a:rPr>
+              <a:t>Institute</a:t>
+            </a:r>
+          </a:p>
+        </p:txBody>
+      </p:sp>
+      <p:sp>
+        <p:nvSpPr>
+          <p:cNvPr id="7" name="TextBox 6"/>
+          <p:cNvSpPr txBox="1"/>
+          <p:nvPr/>
+        </p:nvSpPr>
+        <p:spPr>
+          <a:xfrm>
+            <a:off x="10515600" y="6400800"/>
+            <a:ext cx="1188720" cy="320040"/>
+          </a:xfrm>
+          <a:prstGeom prst="rect">
+            <a:avLst/>
+          </a:prstGeom>
+          <a:noFill/>
+        </p:spPr>
+        <p:txBody>
+          <a:bodyPr wrap="square" anchor="t" lIns="0" rIns="0" tIns="0" bIns="0">
+            <a:spAutoFit/>
+          </a:bodyPr>
+          <a:lstStyle/>
+          <a:p>
+            <a:pPr algn="r"/>
+            <a:r>
+              <a:rPr sz="1100" b="0" i="0">
+                <a:solidFill>
+                  <a:srgbClr val="7A7A7A"/>
+                </a:solidFill>
+                <a:latin typeface="Roboto"/>
+              </a:rPr>
+              <a:t>10</a:t>
+            </a:r>
+          </a:p>
+        </p:txBody>
+      </p:sp>
+    </p:spTree>
+  </p:cSld>
+  <p:clrMapOvr>
+    <a:masterClrMapping/>
+  </p:clrMapOvr>
+</p:sld>
+</file>
+
+<file path=ppt/slides/slide15.xml><?xml version="1.0" encoding="utf-8"?>
+<p:sld xmlns:a="http://schemas.openxmlformats.org/drawingml/2006/main" xmlns:p="http://schemas.openxmlformats.org/presentationml/2006/main" xmlns:r="http://schemas.openxmlformats.org/officeDocument/2006/relationships">
+  <p:cSld>
+    <p:bg>
+      <p:bgPr>
+        <a:solidFill>
+          <a:srgbClr val="FFFFFF"/>
+        </a:solidFill>
+        <a:effectLst/>
+      </p:bgPr>
+    </p:bg>
+    <p:spTree>
+      <p:nvGrpSpPr>
+        <p:cNvPr id="1" name=""/>
+        <p:cNvGrpSpPr/>
+        <p:nvPr/>
+      </p:nvGrpSpPr>
+      <p:grpSpPr/>
+      <p:sp>
+        <p:nvSpPr>
+          <p:cNvPr id="2" name="Rectangle 1"/>
+          <p:cNvSpPr/>
+          <p:nvPr/>
+        </p:nvSpPr>
+        <p:spPr>
+          <a:xfrm>
+            <a:off x="0" y="0"/>
+            <a:ext cx="12191695" cy="1234440"/>
+          </a:xfrm>
+          <a:prstGeom prst="rect">
+            <a:avLst/>
+          </a:prstGeom>
+          <a:solidFill>
+            <a:srgbClr val="205F61"/>
+          </a:solidFill>
+          <a:ln>
+            <a:noFill/>
+          </a:ln>
+          <a:effectLst/>
+        </p:spPr>
+        <p:style>
+          <a:lnRef idx="1">
+            <a:schemeClr val="accent1"/>
+          </a:lnRef>
+          <a:fillRef idx="3">
+            <a:schemeClr val="accent1"/>
+          </a:fillRef>
+          <a:effectRef idx="2">
+            <a:schemeClr val="accent1"/>
+          </a:effectRef>
+          <a:fontRef idx="minor">
+            <a:schemeClr val="lt1"/>
+          </a:fontRef>
+        </p:style>
+        <p:txBody>
+          <a:bodyPr rtlCol="0" anchor="ctr"/>
+          <a:lstStyle/>
+          <a:p>
+            <a:pPr algn="ctr"/>
+          </a:p>
+        </p:txBody>
+      </p:sp>
+      <p:sp>
+        <p:nvSpPr>
+          <p:cNvPr id="3" name="Rounded Rectangle 2"/>
+          <p:cNvSpPr/>
+          <p:nvPr/>
+        </p:nvSpPr>
+        <p:spPr>
+          <a:xfrm>
+            <a:off x="640080" y="384048"/>
+            <a:ext cx="1691640" cy="457200"/>
+          </a:xfrm>
+          <a:prstGeom prst="roundRect">
+            <a:avLst/>
+          </a:prstGeom>
+          <a:solidFill>
+            <a:srgbClr val="2A2929"/>
+          </a:solidFill>
+          <a:ln>
+            <a:noFill/>
+          </a:ln>
+          <a:effectLst/>
+        </p:spPr>
+        <p:style>
+          <a:lnRef idx="1">
+            <a:schemeClr val="accent1"/>
+          </a:lnRef>
+          <a:fillRef idx="3">
+            <a:schemeClr val="accent1"/>
+          </a:fillRef>
+          <a:effectRef idx="2">
+            <a:schemeClr val="accent1"/>
+          </a:effectRef>
+          <a:fontRef idx="minor">
+            <a:schemeClr val="lt1"/>
+          </a:fontRef>
+        </p:style>
+        <p:txBody>
+          <a:bodyPr rtlCol="0" anchor="ctr"/>
+          <a:lstStyle/>
+          <a:p>
+            <a:pPr algn="ctr"/>
+            <a:r>
+              <a:rPr sz="1400" b="1" i="0">
+                <a:solidFill>
+                  <a:srgbClr val="FBB900"/>
+                </a:solidFill>
+                <a:latin typeface="Roboto"/>
+              </a:rPr>
+              <a:t>ACTIVITY</a:t>
+            </a:r>
+          </a:p>
+        </p:txBody>
+      </p:sp>
+      <p:sp>
+        <p:nvSpPr>
+          <p:cNvPr id="4" name="TextBox 3"/>
+          <p:cNvSpPr txBox="1"/>
+          <p:nvPr/>
+        </p:nvSpPr>
+        <p:spPr>
+          <a:xfrm>
+            <a:off x="2560320" y="310896"/>
+            <a:ext cx="8961120" cy="685800"/>
+          </a:xfrm>
+          <a:prstGeom prst="rect">
+            <a:avLst/>
+          </a:prstGeom>
+          <a:noFill/>
+        </p:spPr>
+        <p:txBody>
+          <a:bodyPr wrap="square" anchor="ctr" lIns="0" rIns="0" tIns="0" bIns="0">
+            <a:spAutoFit/>
+          </a:bodyPr>
+          <a:lstStyle/>
+          <a:p>
+            <a:r>
+              <a:rPr sz="2600" b="1" i="0">
+                <a:solidFill>
+                  <a:srgbClr val="FFFFFF"/>
+                </a:solidFill>
+                <a:latin typeface="Roboto"/>
+              </a:rPr>
+              <a:t>Hand over, sign off, tear down</a:t>
+            </a:r>
+          </a:p>
+        </p:txBody>
+      </p:sp>
+      <p:sp>
+        <p:nvSpPr>
+          <p:cNvPr id="5" name="TextBox 4"/>
+          <p:cNvSpPr txBox="1"/>
+          <p:nvPr/>
+        </p:nvSpPr>
+        <p:spPr>
+          <a:xfrm>
+            <a:off x="658368" y="1554480"/>
+            <a:ext cx="10881360" cy="4297680"/>
+          </a:xfrm>
+          <a:prstGeom prst="rect">
+            <a:avLst/>
+          </a:prstGeom>
+          <a:noFill/>
+        </p:spPr>
+        <p:txBody>
+          <a:bodyPr wrap="square" anchor="t" lIns="0" rIns="0" tIns="0" bIns="0">
+            <a:spAutoFit/>
+          </a:bodyPr>
+          <a:lstStyle/>
+          <a:p>
+            <a:pPr marL="0" indent="0">
+              <a:lnSpc>
+                <a:spcPct val="105000"/>
+              </a:lnSpc>
+              <a:spcBef>
+                <a:spcPts val="0"/>
+              </a:spcBef>
+              <a:spcAft>
+                <a:spcPts val="1000"/>
+              </a:spcAft>
+            </a:pPr>
+            <a:r>
               <a:rPr sz="1700" b="1" i="0">
                 <a:solidFill>
                   <a:srgbClr val="EDAB0C"/>
@@ -5982,7 +6555,38 @@
                 </a:solidFill>
                 <a:latin typeface="Roboto"/>
               </a:rPr>
-              <a:t>Produce it before finalising the assessed Ledgerline report — this is the practice run.</a:t>
+              <a:t>Workbook — tasks 12 and 13.</a:t>
+            </a:r>
+          </a:p>
+          <a:p>
+            <a:pPr marL="0" indent="0">
+              <a:lnSpc>
+                <a:spcPct val="105000"/>
+              </a:lnSpc>
+              <a:spcBef>
+                <a:spcPts val="0"/>
+              </a:spcBef>
+              <a:spcAft>
+                <a:spcPts val="1000"/>
+              </a:spcAft>
+            </a:pPr>
+            <a:r>
+              <a:rPr sz="1700" b="1" i="0">
+                <a:solidFill>
+                  <a:srgbClr val="EDAB0C"/>
+                </a:solidFill>
+                <a:latin typeface="Roboto"/>
+              </a:rPr>
+              <a:t>■  </a:t>
+            </a:r>
+            <a:r>
+              <a:rPr sz="1700" b="0" i="0">
+                <a:solidFill>
+                  <a:srgbClr val="2A2929"/>
+                </a:solidFill>
+                <a:latin typeface="Roboto"/>
+              </a:rPr>
+              <a:t>Walk your client through the build in pairs and record the sign-off decision, then remove everything you deployed and confirm nothing remains.</a:t>
             </a:r>
           </a:p>
         </p:txBody>
@@ -6062,7 +6666,7 @@
                 </a:solidFill>
                 <a:latin typeface="Roboto"/>
               </a:rPr>
-              <a:t>⏱  ~30 min</a:t>
+              <a:t>⏱  ~35 min</a:t>
             </a:r>
           </a:p>
         </p:txBody>
@@ -6184,7 +6788,7 @@
                 </a:solidFill>
                 <a:latin typeface="Roboto"/>
               </a:rPr>
-              <a:t>9</a:t>
+              <a:t>11</a:t>
             </a:r>
           </a:p>
         </p:txBody>
@@ -6197,7 +6801,7 @@
 </p:sld>
 </file>
 
-<file path=ppt/slides/slide14.xml><?xml version="1.0" encoding="utf-8"?>
+<file path=ppt/slides/slide16.xml><?xml version="1.0" encoding="utf-8"?>
 <p:sld xmlns:a="http://schemas.openxmlformats.org/drawingml/2006/main" xmlns:p="http://schemas.openxmlformats.org/presentationml/2006/main" xmlns:r="http://schemas.openxmlformats.org/officeDocument/2006/relationships">
   <p:cSld>
     <p:bg>
@@ -6260,7 +6864,7 @@
                 </a:solidFill>
                 <a:latin typeface="Roboto"/>
               </a:rPr>
-              <a:t>Topic 8 · Key takeaways</a:t>
+              <a:t>Section 3 · The close</a:t>
             </a:r>
           </a:p>
         </p:txBody>
@@ -6433,7 +7037,7 @@
                 </a:solidFill>
                 <a:latin typeface="Roboto"/>
               </a:rPr>
-              <a:t>Document the as-deployed architecture and test results, highlighting the changes and improvements from the approved design.</a:t>
+              <a:t>Plain-language walkthrough, decision recorded.</a:t>
             </a:r>
           </a:p>
         </p:txBody>
@@ -6562,7 +7166,7 @@
                 </a:solidFill>
                 <a:latin typeface="Roboto"/>
               </a:rPr>
-              <a:t>Create the deployment and testing step documentation from your live-captured evidence — repeatable by a reader.</a:t>
+              <a:t>Second approval accepts the result.</a:t>
             </a:r>
           </a:p>
         </p:txBody>
@@ -6691,7 +7295,7 @@
                 </a:solidFill>
                 <a:latin typeface="Roboto"/>
               </a:rPr>
-              <a:t>Describe the long-term improvement strategy and its benefits — the DB-tier DR and other next-iteration improvements.</a:t>
+              <a:t>Removed through the tooling, confirmed gone.</a:t>
             </a:r>
           </a:p>
         </p:txBody>
@@ -6704,54 +7308,8 @@
         </p:nvSpPr>
         <p:spPr>
           <a:xfrm>
-            <a:off x="640080" y="4818888"/>
-            <a:ext cx="10927080" cy="841248"/>
-          </a:xfrm>
-          <a:prstGeom prst="rect">
-            <a:avLst/>
-          </a:prstGeom>
-          <a:solidFill>
-            <a:srgbClr val="FFFFFF"/>
-          </a:solidFill>
-          <a:ln w="12700">
-            <a:solidFill>
-              <a:srgbClr val="CCCCCC"/>
-            </a:solidFill>
-          </a:ln>
-          <a:effectLst/>
-        </p:spPr>
-        <p:style>
-          <a:lnRef idx="1">
-            <a:schemeClr val="accent1"/>
-          </a:lnRef>
-          <a:fillRef idx="3">
-            <a:schemeClr val="accent1"/>
-          </a:fillRef>
-          <a:effectRef idx="2">
-            <a:schemeClr val="accent1"/>
-          </a:effectRef>
-          <a:fontRef idx="minor">
-            <a:schemeClr val="lt1"/>
-          </a:fontRef>
-        </p:style>
-        <p:txBody>
-          <a:bodyPr rtlCol="0" anchor="ctr"/>
-          <a:lstStyle/>
-          <a:p>
-            <a:pPr algn="ctr"/>
-          </a:p>
-        </p:txBody>
-      </p:sp>
-      <p:sp>
-        <p:nvSpPr>
-          <p:cNvPr id="14" name="Rectangle 13"/>
-          <p:cNvSpPr/>
-          <p:nvPr/>
-        </p:nvSpPr>
-        <p:spPr>
-          <a:xfrm>
-            <a:off x="640080" y="4818888"/>
-            <a:ext cx="109728" cy="841248"/>
+            <a:off x="0" y="6565392"/>
+            <a:ext cx="12191695" cy="38100"/>
           </a:xfrm>
           <a:prstGeom prst="rect">
             <a:avLst/>
@@ -6788,90 +7346,7 @@
       </p:sp>
       <p:sp>
         <p:nvSpPr>
-          <p:cNvPr id="15" name="TextBox 14"/>
-          <p:cNvSpPr txBox="1"/>
-          <p:nvPr/>
-        </p:nvSpPr>
-        <p:spPr>
-          <a:xfrm>
-            <a:off x="960120" y="4818888"/>
-            <a:ext cx="10424160" cy="841248"/>
-          </a:xfrm>
-          <a:prstGeom prst="rect">
-            <a:avLst/>
-          </a:prstGeom>
-          <a:noFill/>
-        </p:spPr>
-        <p:txBody>
-          <a:bodyPr wrap="square" anchor="ctr" lIns="0" rIns="0" tIns="0" bIns="0">
-            <a:spAutoFit/>
-          </a:bodyPr>
-          <a:lstStyle/>
-          <a:p>
-            <a:pPr>
-              <a:lnSpc>
-                <a:spcPct val="100000"/>
-              </a:lnSpc>
-            </a:pPr>
-            <a:r>
-              <a:rPr sz="1700" b="0" i="0">
-                <a:solidFill>
-                  <a:srgbClr val="2A2929"/>
-                </a:solidFill>
-                <a:latin typeface="Roboto"/>
-              </a:rPr>
-              <a:t>Obtain and record the final sign-off — the AT3 gate that accepts the deployed system, distinct from the AT1 deploy sign-off.</a:t>
-            </a:r>
-          </a:p>
-        </p:txBody>
-      </p:sp>
-      <p:sp>
-        <p:nvSpPr>
-          <p:cNvPr id="16" name="Rectangle 15"/>
-          <p:cNvSpPr/>
-          <p:nvPr/>
-        </p:nvSpPr>
-        <p:spPr>
-          <a:xfrm>
-            <a:off x="0" y="6565392"/>
-            <a:ext cx="12191695" cy="38100"/>
-          </a:xfrm>
-          <a:prstGeom prst="rect">
-            <a:avLst/>
-          </a:prstGeom>
-          <a:solidFill>
-            <a:srgbClr val="205F61"/>
-          </a:solidFill>
-          <a:ln>
-            <a:noFill/>
-          </a:ln>
-          <a:effectLst/>
-        </p:spPr>
-        <p:style>
-          <a:lnRef idx="1">
-            <a:schemeClr val="accent1"/>
-          </a:lnRef>
-          <a:fillRef idx="3">
-            <a:schemeClr val="accent1"/>
-          </a:fillRef>
-          <a:effectRef idx="2">
-            <a:schemeClr val="accent1"/>
-          </a:effectRef>
-          <a:fontRef idx="minor">
-            <a:schemeClr val="lt1"/>
-          </a:fontRef>
-        </p:style>
-        <p:txBody>
-          <a:bodyPr rtlCol="0" anchor="ctr"/>
-          <a:lstStyle/>
-          <a:p>
-            <a:pPr algn="ctr"/>
-          </a:p>
-        </p:txBody>
-      </p:sp>
-      <p:sp>
-        <p:nvSpPr>
-          <p:cNvPr id="17" name="TextBox 16"/>
+          <p:cNvPr id="14" name="TextBox 13"/>
           <p:cNvSpPr txBox="1"/>
           <p:nvPr/>
         </p:nvSpPr>
@@ -6914,7 +7389,7 @@
       </p:sp>
       <p:sp>
         <p:nvSpPr>
-          <p:cNvPr id="18" name="TextBox 17"/>
+          <p:cNvPr id="15" name="TextBox 14"/>
           <p:cNvSpPr txBox="1"/>
           <p:nvPr/>
         </p:nvSpPr>
@@ -6942,7 +7417,7 @@
                 </a:solidFill>
                 <a:latin typeface="Roboto"/>
               </a:rPr>
-              <a:t>10</a:t>
+              <a:t>12</a:t>
             </a:r>
           </a:p>
         </p:txBody>
@@ -6955,13 +7430,13 @@
 </p:sld>
 </file>
 
-<file path=ppt/slides/slide15.xml><?xml version="1.0" encoding="utf-8"?>
+<file path=ppt/slides/slide17.xml><?xml version="1.0" encoding="utf-8"?>
 <p:sld xmlns:a="http://schemas.openxmlformats.org/drawingml/2006/main" xmlns:p="http://schemas.openxmlformats.org/presentationml/2006/main" xmlns:r="http://schemas.openxmlformats.org/officeDocument/2006/relationships">
   <p:cSld>
     <p:bg>
       <p:bgPr>
         <a:solidFill>
-          <a:srgbClr val="2A2929"/>
+          <a:srgbClr val="FFFFFF"/>
         </a:solidFill>
         <a:effectLst/>
       </p:bgPr>
@@ -6982,13 +7457,13 @@
         <p:spPr>
           <a:xfrm>
             <a:off x="0" y="0"/>
-            <a:ext cx="411480" cy="6858000"/>
+            <a:ext cx="3931920" cy="6858000"/>
           </a:xfrm>
           <a:prstGeom prst="rect">
             <a:avLst/>
           </a:prstGeom>
           <a:solidFill>
-            <a:srgbClr val="EDAB0C"/>
+            <a:srgbClr val="004488"/>
           </a:solidFill>
           <a:ln>
             <a:noFill/>
@@ -7025,8 +7500,8 @@
         </p:nvSpPr>
         <p:spPr>
           <a:xfrm>
-            <a:off x="914400" y="1463040"/>
-            <a:ext cx="10515600" cy="4023360"/>
+            <a:off x="365760" y="2103120"/>
+            <a:ext cx="3291840" cy="2194560"/>
           </a:xfrm>
           <a:prstGeom prst="rect">
             <a:avLst/>
@@ -7040,51 +7515,987 @@
           <a:lstStyle/>
           <a:p>
             <a:r>
-              <a:rPr sz="4000" b="1" i="0">
+              <a:rPr sz="13000" b="1" i="0">
                 <a:solidFill>
                   <a:srgbClr val="FFFFFF"/>
                 </a:solidFill>
                 <a:latin typeface="Roboto"/>
               </a:rPr>
-              <a:t>Cluster complete</a:t>
+              <a:t>04</a:t>
+            </a:r>
+          </a:p>
+        </p:txBody>
+      </p:sp>
+      <p:sp>
+        <p:nvSpPr>
+          <p:cNvPr id="4" name="TextBox 3"/>
+          <p:cNvSpPr txBox="1"/>
+          <p:nvPr/>
+        </p:nvSpPr>
+        <p:spPr>
+          <a:xfrm>
+            <a:off x="4480560" y="2468880"/>
+            <a:ext cx="7132320" cy="2194560"/>
+          </a:xfrm>
+          <a:prstGeom prst="rect">
+            <a:avLst/>
+          </a:prstGeom>
+          <a:noFill/>
+        </p:spPr>
+        <p:txBody>
+          <a:bodyPr wrap="square" anchor="t" lIns="0" rIns="0" tIns="0" bIns="0">
+            <a:spAutoFit/>
+          </a:bodyPr>
+          <a:lstStyle/>
+          <a:p>
+            <a:r>
+              <a:rPr sz="1600" b="1" i="0">
+                <a:solidFill>
+                  <a:srgbClr val="004488"/>
+                </a:solidFill>
+                <a:latin typeface="Roboto"/>
+              </a:rPr>
+              <a:t>SECTION</a:t>
             </a:r>
           </a:p>
           <a:p>
             <a:pPr>
+              <a:spcBef>
+                <a:spcPts val="600"/>
+              </a:spcBef>
+            </a:pPr>
+            <a:r>
+              <a:rPr sz="3800" b="1" i="0">
+                <a:solidFill>
+                  <a:srgbClr val="2A2929"/>
+                </a:solidFill>
+                <a:latin typeface="Roboto"/>
+              </a:rPr>
+              <a:t>The written questions</a:t>
+            </a:r>
+          </a:p>
+          <a:p>
+            <a:pPr>
+              <a:spcBef>
+                <a:spcPts val="1000"/>
+              </a:spcBef>
+            </a:pPr>
+            <a:r>
+              <a:rPr sz="2000" b="0" i="1">
+                <a:solidFill>
+                  <a:srgbClr val="484848"/>
+                </a:solidFill>
+                <a:latin typeface="Roboto Light"/>
+              </a:rPr>
+              <a:t>your build, your evidence</a:t>
+            </a:r>
+          </a:p>
+        </p:txBody>
+      </p:sp>
+      <p:sp>
+        <p:nvSpPr>
+          <p:cNvPr id="5" name="Rectangle 4"/>
+          <p:cNvSpPr/>
+          <p:nvPr/>
+        </p:nvSpPr>
+        <p:spPr>
+          <a:xfrm>
+            <a:off x="0" y="6565392"/>
+            <a:ext cx="12191695" cy="38100"/>
+          </a:xfrm>
+          <a:prstGeom prst="rect">
+            <a:avLst/>
+          </a:prstGeom>
+          <a:solidFill>
+            <a:srgbClr val="004488"/>
+          </a:solidFill>
+          <a:ln>
+            <a:noFill/>
+          </a:ln>
+          <a:effectLst/>
+        </p:spPr>
+        <p:style>
+          <a:lnRef idx="1">
+            <a:schemeClr val="accent1"/>
+          </a:lnRef>
+          <a:fillRef idx="3">
+            <a:schemeClr val="accent1"/>
+          </a:fillRef>
+          <a:effectRef idx="2">
+            <a:schemeClr val="accent1"/>
+          </a:effectRef>
+          <a:fontRef idx="minor">
+            <a:schemeClr val="lt1"/>
+          </a:fontRef>
+        </p:style>
+        <p:txBody>
+          <a:bodyPr rtlCol="0" anchor="ctr"/>
+          <a:lstStyle/>
+          <a:p>
+            <a:pPr algn="ctr"/>
+          </a:p>
+        </p:txBody>
+      </p:sp>
+      <p:sp>
+        <p:nvSpPr>
+          <p:cNvPr id="6" name="TextBox 5"/>
+          <p:cNvSpPr txBox="1"/>
+          <p:nvPr/>
+        </p:nvSpPr>
+        <p:spPr>
+          <a:xfrm>
+            <a:off x="502920" y="6400800"/>
+            <a:ext cx="5486400" cy="320040"/>
+          </a:xfrm>
+          <a:prstGeom prst="rect">
+            <a:avLst/>
+          </a:prstGeom>
+          <a:noFill/>
+        </p:spPr>
+        <p:txBody>
+          <a:bodyPr wrap="square" anchor="t" lIns="0" rIns="0" tIns="0" bIns="0">
+            <a:spAutoFit/>
+          </a:bodyPr>
+          <a:lstStyle/>
+          <a:p>
+            <a:r>
+              <a:rPr sz="1100" b="1" i="0">
+                <a:solidFill>
+                  <a:srgbClr val="2A2929"/>
+                </a:solidFill>
+                <a:latin typeface="Roboto"/>
+              </a:rPr>
+              <a:t>Kangan </a:t>
+            </a:r>
+            <a:r>
+              <a:rPr sz="1100" b="1" i="0">
+                <a:solidFill>
+                  <a:srgbClr val="D68E10"/>
+                </a:solidFill>
+                <a:latin typeface="Roboto"/>
+              </a:rPr>
+              <a:t>Institute</a:t>
+            </a:r>
+          </a:p>
+        </p:txBody>
+      </p:sp>
+      <p:sp>
+        <p:nvSpPr>
+          <p:cNvPr id="7" name="TextBox 6"/>
+          <p:cNvSpPr txBox="1"/>
+          <p:nvPr/>
+        </p:nvSpPr>
+        <p:spPr>
+          <a:xfrm>
+            <a:off x="10515600" y="6400800"/>
+            <a:ext cx="1188720" cy="320040"/>
+          </a:xfrm>
+          <a:prstGeom prst="rect">
+            <a:avLst/>
+          </a:prstGeom>
+          <a:noFill/>
+        </p:spPr>
+        <p:txBody>
+          <a:bodyPr wrap="square" anchor="t" lIns="0" rIns="0" tIns="0" bIns="0">
+            <a:spAutoFit/>
+          </a:bodyPr>
+          <a:lstStyle/>
+          <a:p>
+            <a:pPr algn="r"/>
+            <a:r>
+              <a:rPr sz="1100" b="0" i="0">
+                <a:solidFill>
+                  <a:srgbClr val="7A7A7A"/>
+                </a:solidFill>
+                <a:latin typeface="Roboto"/>
+              </a:rPr>
+              <a:t/>
+            </a:r>
+          </a:p>
+        </p:txBody>
+      </p:sp>
+    </p:spTree>
+  </p:cSld>
+  <p:clrMapOvr>
+    <a:masterClrMapping/>
+  </p:clrMapOvr>
+</p:sld>
+</file>
+
+<file path=ppt/slides/slide18.xml><?xml version="1.0" encoding="utf-8"?>
+<p:sld xmlns:a="http://schemas.openxmlformats.org/drawingml/2006/main" xmlns:p="http://schemas.openxmlformats.org/presentationml/2006/main" xmlns:r="http://schemas.openxmlformats.org/officeDocument/2006/relationships">
+  <p:cSld>
+    <p:bg>
+      <p:bgPr>
+        <a:solidFill>
+          <a:srgbClr val="FFFFFF"/>
+        </a:solidFill>
+        <a:effectLst/>
+      </p:bgPr>
+    </p:bg>
+    <p:spTree>
+      <p:nvGrpSpPr>
+        <p:cNvPr id="1" name=""/>
+        <p:cNvGrpSpPr/>
+        <p:nvPr/>
+      </p:nvGrpSpPr>
+      <p:grpSpPr/>
+      <p:sp>
+        <p:nvSpPr>
+          <p:cNvPr id="2" name="TextBox 1"/>
+          <p:cNvSpPr txBox="1"/>
+          <p:nvPr/>
+        </p:nvSpPr>
+        <p:spPr>
+          <a:xfrm>
+            <a:off x="640080" y="457200"/>
+            <a:ext cx="10881360" cy="960120"/>
+          </a:xfrm>
+          <a:prstGeom prst="rect">
+            <a:avLst/>
+          </a:prstGeom>
+          <a:noFill/>
+        </p:spPr>
+        <p:txBody>
+          <a:bodyPr wrap="square" anchor="t" lIns="0" rIns="0" tIns="0" bIns="0">
+            <a:spAutoFit/>
+          </a:bodyPr>
+          <a:lstStyle/>
+          <a:p>
+            <a:r>
+              <a:rPr sz="2800" b="1" i="0">
+                <a:solidFill>
+                  <a:srgbClr val="2A2929"/>
+                </a:solidFill>
+                <a:latin typeface="Roboto"/>
+              </a:rPr>
+              <a:t>The questions ask about your own build</a:t>
+            </a:r>
+          </a:p>
+        </p:txBody>
+      </p:sp>
+      <p:sp>
+        <p:nvSpPr>
+          <p:cNvPr id="3" name="Rectangle 2"/>
+          <p:cNvSpPr/>
+          <p:nvPr/>
+        </p:nvSpPr>
+        <p:spPr>
+          <a:xfrm>
+            <a:off x="658368" y="1371600"/>
+            <a:ext cx="1463040" cy="50800"/>
+          </a:xfrm>
+          <a:prstGeom prst="rect">
+            <a:avLst/>
+          </a:prstGeom>
+          <a:solidFill>
+            <a:srgbClr val="004488"/>
+          </a:solidFill>
+          <a:ln>
+            <a:noFill/>
+          </a:ln>
+          <a:effectLst/>
+        </p:spPr>
+        <p:style>
+          <a:lnRef idx="1">
+            <a:schemeClr val="accent1"/>
+          </a:lnRef>
+          <a:fillRef idx="3">
+            <a:schemeClr val="accent1"/>
+          </a:fillRef>
+          <a:effectRef idx="2">
+            <a:schemeClr val="accent1"/>
+          </a:effectRef>
+          <a:fontRef idx="minor">
+            <a:schemeClr val="lt1"/>
+          </a:fontRef>
+        </p:style>
+        <p:txBody>
+          <a:bodyPr rtlCol="0" anchor="ctr"/>
+          <a:lstStyle/>
+          <a:p>
+            <a:pPr algn="ctr"/>
+          </a:p>
+        </p:txBody>
+      </p:sp>
+      <p:sp>
+        <p:nvSpPr>
+          <p:cNvPr id="4" name="TextBox 3"/>
+          <p:cNvSpPr txBox="1"/>
+          <p:nvPr/>
+        </p:nvSpPr>
+        <p:spPr>
+          <a:xfrm>
+            <a:off x="658368" y="1691640"/>
+            <a:ext cx="10881360" cy="4480560"/>
+          </a:xfrm>
+          <a:prstGeom prst="rect">
+            <a:avLst/>
+          </a:prstGeom>
+          <a:noFill/>
+        </p:spPr>
+        <p:txBody>
+          <a:bodyPr wrap="square" anchor="ctr" lIns="0" rIns="0" tIns="0" bIns="0">
+            <a:spAutoFit/>
+          </a:bodyPr>
+          <a:lstStyle/>
+          <a:p>
+            <a:pPr marL="0" indent="0">
               <a:lnSpc>
                 <a:spcPct val="105000"/>
               </a:lnSpc>
               <a:spcBef>
-                <a:spcPts val="1200"/>
+                <a:spcPts val="0"/>
               </a:spcBef>
+              <a:spcAft>
+                <a:spcPts val="1000"/>
+              </a:spcAft>
             </a:pPr>
             <a:r>
-              <a:rPr sz="1900" b="0" i="0">
-                <a:solidFill>
-                  <a:srgbClr val="E8E8E8"/>
-                </a:solidFill>
-                <a:latin typeface="Roboto Light"/>
-              </a:rPr>
-              <a:t>AT3 is documented, refined and signed off — the deployed improvement is accepted against the approved design.</a:t>
-            </a:r>
-          </a:p>
-          <a:p>
-            <a:pPr>
+              <a:rPr sz="2400" b="1" i="0">
+                <a:solidFill>
+                  <a:srgbClr val="EDAB0C"/>
+                </a:solidFill>
+                <a:latin typeface="Roboto"/>
+              </a:rPr>
+              <a:t>■  </a:t>
+            </a:r>
+            <a:r>
+              <a:rPr sz="2400" b="0" i="0">
+                <a:solidFill>
+                  <a:srgbClr val="2A2929"/>
+                </a:solidFill>
+                <a:latin typeface="Roboto"/>
+              </a:rPr>
+              <a:t>Two questions: how you tested this environment and avoid regressions, and what you would monitor to know it stays healthy.</a:t>
+            </a:r>
+          </a:p>
+          <a:p>
+            <a:pPr marL="0" indent="0">
               <a:lnSpc>
                 <a:spcPct val="105000"/>
               </a:lnSpc>
               <a:spcBef>
-                <a:spcPts val="1200"/>
+                <a:spcPts val="0"/>
               </a:spcBef>
+              <a:spcAft>
+                <a:spcPts val="1000"/>
+              </a:spcAft>
             </a:pPr>
             <a:r>
-              <a:rPr sz="1900" b="0" i="0">
-                <a:solidFill>
-                  <a:srgbClr val="E8E8E8"/>
-                </a:solidFill>
-                <a:latin typeface="Roboto Light"/>
-              </a:rPr>
-              <a:t>You analysed the baseline (AT1), designed and got the design approved (AT1), led the build (AT2), deployed and tested it (AT3), and closed it with the final sign-off.</a:t>
+              <a:rPr sz="2400" b="1" i="0">
+                <a:solidFill>
+                  <a:srgbClr val="EDAB0C"/>
+                </a:solidFill>
+                <a:latin typeface="Roboto"/>
+              </a:rPr>
+              <a:t>■  </a:t>
+            </a:r>
+            <a:r>
+              <a:rPr sz="2400" b="0" i="0">
+                <a:solidFill>
+                  <a:srgbClr val="2A2929"/>
+                </a:solidFill>
+                <a:latin typeface="Roboto"/>
+              </a:rPr>
+              <a:t>Both are answered from your own work — the four demonstrations you ran, the metrics you watched, the refinements you re-measured.</a:t>
+            </a:r>
+          </a:p>
+          <a:p>
+            <a:pPr marL="0" indent="0">
+              <a:lnSpc>
+                <a:spcPct val="105000"/>
+              </a:lnSpc>
+              <a:spcBef>
+                <a:spcPts val="0"/>
+              </a:spcBef>
+              <a:spcAft>
+                <a:spcPts val="1000"/>
+              </a:spcAft>
+            </a:pPr>
+            <a:r>
+              <a:rPr sz="2400" b="1" i="0">
+                <a:solidFill>
+                  <a:srgbClr val="EDAB0C"/>
+                </a:solidFill>
+                <a:latin typeface="Roboto"/>
+              </a:rPr>
+              <a:t>■  </a:t>
+            </a:r>
+            <a:r>
+              <a:rPr sz="2400" b="0" i="0">
+                <a:solidFill>
+                  <a:srgbClr val="2A2929"/>
+                </a:solidFill>
+                <a:latin typeface="Roboto"/>
+              </a:rPr>
+              <a:t>A definition with none of your build in it answers nothing.</a:t>
+            </a:r>
+          </a:p>
+        </p:txBody>
+      </p:sp>
+      <p:sp>
+        <p:nvSpPr>
+          <p:cNvPr id="5" name="Rectangle 4"/>
+          <p:cNvSpPr/>
+          <p:nvPr/>
+        </p:nvSpPr>
+        <p:spPr>
+          <a:xfrm>
+            <a:off x="0" y="6565392"/>
+            <a:ext cx="12191695" cy="38100"/>
+          </a:xfrm>
+          <a:prstGeom prst="rect">
+            <a:avLst/>
+          </a:prstGeom>
+          <a:solidFill>
+            <a:srgbClr val="004488"/>
+          </a:solidFill>
+          <a:ln>
+            <a:noFill/>
+          </a:ln>
+          <a:effectLst/>
+        </p:spPr>
+        <p:style>
+          <a:lnRef idx="1">
+            <a:schemeClr val="accent1"/>
+          </a:lnRef>
+          <a:fillRef idx="3">
+            <a:schemeClr val="accent1"/>
+          </a:fillRef>
+          <a:effectRef idx="2">
+            <a:schemeClr val="accent1"/>
+          </a:effectRef>
+          <a:fontRef idx="minor">
+            <a:schemeClr val="lt1"/>
+          </a:fontRef>
+        </p:style>
+        <p:txBody>
+          <a:bodyPr rtlCol="0" anchor="ctr"/>
+          <a:lstStyle/>
+          <a:p>
+            <a:pPr algn="ctr"/>
+          </a:p>
+        </p:txBody>
+      </p:sp>
+      <p:sp>
+        <p:nvSpPr>
+          <p:cNvPr id="6" name="TextBox 5"/>
+          <p:cNvSpPr txBox="1"/>
+          <p:nvPr/>
+        </p:nvSpPr>
+        <p:spPr>
+          <a:xfrm>
+            <a:off x="502920" y="6400800"/>
+            <a:ext cx="5486400" cy="320040"/>
+          </a:xfrm>
+          <a:prstGeom prst="rect">
+            <a:avLst/>
+          </a:prstGeom>
+          <a:noFill/>
+        </p:spPr>
+        <p:txBody>
+          <a:bodyPr wrap="square" anchor="t" lIns="0" rIns="0" tIns="0" bIns="0">
+            <a:spAutoFit/>
+          </a:bodyPr>
+          <a:lstStyle/>
+          <a:p>
+            <a:r>
+              <a:rPr sz="1100" b="1" i="0">
+                <a:solidFill>
+                  <a:srgbClr val="2A2929"/>
+                </a:solidFill>
+                <a:latin typeface="Roboto"/>
+              </a:rPr>
+              <a:t>Kangan </a:t>
+            </a:r>
+            <a:r>
+              <a:rPr sz="1100" b="1" i="0">
+                <a:solidFill>
+                  <a:srgbClr val="D68E10"/>
+                </a:solidFill>
+                <a:latin typeface="Roboto"/>
+              </a:rPr>
+              <a:t>Institute</a:t>
+            </a:r>
+          </a:p>
+        </p:txBody>
+      </p:sp>
+      <p:sp>
+        <p:nvSpPr>
+          <p:cNvPr id="7" name="TextBox 6"/>
+          <p:cNvSpPr txBox="1"/>
+          <p:nvPr/>
+        </p:nvSpPr>
+        <p:spPr>
+          <a:xfrm>
+            <a:off x="10515600" y="6400800"/>
+            <a:ext cx="1188720" cy="320040"/>
+          </a:xfrm>
+          <a:prstGeom prst="rect">
+            <a:avLst/>
+          </a:prstGeom>
+          <a:noFill/>
+        </p:spPr>
+        <p:txBody>
+          <a:bodyPr wrap="square" anchor="t" lIns="0" rIns="0" tIns="0" bIns="0">
+            <a:spAutoFit/>
+          </a:bodyPr>
+          <a:lstStyle/>
+          <a:p>
+            <a:pPr algn="r"/>
+            <a:r>
+              <a:rPr sz="1100" b="0" i="0">
+                <a:solidFill>
+                  <a:srgbClr val="7A7A7A"/>
+                </a:solidFill>
+                <a:latin typeface="Roboto"/>
+              </a:rPr>
+              <a:t>13</a:t>
+            </a:r>
+          </a:p>
+        </p:txBody>
+      </p:sp>
+    </p:spTree>
+  </p:cSld>
+  <p:clrMapOvr>
+    <a:masterClrMapping/>
+  </p:clrMapOvr>
+</p:sld>
+</file>
+
+<file path=ppt/slides/slide19.xml><?xml version="1.0" encoding="utf-8"?>
+<p:sld xmlns:a="http://schemas.openxmlformats.org/drawingml/2006/main" xmlns:p="http://schemas.openxmlformats.org/presentationml/2006/main" xmlns:r="http://schemas.openxmlformats.org/officeDocument/2006/relationships">
+  <p:cSld>
+    <p:bg>
+      <p:bgPr>
+        <a:solidFill>
+          <a:srgbClr val="FFFFFF"/>
+        </a:solidFill>
+        <a:effectLst/>
+      </p:bgPr>
+    </p:bg>
+    <p:spTree>
+      <p:nvGrpSpPr>
+        <p:cNvPr id="1" name=""/>
+        <p:cNvGrpSpPr/>
+        <p:nvPr/>
+      </p:nvGrpSpPr>
+      <p:grpSpPr/>
+      <p:sp>
+        <p:nvSpPr>
+          <p:cNvPr id="2" name="Rectangle 1"/>
+          <p:cNvSpPr/>
+          <p:nvPr/>
+        </p:nvSpPr>
+        <p:spPr>
+          <a:xfrm>
+            <a:off x="0" y="0"/>
+            <a:ext cx="12191695" cy="1234440"/>
+          </a:xfrm>
+          <a:prstGeom prst="rect">
+            <a:avLst/>
+          </a:prstGeom>
+          <a:solidFill>
+            <a:srgbClr val="004488"/>
+          </a:solidFill>
+          <a:ln>
+            <a:noFill/>
+          </a:ln>
+          <a:effectLst/>
+        </p:spPr>
+        <p:style>
+          <a:lnRef idx="1">
+            <a:schemeClr val="accent1"/>
+          </a:lnRef>
+          <a:fillRef idx="3">
+            <a:schemeClr val="accent1"/>
+          </a:fillRef>
+          <a:effectRef idx="2">
+            <a:schemeClr val="accent1"/>
+          </a:effectRef>
+          <a:fontRef idx="minor">
+            <a:schemeClr val="lt1"/>
+          </a:fontRef>
+        </p:style>
+        <p:txBody>
+          <a:bodyPr rtlCol="0" anchor="ctr"/>
+          <a:lstStyle/>
+          <a:p>
+            <a:pPr algn="ctr"/>
+          </a:p>
+        </p:txBody>
+      </p:sp>
+      <p:sp>
+        <p:nvSpPr>
+          <p:cNvPr id="3" name="Rounded Rectangle 2"/>
+          <p:cNvSpPr/>
+          <p:nvPr/>
+        </p:nvSpPr>
+        <p:spPr>
+          <a:xfrm>
+            <a:off x="640080" y="384048"/>
+            <a:ext cx="1691640" cy="457200"/>
+          </a:xfrm>
+          <a:prstGeom prst="roundRect">
+            <a:avLst/>
+          </a:prstGeom>
+          <a:solidFill>
+            <a:srgbClr val="2A2929"/>
+          </a:solidFill>
+          <a:ln>
+            <a:noFill/>
+          </a:ln>
+          <a:effectLst/>
+        </p:spPr>
+        <p:style>
+          <a:lnRef idx="1">
+            <a:schemeClr val="accent1"/>
+          </a:lnRef>
+          <a:fillRef idx="3">
+            <a:schemeClr val="accent1"/>
+          </a:fillRef>
+          <a:effectRef idx="2">
+            <a:schemeClr val="accent1"/>
+          </a:effectRef>
+          <a:fontRef idx="minor">
+            <a:schemeClr val="lt1"/>
+          </a:fontRef>
+        </p:style>
+        <p:txBody>
+          <a:bodyPr rtlCol="0" anchor="ctr"/>
+          <a:lstStyle/>
+          <a:p>
+            <a:pPr algn="ctr"/>
+            <a:r>
+              <a:rPr sz="1400" b="1" i="0">
+                <a:solidFill>
+                  <a:srgbClr val="FBB900"/>
+                </a:solidFill>
+                <a:latin typeface="Roboto"/>
+              </a:rPr>
+              <a:t>ACTIVITY</a:t>
+            </a:r>
+          </a:p>
+        </p:txBody>
+      </p:sp>
+      <p:sp>
+        <p:nvSpPr>
+          <p:cNvPr id="4" name="TextBox 3"/>
+          <p:cNvSpPr txBox="1"/>
+          <p:nvPr/>
+        </p:nvSpPr>
+        <p:spPr>
+          <a:xfrm>
+            <a:off x="2560320" y="310896"/>
+            <a:ext cx="8961120" cy="685800"/>
+          </a:xfrm>
+          <a:prstGeom prst="rect">
+            <a:avLst/>
+          </a:prstGeom>
+          <a:noFill/>
+        </p:spPr>
+        <p:txBody>
+          <a:bodyPr wrap="square" anchor="ctr" lIns="0" rIns="0" tIns="0" bIns="0">
+            <a:spAutoFit/>
+          </a:bodyPr>
+          <a:lstStyle/>
+          <a:p>
+            <a:r>
+              <a:rPr sz="2600" b="1" i="0">
+                <a:solidFill>
+                  <a:srgbClr val="FFFFFF"/>
+                </a:solidFill>
+                <a:latin typeface="Roboto"/>
+              </a:rPr>
+              <a:t>Answer the questions</a:t>
+            </a:r>
+          </a:p>
+        </p:txBody>
+      </p:sp>
+      <p:sp>
+        <p:nvSpPr>
+          <p:cNvPr id="5" name="TextBox 4"/>
+          <p:cNvSpPr txBox="1"/>
+          <p:nvPr/>
+        </p:nvSpPr>
+        <p:spPr>
+          <a:xfrm>
+            <a:off x="658368" y="1554480"/>
+            <a:ext cx="10881360" cy="4297680"/>
+          </a:xfrm>
+          <a:prstGeom prst="rect">
+            <a:avLst/>
+          </a:prstGeom>
+          <a:noFill/>
+        </p:spPr>
+        <p:txBody>
+          <a:bodyPr wrap="square" anchor="t" lIns="0" rIns="0" tIns="0" bIns="0">
+            <a:spAutoFit/>
+          </a:bodyPr>
+          <a:lstStyle/>
+          <a:p>
+            <a:pPr marL="0" indent="0">
+              <a:lnSpc>
+                <a:spcPct val="105000"/>
+              </a:lnSpc>
+              <a:spcBef>
+                <a:spcPts val="0"/>
+              </a:spcBef>
+              <a:spcAft>
+                <a:spcPts val="1000"/>
+              </a:spcAft>
+            </a:pPr>
+            <a:r>
+              <a:rPr sz="1700" b="1" i="0">
+                <a:solidFill>
+                  <a:srgbClr val="EDAB0C"/>
+                </a:solidFill>
+                <a:latin typeface="Roboto"/>
+              </a:rPr>
+              <a:t>■  </a:t>
+            </a:r>
+            <a:r>
+              <a:rPr sz="1700" b="0" i="0">
+                <a:solidFill>
+                  <a:srgbClr val="2A2929"/>
+                </a:solidFill>
+                <a:latin typeface="Roboto"/>
+              </a:rPr>
+              <a:t>The assessment's questions Q1 and Q2, rehearsed from your practice build.</a:t>
+            </a:r>
+          </a:p>
+          <a:p>
+            <a:pPr marL="0" indent="0">
+              <a:lnSpc>
+                <a:spcPct val="105000"/>
+              </a:lnSpc>
+              <a:spcBef>
+                <a:spcPts val="0"/>
+              </a:spcBef>
+              <a:spcAft>
+                <a:spcPts val="1000"/>
+              </a:spcAft>
+            </a:pPr>
+            <a:r>
+              <a:rPr sz="1700" b="1" i="0">
+                <a:solidFill>
+                  <a:srgbClr val="EDAB0C"/>
+                </a:solidFill>
+                <a:latin typeface="Roboto"/>
+              </a:rPr>
+              <a:t>■  </a:t>
+            </a:r>
+            <a:r>
+              <a:rPr sz="1700" b="0" i="0">
+                <a:solidFill>
+                  <a:srgbClr val="2A2929"/>
+                </a:solidFill>
+                <a:latin typeface="Roboto"/>
+              </a:rPr>
+              <a:t>Answer from what you actually did: the testing and the monitoring, cited from your own records.</a:t>
+            </a:r>
+          </a:p>
+        </p:txBody>
+      </p:sp>
+      <p:sp>
+        <p:nvSpPr>
+          <p:cNvPr id="6" name="Rounded Rectangle 5"/>
+          <p:cNvSpPr/>
+          <p:nvPr/>
+        </p:nvSpPr>
+        <p:spPr>
+          <a:xfrm>
+            <a:off x="640080" y="5897880"/>
+            <a:ext cx="4023360" cy="457200"/>
+          </a:xfrm>
+          <a:prstGeom prst="roundRect">
+            <a:avLst/>
+          </a:prstGeom>
+          <a:solidFill>
+            <a:srgbClr val="F9F9F9"/>
+          </a:solidFill>
+          <a:ln w="12700">
+            <a:solidFill>
+              <a:srgbClr val="CCCCCC"/>
+            </a:solidFill>
+          </a:ln>
+          <a:effectLst/>
+        </p:spPr>
+        <p:style>
+          <a:lnRef idx="1">
+            <a:schemeClr val="accent1"/>
+          </a:lnRef>
+          <a:fillRef idx="3">
+            <a:schemeClr val="accent1"/>
+          </a:fillRef>
+          <a:effectRef idx="2">
+            <a:schemeClr val="accent1"/>
+          </a:effectRef>
+          <a:fontRef idx="minor">
+            <a:schemeClr val="lt1"/>
+          </a:fontRef>
+        </p:style>
+        <p:txBody>
+          <a:bodyPr rtlCol="0" anchor="ctr"/>
+          <a:lstStyle/>
+          <a:p>
+            <a:pPr algn="ctr"/>
+          </a:p>
+        </p:txBody>
+      </p:sp>
+      <p:sp>
+        <p:nvSpPr>
+          <p:cNvPr id="7" name="TextBox 6"/>
+          <p:cNvSpPr txBox="1"/>
+          <p:nvPr/>
+        </p:nvSpPr>
+        <p:spPr>
+          <a:xfrm>
+            <a:off x="822960" y="5943600"/>
+            <a:ext cx="3657600" cy="365760"/>
+          </a:xfrm>
+          <a:prstGeom prst="rect">
+            <a:avLst/>
+          </a:prstGeom>
+          <a:noFill/>
+        </p:spPr>
+        <p:txBody>
+          <a:bodyPr wrap="square" anchor="ctr" lIns="0" rIns="0" tIns="0" bIns="0">
+            <a:spAutoFit/>
+          </a:bodyPr>
+          <a:lstStyle/>
+          <a:p>
+            <a:r>
+              <a:rPr sz="1500" b="1" i="0">
+                <a:solidFill>
+                  <a:srgbClr val="2A2929"/>
+                </a:solidFill>
+                <a:latin typeface="Roboto"/>
+              </a:rPr>
+              <a:t>⏱  ~20 min</a:t>
+            </a:r>
+          </a:p>
+        </p:txBody>
+      </p:sp>
+      <p:sp>
+        <p:nvSpPr>
+          <p:cNvPr id="8" name="Rectangle 7"/>
+          <p:cNvSpPr/>
+          <p:nvPr/>
+        </p:nvSpPr>
+        <p:spPr>
+          <a:xfrm>
+            <a:off x="0" y="6565392"/>
+            <a:ext cx="12191695" cy="38100"/>
+          </a:xfrm>
+          <a:prstGeom prst="rect">
+            <a:avLst/>
+          </a:prstGeom>
+          <a:solidFill>
+            <a:srgbClr val="004488"/>
+          </a:solidFill>
+          <a:ln>
+            <a:noFill/>
+          </a:ln>
+          <a:effectLst/>
+        </p:spPr>
+        <p:style>
+          <a:lnRef idx="1">
+            <a:schemeClr val="accent1"/>
+          </a:lnRef>
+          <a:fillRef idx="3">
+            <a:schemeClr val="accent1"/>
+          </a:fillRef>
+          <a:effectRef idx="2">
+            <a:schemeClr val="accent1"/>
+          </a:effectRef>
+          <a:fontRef idx="minor">
+            <a:schemeClr val="lt1"/>
+          </a:fontRef>
+        </p:style>
+        <p:txBody>
+          <a:bodyPr rtlCol="0" anchor="ctr"/>
+          <a:lstStyle/>
+          <a:p>
+            <a:pPr algn="ctr"/>
+          </a:p>
+        </p:txBody>
+      </p:sp>
+      <p:sp>
+        <p:nvSpPr>
+          <p:cNvPr id="9" name="TextBox 8"/>
+          <p:cNvSpPr txBox="1"/>
+          <p:nvPr/>
+        </p:nvSpPr>
+        <p:spPr>
+          <a:xfrm>
+            <a:off x="502920" y="6400800"/>
+            <a:ext cx="5486400" cy="320040"/>
+          </a:xfrm>
+          <a:prstGeom prst="rect">
+            <a:avLst/>
+          </a:prstGeom>
+          <a:noFill/>
+        </p:spPr>
+        <p:txBody>
+          <a:bodyPr wrap="square" anchor="t" lIns="0" rIns="0" tIns="0" bIns="0">
+            <a:spAutoFit/>
+          </a:bodyPr>
+          <a:lstStyle/>
+          <a:p>
+            <a:r>
+              <a:rPr sz="1100" b="1" i="0">
+                <a:solidFill>
+                  <a:srgbClr val="2A2929"/>
+                </a:solidFill>
+                <a:latin typeface="Roboto"/>
+              </a:rPr>
+              <a:t>Kangan </a:t>
+            </a:r>
+            <a:r>
+              <a:rPr sz="1100" b="1" i="0">
+                <a:solidFill>
+                  <a:srgbClr val="D68E10"/>
+                </a:solidFill>
+                <a:latin typeface="Roboto"/>
+              </a:rPr>
+              <a:t>Institute</a:t>
+            </a:r>
+          </a:p>
+        </p:txBody>
+      </p:sp>
+      <p:sp>
+        <p:nvSpPr>
+          <p:cNvPr id="10" name="TextBox 9"/>
+          <p:cNvSpPr txBox="1"/>
+          <p:nvPr/>
+        </p:nvSpPr>
+        <p:spPr>
+          <a:xfrm>
+            <a:off x="10515600" y="6400800"/>
+            <a:ext cx="1188720" cy="320040"/>
+          </a:xfrm>
+          <a:prstGeom prst="rect">
+            <a:avLst/>
+          </a:prstGeom>
+          <a:noFill/>
+        </p:spPr>
+        <p:txBody>
+          <a:bodyPr wrap="square" anchor="t" lIns="0" rIns="0" tIns="0" bIns="0">
+            <a:spAutoFit/>
+          </a:bodyPr>
+          <a:lstStyle/>
+          <a:p>
+            <a:pPr algn="r"/>
+            <a:r>
+              <a:rPr sz="1100" b="0" i="0">
+                <a:solidFill>
+                  <a:srgbClr val="7A7A7A"/>
+                </a:solidFill>
+                <a:latin typeface="Roboto"/>
+              </a:rPr>
+              <a:t>14</a:t>
             </a:r>
           </a:p>
         </p:txBody>
@@ -7144,7 +8555,7 @@
                 </a:solidFill>
                 <a:latin typeface="Roboto"/>
               </a:rPr>
-              <a:t>Closing AT3 — document, refine, sign off</a:t>
+              <a:t>Closing the cluster</a:t>
             </a:r>
           </a:p>
         </p:txBody>
@@ -7242,7 +8653,7 @@
                 </a:solidFill>
                 <a:latin typeface="Roboto"/>
               </a:rPr>
-              <a:t>Topic 7 deployed, monitored and tested the improvement; Topic 8 writes it up and closes the cluster.</a:t>
+              <a:t>Deployed, proven, refined — now it gets written up, handed over, signed off, and taken down.</a:t>
             </a:r>
           </a:p>
           <a:p>
@@ -7273,7 +8684,7 @@
                 </a:solidFill>
                 <a:latin typeface="Roboto"/>
               </a:rPr>
-              <a:t>Three moves: document the as-deployed system against the approved design, describe the long-term improvement strategy, and obtain the final sign-off.</a:t>
+              <a:t>The material is what you captured live during the deploy and tests; a closeout can't be reconstructed from memory.</a:t>
             </a:r>
           </a:p>
           <a:p>
@@ -7304,45 +8715,14 @@
                 </a:solidFill>
                 <a:latin typeface="Roboto"/>
               </a:rPr>
-              <a:t>The deliverable is the Deployment Report — the whole system across all four concerns: security, reliability, scalability, cost.</a:t>
-            </a:r>
-          </a:p>
-          <a:p>
-            <a:pPr marL="0" indent="0">
-              <a:lnSpc>
-                <a:spcPct val="105000"/>
-              </a:lnSpc>
-              <a:spcBef>
-                <a:spcPts val="0"/>
-              </a:spcBef>
-              <a:spcAft>
-                <a:spcPts val="1000"/>
-              </a:spcAft>
-            </a:pPr>
-            <a:r>
-              <a:rPr sz="1700" b="1" i="0">
-                <a:solidFill>
-                  <a:srgbClr val="EDAB0C"/>
-                </a:solidFill>
-                <a:latin typeface="Roboto"/>
-              </a:rPr>
-              <a:t>■  </a:t>
-            </a:r>
-            <a:r>
-              <a:rPr sz="1700" b="0" i="0">
-                <a:solidFill>
-                  <a:srgbClr val="2A2929"/>
-                </a:solidFill>
-                <a:latin typeface="Roboto"/>
-              </a:rPr>
-              <a:t>No new build — the report is assembled from what you captured live during the Topic 7 deploy and test.</a:t>
+              <a:t>Four tasks and two questions, and the cluster is done.</a:t>
             </a:r>
           </a:p>
         </p:txBody>
       </p:sp>
       <p:pic>
         <p:nvPicPr>
-          <p:cNvPr id="5" name="Picture 4" descr="gen-73246ac1.png"/>
+          <p:cNvPr id="5" name="Picture 4" descr="gen-094757c3.png"/>
           <p:cNvPicPr>
             <a:picLocks noChangeAspect="1"/>
           </p:cNvPicPr>
@@ -7482,6 +8862,777 @@
                 <a:latin typeface="Roboto"/>
               </a:rPr>
               <a:t>1</a:t>
+            </a:r>
+          </a:p>
+        </p:txBody>
+      </p:sp>
+    </p:spTree>
+  </p:cSld>
+  <p:clrMapOvr>
+    <a:masterClrMapping/>
+  </p:clrMapOvr>
+</p:sld>
+</file>
+
+<file path=ppt/slides/slide20.xml><?xml version="1.0" encoding="utf-8"?>
+<p:sld xmlns:a="http://schemas.openxmlformats.org/drawingml/2006/main" xmlns:p="http://schemas.openxmlformats.org/presentationml/2006/main" xmlns:r="http://schemas.openxmlformats.org/officeDocument/2006/relationships">
+  <p:cSld>
+    <p:bg>
+      <p:bgPr>
+        <a:solidFill>
+          <a:srgbClr val="F9F9F9"/>
+        </a:solidFill>
+        <a:effectLst/>
+      </p:bgPr>
+    </p:bg>
+    <p:spTree>
+      <p:nvGrpSpPr>
+        <p:cNvPr id="1" name=""/>
+        <p:cNvGrpSpPr/>
+        <p:nvPr/>
+      </p:nvGrpSpPr>
+      <p:grpSpPr/>
+      <p:sp>
+        <p:nvSpPr>
+          <p:cNvPr id="2" name="TextBox 1"/>
+          <p:cNvSpPr txBox="1"/>
+          <p:nvPr/>
+        </p:nvSpPr>
+        <p:spPr>
+          <a:xfrm>
+            <a:off x="640080" y="548640"/>
+            <a:ext cx="10881360" cy="1097280"/>
+          </a:xfrm>
+          <a:prstGeom prst="rect">
+            <a:avLst/>
+          </a:prstGeom>
+          <a:noFill/>
+        </p:spPr>
+        <p:txBody>
+          <a:bodyPr wrap="square" anchor="t" lIns="0" rIns="0" tIns="0" bIns="0">
+            <a:spAutoFit/>
+          </a:bodyPr>
+          <a:lstStyle/>
+          <a:p>
+            <a:r>
+              <a:rPr sz="3200" b="1" i="0">
+                <a:solidFill>
+                  <a:srgbClr val="2A2929"/>
+                </a:solidFill>
+                <a:latin typeface="Roboto"/>
+              </a:rPr>
+              <a:t>Key takeaways</a:t>
+            </a:r>
+          </a:p>
+          <a:p>
+            <a:pPr>
+              <a:spcBef>
+                <a:spcPts val="200"/>
+              </a:spcBef>
+            </a:pPr>
+            <a:r>
+              <a:rPr sz="1800" b="1" i="0">
+                <a:solidFill>
+                  <a:srgbClr val="004488"/>
+                </a:solidFill>
+                <a:latin typeface="Roboto"/>
+              </a:rPr>
+              <a:t>Topic 8 · Key takeaways</a:t>
+            </a:r>
+          </a:p>
+        </p:txBody>
+      </p:sp>
+      <p:sp>
+        <p:nvSpPr>
+          <p:cNvPr id="3" name="Rectangle 2"/>
+          <p:cNvSpPr/>
+          <p:nvPr/>
+        </p:nvSpPr>
+        <p:spPr>
+          <a:xfrm>
+            <a:off x="658368" y="1600200"/>
+            <a:ext cx="1463040" cy="50800"/>
+          </a:xfrm>
+          <a:prstGeom prst="rect">
+            <a:avLst/>
+          </a:prstGeom>
+          <a:solidFill>
+            <a:srgbClr val="004488"/>
+          </a:solidFill>
+          <a:ln>
+            <a:noFill/>
+          </a:ln>
+          <a:effectLst/>
+        </p:spPr>
+        <p:style>
+          <a:lnRef idx="1">
+            <a:schemeClr val="accent1"/>
+          </a:lnRef>
+          <a:fillRef idx="3">
+            <a:schemeClr val="accent1"/>
+          </a:fillRef>
+          <a:effectRef idx="2">
+            <a:schemeClr val="accent1"/>
+          </a:effectRef>
+          <a:fontRef idx="minor">
+            <a:schemeClr val="lt1"/>
+          </a:fontRef>
+        </p:style>
+        <p:txBody>
+          <a:bodyPr rtlCol="0" anchor="ctr"/>
+          <a:lstStyle/>
+          <a:p>
+            <a:pPr algn="ctr"/>
+          </a:p>
+        </p:txBody>
+      </p:sp>
+      <p:sp>
+        <p:nvSpPr>
+          <p:cNvPr id="4" name="Rectangle 3"/>
+          <p:cNvSpPr/>
+          <p:nvPr/>
+        </p:nvSpPr>
+        <p:spPr>
+          <a:xfrm>
+            <a:off x="640080" y="1965960"/>
+            <a:ext cx="10927080" cy="841248"/>
+          </a:xfrm>
+          <a:prstGeom prst="rect">
+            <a:avLst/>
+          </a:prstGeom>
+          <a:solidFill>
+            <a:srgbClr val="FFFFFF"/>
+          </a:solidFill>
+          <a:ln w="12700">
+            <a:solidFill>
+              <a:srgbClr val="CCCCCC"/>
+            </a:solidFill>
+          </a:ln>
+          <a:effectLst/>
+        </p:spPr>
+        <p:style>
+          <a:lnRef idx="1">
+            <a:schemeClr val="accent1"/>
+          </a:lnRef>
+          <a:fillRef idx="3">
+            <a:schemeClr val="accent1"/>
+          </a:fillRef>
+          <a:effectRef idx="2">
+            <a:schemeClr val="accent1"/>
+          </a:effectRef>
+          <a:fontRef idx="minor">
+            <a:schemeClr val="lt1"/>
+          </a:fontRef>
+        </p:style>
+        <p:txBody>
+          <a:bodyPr rtlCol="0" anchor="ctr"/>
+          <a:lstStyle/>
+          <a:p>
+            <a:pPr algn="ctr"/>
+          </a:p>
+        </p:txBody>
+      </p:sp>
+      <p:sp>
+        <p:nvSpPr>
+          <p:cNvPr id="5" name="Rectangle 4"/>
+          <p:cNvSpPr/>
+          <p:nvPr/>
+        </p:nvSpPr>
+        <p:spPr>
+          <a:xfrm>
+            <a:off x="640080" y="1965960"/>
+            <a:ext cx="109728" cy="841248"/>
+          </a:xfrm>
+          <a:prstGeom prst="rect">
+            <a:avLst/>
+          </a:prstGeom>
+          <a:solidFill>
+            <a:srgbClr val="004488"/>
+          </a:solidFill>
+          <a:ln>
+            <a:noFill/>
+          </a:ln>
+          <a:effectLst/>
+        </p:spPr>
+        <p:style>
+          <a:lnRef idx="1">
+            <a:schemeClr val="accent1"/>
+          </a:lnRef>
+          <a:fillRef idx="3">
+            <a:schemeClr val="accent1"/>
+          </a:fillRef>
+          <a:effectRef idx="2">
+            <a:schemeClr val="accent1"/>
+          </a:effectRef>
+          <a:fontRef idx="minor">
+            <a:schemeClr val="lt1"/>
+          </a:fontRef>
+        </p:style>
+        <p:txBody>
+          <a:bodyPr rtlCol="0" anchor="ctr"/>
+          <a:lstStyle/>
+          <a:p>
+            <a:pPr algn="ctr"/>
+          </a:p>
+        </p:txBody>
+      </p:sp>
+      <p:sp>
+        <p:nvSpPr>
+          <p:cNvPr id="6" name="TextBox 5"/>
+          <p:cNvSpPr txBox="1"/>
+          <p:nvPr/>
+        </p:nvSpPr>
+        <p:spPr>
+          <a:xfrm>
+            <a:off x="960120" y="1965960"/>
+            <a:ext cx="10424160" cy="841248"/>
+          </a:xfrm>
+          <a:prstGeom prst="rect">
+            <a:avLst/>
+          </a:prstGeom>
+          <a:noFill/>
+        </p:spPr>
+        <p:txBody>
+          <a:bodyPr wrap="square" anchor="ctr" lIns="0" rIns="0" tIns="0" bIns="0">
+            <a:spAutoFit/>
+          </a:bodyPr>
+          <a:lstStyle/>
+          <a:p>
+            <a:pPr>
+              <a:lnSpc>
+                <a:spcPct val="100000"/>
+              </a:lnSpc>
+            </a:pPr>
+            <a:r>
+              <a:rPr sz="1700" b="0" i="0">
+                <a:solidFill>
+                  <a:srgbClr val="2A2929"/>
+                </a:solidFill>
+                <a:latin typeface="Roboto"/>
+              </a:rPr>
+              <a:t>The record shows what runs, what changed, and how to repeat it.</a:t>
+            </a:r>
+          </a:p>
+        </p:txBody>
+      </p:sp>
+      <p:sp>
+        <p:nvSpPr>
+          <p:cNvPr id="7" name="Rectangle 6"/>
+          <p:cNvSpPr/>
+          <p:nvPr/>
+        </p:nvSpPr>
+        <p:spPr>
+          <a:xfrm>
+            <a:off x="640080" y="2916936"/>
+            <a:ext cx="10927080" cy="841248"/>
+          </a:xfrm>
+          <a:prstGeom prst="rect">
+            <a:avLst/>
+          </a:prstGeom>
+          <a:solidFill>
+            <a:srgbClr val="FFFFFF"/>
+          </a:solidFill>
+          <a:ln w="12700">
+            <a:solidFill>
+              <a:srgbClr val="CCCCCC"/>
+            </a:solidFill>
+          </a:ln>
+          <a:effectLst/>
+        </p:spPr>
+        <p:style>
+          <a:lnRef idx="1">
+            <a:schemeClr val="accent1"/>
+          </a:lnRef>
+          <a:fillRef idx="3">
+            <a:schemeClr val="accent1"/>
+          </a:fillRef>
+          <a:effectRef idx="2">
+            <a:schemeClr val="accent1"/>
+          </a:effectRef>
+          <a:fontRef idx="minor">
+            <a:schemeClr val="lt1"/>
+          </a:fontRef>
+        </p:style>
+        <p:txBody>
+          <a:bodyPr rtlCol="0" anchor="ctr"/>
+          <a:lstStyle/>
+          <a:p>
+            <a:pPr algn="ctr"/>
+          </a:p>
+        </p:txBody>
+      </p:sp>
+      <p:sp>
+        <p:nvSpPr>
+          <p:cNvPr id="8" name="Rectangle 7"/>
+          <p:cNvSpPr/>
+          <p:nvPr/>
+        </p:nvSpPr>
+        <p:spPr>
+          <a:xfrm>
+            <a:off x="640080" y="2916936"/>
+            <a:ext cx="109728" cy="841248"/>
+          </a:xfrm>
+          <a:prstGeom prst="rect">
+            <a:avLst/>
+          </a:prstGeom>
+          <a:solidFill>
+            <a:srgbClr val="004488"/>
+          </a:solidFill>
+          <a:ln>
+            <a:noFill/>
+          </a:ln>
+          <a:effectLst/>
+        </p:spPr>
+        <p:style>
+          <a:lnRef idx="1">
+            <a:schemeClr val="accent1"/>
+          </a:lnRef>
+          <a:fillRef idx="3">
+            <a:schemeClr val="accent1"/>
+          </a:fillRef>
+          <a:effectRef idx="2">
+            <a:schemeClr val="accent1"/>
+          </a:effectRef>
+          <a:fontRef idx="minor">
+            <a:schemeClr val="lt1"/>
+          </a:fontRef>
+        </p:style>
+        <p:txBody>
+          <a:bodyPr rtlCol="0" anchor="ctr"/>
+          <a:lstStyle/>
+          <a:p>
+            <a:pPr algn="ctr"/>
+          </a:p>
+        </p:txBody>
+      </p:sp>
+      <p:sp>
+        <p:nvSpPr>
+          <p:cNvPr id="9" name="TextBox 8"/>
+          <p:cNvSpPr txBox="1"/>
+          <p:nvPr/>
+        </p:nvSpPr>
+        <p:spPr>
+          <a:xfrm>
+            <a:off x="960120" y="2916936"/>
+            <a:ext cx="10424160" cy="841248"/>
+          </a:xfrm>
+          <a:prstGeom prst="rect">
+            <a:avLst/>
+          </a:prstGeom>
+          <a:noFill/>
+        </p:spPr>
+        <p:txBody>
+          <a:bodyPr wrap="square" anchor="ctr" lIns="0" rIns="0" tIns="0" bIns="0">
+            <a:spAutoFit/>
+          </a:bodyPr>
+          <a:lstStyle/>
+          <a:p>
+            <a:pPr>
+              <a:lnSpc>
+                <a:spcPct val="100000"/>
+              </a:lnSpc>
+            </a:pPr>
+            <a:r>
+              <a:rPr sz="1700" b="0" i="0">
+                <a:solidFill>
+                  <a:srgbClr val="2A2929"/>
+                </a:solidFill>
+                <a:latin typeface="Roboto"/>
+              </a:rPr>
+              <a:t>Strategy with benefits; sign-off recorded; environment removed.</a:t>
+            </a:r>
+          </a:p>
+        </p:txBody>
+      </p:sp>
+      <p:sp>
+        <p:nvSpPr>
+          <p:cNvPr id="10" name="Rectangle 9"/>
+          <p:cNvSpPr/>
+          <p:nvPr/>
+        </p:nvSpPr>
+        <p:spPr>
+          <a:xfrm>
+            <a:off x="640080" y="3867912"/>
+            <a:ext cx="10927080" cy="841248"/>
+          </a:xfrm>
+          <a:prstGeom prst="rect">
+            <a:avLst/>
+          </a:prstGeom>
+          <a:solidFill>
+            <a:srgbClr val="FFFFFF"/>
+          </a:solidFill>
+          <a:ln w="12700">
+            <a:solidFill>
+              <a:srgbClr val="CCCCCC"/>
+            </a:solidFill>
+          </a:ln>
+          <a:effectLst/>
+        </p:spPr>
+        <p:style>
+          <a:lnRef idx="1">
+            <a:schemeClr val="accent1"/>
+          </a:lnRef>
+          <a:fillRef idx="3">
+            <a:schemeClr val="accent1"/>
+          </a:fillRef>
+          <a:effectRef idx="2">
+            <a:schemeClr val="accent1"/>
+          </a:effectRef>
+          <a:fontRef idx="minor">
+            <a:schemeClr val="lt1"/>
+          </a:fontRef>
+        </p:style>
+        <p:txBody>
+          <a:bodyPr rtlCol="0" anchor="ctr"/>
+          <a:lstStyle/>
+          <a:p>
+            <a:pPr algn="ctr"/>
+          </a:p>
+        </p:txBody>
+      </p:sp>
+      <p:sp>
+        <p:nvSpPr>
+          <p:cNvPr id="11" name="Rectangle 10"/>
+          <p:cNvSpPr/>
+          <p:nvPr/>
+        </p:nvSpPr>
+        <p:spPr>
+          <a:xfrm>
+            <a:off x="640080" y="3867912"/>
+            <a:ext cx="109728" cy="841248"/>
+          </a:xfrm>
+          <a:prstGeom prst="rect">
+            <a:avLst/>
+          </a:prstGeom>
+          <a:solidFill>
+            <a:srgbClr val="004488"/>
+          </a:solidFill>
+          <a:ln>
+            <a:noFill/>
+          </a:ln>
+          <a:effectLst/>
+        </p:spPr>
+        <p:style>
+          <a:lnRef idx="1">
+            <a:schemeClr val="accent1"/>
+          </a:lnRef>
+          <a:fillRef idx="3">
+            <a:schemeClr val="accent1"/>
+          </a:fillRef>
+          <a:effectRef idx="2">
+            <a:schemeClr val="accent1"/>
+          </a:effectRef>
+          <a:fontRef idx="minor">
+            <a:schemeClr val="lt1"/>
+          </a:fontRef>
+        </p:style>
+        <p:txBody>
+          <a:bodyPr rtlCol="0" anchor="ctr"/>
+          <a:lstStyle/>
+          <a:p>
+            <a:pPr algn="ctr"/>
+          </a:p>
+        </p:txBody>
+      </p:sp>
+      <p:sp>
+        <p:nvSpPr>
+          <p:cNvPr id="12" name="TextBox 11"/>
+          <p:cNvSpPr txBox="1"/>
+          <p:nvPr/>
+        </p:nvSpPr>
+        <p:spPr>
+          <a:xfrm>
+            <a:off x="960120" y="3867912"/>
+            <a:ext cx="10424160" cy="841248"/>
+          </a:xfrm>
+          <a:prstGeom prst="rect">
+            <a:avLst/>
+          </a:prstGeom>
+          <a:noFill/>
+        </p:spPr>
+        <p:txBody>
+          <a:bodyPr wrap="square" anchor="ctr" lIns="0" rIns="0" tIns="0" bIns="0">
+            <a:spAutoFit/>
+          </a:bodyPr>
+          <a:lstStyle/>
+          <a:p>
+            <a:pPr>
+              <a:lnSpc>
+                <a:spcPct val="100000"/>
+              </a:lnSpc>
+            </a:pPr>
+            <a:r>
+              <a:rPr sz="1700" b="0" i="0">
+                <a:solidFill>
+                  <a:srgbClr val="2A2929"/>
+                </a:solidFill>
+                <a:latin typeface="Roboto"/>
+              </a:rPr>
+              <a:t>Written answers cite your own testing and monitoring.</a:t>
+            </a:r>
+          </a:p>
+        </p:txBody>
+      </p:sp>
+      <p:sp>
+        <p:nvSpPr>
+          <p:cNvPr id="13" name="Rectangle 12"/>
+          <p:cNvSpPr/>
+          <p:nvPr/>
+        </p:nvSpPr>
+        <p:spPr>
+          <a:xfrm>
+            <a:off x="0" y="6565392"/>
+            <a:ext cx="12191695" cy="38100"/>
+          </a:xfrm>
+          <a:prstGeom prst="rect">
+            <a:avLst/>
+          </a:prstGeom>
+          <a:solidFill>
+            <a:srgbClr val="004488"/>
+          </a:solidFill>
+          <a:ln>
+            <a:noFill/>
+          </a:ln>
+          <a:effectLst/>
+        </p:spPr>
+        <p:style>
+          <a:lnRef idx="1">
+            <a:schemeClr val="accent1"/>
+          </a:lnRef>
+          <a:fillRef idx="3">
+            <a:schemeClr val="accent1"/>
+          </a:fillRef>
+          <a:effectRef idx="2">
+            <a:schemeClr val="accent1"/>
+          </a:effectRef>
+          <a:fontRef idx="minor">
+            <a:schemeClr val="lt1"/>
+          </a:fontRef>
+        </p:style>
+        <p:txBody>
+          <a:bodyPr rtlCol="0" anchor="ctr"/>
+          <a:lstStyle/>
+          <a:p>
+            <a:pPr algn="ctr"/>
+          </a:p>
+        </p:txBody>
+      </p:sp>
+      <p:sp>
+        <p:nvSpPr>
+          <p:cNvPr id="14" name="TextBox 13"/>
+          <p:cNvSpPr txBox="1"/>
+          <p:nvPr/>
+        </p:nvSpPr>
+        <p:spPr>
+          <a:xfrm>
+            <a:off x="502920" y="6400800"/>
+            <a:ext cx="5486400" cy="320040"/>
+          </a:xfrm>
+          <a:prstGeom prst="rect">
+            <a:avLst/>
+          </a:prstGeom>
+          <a:noFill/>
+        </p:spPr>
+        <p:txBody>
+          <a:bodyPr wrap="square" anchor="t" lIns="0" rIns="0" tIns="0" bIns="0">
+            <a:spAutoFit/>
+          </a:bodyPr>
+          <a:lstStyle/>
+          <a:p>
+            <a:r>
+              <a:rPr sz="1100" b="1" i="0">
+                <a:solidFill>
+                  <a:srgbClr val="2A2929"/>
+                </a:solidFill>
+                <a:latin typeface="Roboto"/>
+              </a:rPr>
+              <a:t>Kangan </a:t>
+            </a:r>
+            <a:r>
+              <a:rPr sz="1100" b="1" i="0">
+                <a:solidFill>
+                  <a:srgbClr val="D68E10"/>
+                </a:solidFill>
+                <a:latin typeface="Roboto"/>
+              </a:rPr>
+              <a:t>Institute</a:t>
+            </a:r>
+          </a:p>
+        </p:txBody>
+      </p:sp>
+      <p:sp>
+        <p:nvSpPr>
+          <p:cNvPr id="15" name="TextBox 14"/>
+          <p:cNvSpPr txBox="1"/>
+          <p:nvPr/>
+        </p:nvSpPr>
+        <p:spPr>
+          <a:xfrm>
+            <a:off x="10515600" y="6400800"/>
+            <a:ext cx="1188720" cy="320040"/>
+          </a:xfrm>
+          <a:prstGeom prst="rect">
+            <a:avLst/>
+          </a:prstGeom>
+          <a:noFill/>
+        </p:spPr>
+        <p:txBody>
+          <a:bodyPr wrap="square" anchor="t" lIns="0" rIns="0" tIns="0" bIns="0">
+            <a:spAutoFit/>
+          </a:bodyPr>
+          <a:lstStyle/>
+          <a:p>
+            <a:pPr algn="r"/>
+            <a:r>
+              <a:rPr sz="1100" b="0" i="0">
+                <a:solidFill>
+                  <a:srgbClr val="7A7A7A"/>
+                </a:solidFill>
+                <a:latin typeface="Roboto"/>
+              </a:rPr>
+              <a:t>15</a:t>
+            </a:r>
+          </a:p>
+        </p:txBody>
+      </p:sp>
+    </p:spTree>
+  </p:cSld>
+  <p:clrMapOvr>
+    <a:masterClrMapping/>
+  </p:clrMapOvr>
+</p:sld>
+</file>
+
+<file path=ppt/slides/slide21.xml><?xml version="1.0" encoding="utf-8"?>
+<p:sld xmlns:a="http://schemas.openxmlformats.org/drawingml/2006/main" xmlns:p="http://schemas.openxmlformats.org/presentationml/2006/main" xmlns:r="http://schemas.openxmlformats.org/officeDocument/2006/relationships">
+  <p:cSld>
+    <p:bg>
+      <p:bgPr>
+        <a:solidFill>
+          <a:srgbClr val="2A2929"/>
+        </a:solidFill>
+        <a:effectLst/>
+      </p:bgPr>
+    </p:bg>
+    <p:spTree>
+      <p:nvGrpSpPr>
+        <p:cNvPr id="1" name=""/>
+        <p:cNvGrpSpPr/>
+        <p:nvPr/>
+      </p:nvGrpSpPr>
+      <p:grpSpPr/>
+      <p:sp>
+        <p:nvSpPr>
+          <p:cNvPr id="2" name="Rectangle 1"/>
+          <p:cNvSpPr/>
+          <p:nvPr/>
+        </p:nvSpPr>
+        <p:spPr>
+          <a:xfrm>
+            <a:off x="0" y="0"/>
+            <a:ext cx="411480" cy="6858000"/>
+          </a:xfrm>
+          <a:prstGeom prst="rect">
+            <a:avLst/>
+          </a:prstGeom>
+          <a:solidFill>
+            <a:srgbClr val="EDAB0C"/>
+          </a:solidFill>
+          <a:ln>
+            <a:noFill/>
+          </a:ln>
+          <a:effectLst/>
+        </p:spPr>
+        <p:style>
+          <a:lnRef idx="1">
+            <a:schemeClr val="accent1"/>
+          </a:lnRef>
+          <a:fillRef idx="3">
+            <a:schemeClr val="accent1"/>
+          </a:fillRef>
+          <a:effectRef idx="2">
+            <a:schemeClr val="accent1"/>
+          </a:effectRef>
+          <a:fontRef idx="minor">
+            <a:schemeClr val="lt1"/>
+          </a:fontRef>
+        </p:style>
+        <p:txBody>
+          <a:bodyPr rtlCol="0" anchor="ctr"/>
+          <a:lstStyle/>
+          <a:p>
+            <a:pPr algn="ctr"/>
+          </a:p>
+        </p:txBody>
+      </p:sp>
+      <p:sp>
+        <p:nvSpPr>
+          <p:cNvPr id="3" name="TextBox 2"/>
+          <p:cNvSpPr txBox="1"/>
+          <p:nvPr/>
+        </p:nvSpPr>
+        <p:spPr>
+          <a:xfrm>
+            <a:off x="914400" y="1463040"/>
+            <a:ext cx="10515600" cy="4023360"/>
+          </a:xfrm>
+          <a:prstGeom prst="rect">
+            <a:avLst/>
+          </a:prstGeom>
+          <a:noFill/>
+        </p:spPr>
+        <p:txBody>
+          <a:bodyPr wrap="square" anchor="t" lIns="0" rIns="0" tIns="0" bIns="0">
+            <a:spAutoFit/>
+          </a:bodyPr>
+          <a:lstStyle/>
+          <a:p>
+            <a:r>
+              <a:rPr sz="4000" b="1" i="0">
+                <a:solidFill>
+                  <a:srgbClr val="FFFFFF"/>
+                </a:solidFill>
+                <a:latin typeface="Roboto"/>
+              </a:rPr>
+              <a:t>The cluster is done</a:t>
+            </a:r>
+          </a:p>
+          <a:p>
+            <a:pPr>
+              <a:lnSpc>
+                <a:spcPct val="105000"/>
+              </a:lnSpc>
+              <a:spcBef>
+                <a:spcPts val="1200"/>
+              </a:spcBef>
+            </a:pPr>
+            <a:r>
+              <a:rPr sz="1900" b="0" i="0">
+                <a:solidFill>
+                  <a:srgbClr val="E8E8E8"/>
+                </a:solidFill>
+                <a:latin typeface="Roboto Light"/>
+              </a:rPr>
+              <a:t>You analysed a system, designed and justified its improvement, led the team that built it, then deployed, proved, documented and closed it — end to end.</a:t>
+            </a:r>
+          </a:p>
+          <a:p>
+            <a:pPr>
+              <a:lnSpc>
+                <a:spcPct val="105000"/>
+              </a:lnSpc>
+              <a:spcBef>
+                <a:spcPts val="1200"/>
+              </a:spcBef>
+            </a:pPr>
+            <a:r>
+              <a:rPr sz="1900" b="0" i="0">
+                <a:solidFill>
+                  <a:srgbClr val="E8E8E8"/>
+                </a:solidFill>
+                <a:latin typeface="Roboto Light"/>
+              </a:rPr>
+              <a:t>The assessment is the same work on a different system.</a:t>
             </a:r>
           </a:p>
         </p:txBody>
@@ -7635,7 +9786,7 @@
                 </a:solidFill>
                 <a:latin typeface="Roboto"/>
               </a:rPr>
-              <a:t>Document as-deployed + test results</a:t>
+              <a:t>Document the as-deployed system</a:t>
             </a:r>
           </a:p>
           <a:p>
@@ -7651,7 +9802,7 @@
                 </a:solidFill>
                 <a:latin typeface="Roboto Light"/>
               </a:rPr>
-              <a:t>record what you actually deployed, and prove it works</a:t>
+              <a:t>the system as it actually runs</a:t>
             </a:r>
           </a:p>
         </p:txBody>
@@ -7833,7 +9984,7 @@
                 </a:solidFill>
                 <a:latin typeface="Roboto"/>
               </a:rPr>
-              <a:t>The as-deployed record &amp; the Deployment Report</a:t>
+              <a:t>As-deployed, against the approved design</a:t>
             </a:r>
           </a:p>
         </p:txBody>
@@ -7931,7 +10082,7 @@
                 </a:solidFill>
                 <a:latin typeface="Roboto"/>
               </a:rPr>
-              <a:t>An as-deployed record documents the system as it was actually deployed — not the design on paper, the resources actually running.</a:t>
+              <a:t>An as-deployed record documents what is actually running — not the design on paper.</a:t>
             </a:r>
           </a:p>
           <a:p>
@@ -7962,7 +10113,7 @@
                 </a:solidFill>
                 <a:latin typeface="Roboto"/>
               </a:rPr>
-              <a:t>The Deployment Report assembles it: the as-deployed architecture, the test results, the changes from the approved design, and the deployment/testing steps.</a:t>
+              <a:t>Highlight every change from the approved design, named and justified — the DB-tier DR held at design level because the lab is create-only; the app-tier redundancy built and evidenced.</a:t>
             </a:r>
           </a:p>
           <a:p>
@@ -7993,7 +10144,7 @@
                 </a:solidFill>
                 <a:latin typeface="Roboto"/>
               </a:rPr>
-              <a:t>It is complete and readable by someone who wasn't in the room — a reviewer can follow it end to end.</a:t>
+              <a:t>Test results across all four concerns, each against the goals set at the start.</a:t>
             </a:r>
           </a:p>
         </p:txBody>
@@ -8175,7 +10326,7 @@
                 </a:solidFill>
                 <a:latin typeface="Roboto"/>
               </a:rPr>
-              <a:t>As-deployed vs the approved design — highlight the changes</a:t>
+              <a:t>Document the steps, repeatably</a:t>
             </a:r>
           </a:p>
         </p:txBody>
@@ -8273,7 +10424,7 @@
                 </a:solidFill>
                 <a:latin typeface="Roboto"/>
               </a:rPr>
-              <a:t>Document the as-deployed architecture and test results, and highlight the changes and improvements from the approved design (PC 4.1).</a:t>
+              <a:t>The deployment and testing steps, written so a reader could repeat them: the stacks and changes applied in order, each test and its outcome.</a:t>
             </a:r>
           </a:p>
           <a:p>
@@ -8304,7 +10455,7 @@
                 </a:solidFill>
                 <a:latin typeface="Roboto"/>
               </a:rPr>
-              <a:t>Every difference is named and justified — e.g. the DB-tier DR stayed at design level because the lab couldn't modify the database; the app-tier Multi-AZ was built and evidenced.</a:t>
+              <a:t>Assembled from the screenshots, exports and logs captured as you went.</a:t>
             </a:r>
           </a:p>
           <a:p>
@@ -8335,7 +10486,7 @@
                 </a:solidFill>
                 <a:latin typeface="Roboto"/>
               </a:rPr>
-              <a:t>Test results cover all four concerns — security, reliability, scalability, cost — each against the goals set in Topic 1.</a:t>
+              <a:t>Readable cold by someone who wasn't in the room.</a:t>
             </a:r>
           </a:p>
         </p:txBody>
@@ -8490,48 +10641,14 @@
       <p:grpSpPr/>
       <p:sp>
         <p:nvSpPr>
-          <p:cNvPr id="2" name="TextBox 1"/>
-          <p:cNvSpPr txBox="1"/>
-          <p:nvPr/>
-        </p:nvSpPr>
-        <p:spPr>
-          <a:xfrm>
-            <a:off x="640080" y="457200"/>
-            <a:ext cx="10881360" cy="960120"/>
-          </a:xfrm>
-          <a:prstGeom prst="rect">
-            <a:avLst/>
-          </a:prstGeom>
-          <a:noFill/>
-        </p:spPr>
-        <p:txBody>
-          <a:bodyPr wrap="square" anchor="t" lIns="0" rIns="0" tIns="0" bIns="0">
-            <a:spAutoFit/>
-          </a:bodyPr>
-          <a:lstStyle/>
-          <a:p>
-            <a:r>
-              <a:rPr sz="2800" b="1" i="0">
-                <a:solidFill>
-                  <a:srgbClr val="2A2929"/>
-                </a:solidFill>
-                <a:latin typeface="Roboto"/>
-              </a:rPr>
-              <a:t>Document the deployment &amp; testing steps</a:t>
-            </a:r>
-          </a:p>
-        </p:txBody>
-      </p:sp>
-      <p:sp>
-        <p:nvSpPr>
-          <p:cNvPr id="3" name="Rectangle 2"/>
+          <p:cNvPr id="2" name="Rectangle 1"/>
           <p:cNvSpPr/>
           <p:nvPr/>
         </p:nvSpPr>
         <p:spPr>
           <a:xfrm>
-            <a:off x="658368" y="1371600"/>
-            <a:ext cx="1463040" cy="50800"/>
+            <a:off x="0" y="0"/>
+            <a:ext cx="12191695" cy="1234440"/>
           </a:xfrm>
           <a:prstGeom prst="rect">
             <a:avLst/>
@@ -8568,14 +10685,67 @@
       </p:sp>
       <p:sp>
         <p:nvSpPr>
+          <p:cNvPr id="3" name="Rounded Rectangle 2"/>
+          <p:cNvSpPr/>
+          <p:nvPr/>
+        </p:nvSpPr>
+        <p:spPr>
+          <a:xfrm>
+            <a:off x="640080" y="384048"/>
+            <a:ext cx="1691640" cy="457200"/>
+          </a:xfrm>
+          <a:prstGeom prst="roundRect">
+            <a:avLst/>
+          </a:prstGeom>
+          <a:solidFill>
+            <a:srgbClr val="2A2929"/>
+          </a:solidFill>
+          <a:ln>
+            <a:noFill/>
+          </a:ln>
+          <a:effectLst/>
+        </p:spPr>
+        <p:style>
+          <a:lnRef idx="1">
+            <a:schemeClr val="accent1"/>
+          </a:lnRef>
+          <a:fillRef idx="3">
+            <a:schemeClr val="accent1"/>
+          </a:fillRef>
+          <a:effectRef idx="2">
+            <a:schemeClr val="accent1"/>
+          </a:effectRef>
+          <a:fontRef idx="minor">
+            <a:schemeClr val="lt1"/>
+          </a:fontRef>
+        </p:style>
+        <p:txBody>
+          <a:bodyPr rtlCol="0" anchor="ctr"/>
+          <a:lstStyle/>
+          <a:p>
+            <a:pPr algn="ctr"/>
+            <a:r>
+              <a:rPr sz="1400" b="1" i="0">
+                <a:solidFill>
+                  <a:srgbClr val="FBB900"/>
+                </a:solidFill>
+                <a:latin typeface="Roboto"/>
+              </a:rPr>
+              <a:t>ACTIVITY</a:t>
+            </a:r>
+          </a:p>
+        </p:txBody>
+      </p:sp>
+      <p:sp>
+        <p:nvSpPr>
           <p:cNvPr id="4" name="TextBox 3"/>
           <p:cNvSpPr txBox="1"/>
           <p:nvPr/>
         </p:nvSpPr>
         <p:spPr>
           <a:xfrm>
-            <a:off x="658368" y="1691640"/>
-            <a:ext cx="10881360" cy="4480560"/>
+            <a:off x="2560320" y="310896"/>
+            <a:ext cx="8961120" cy="685800"/>
           </a:xfrm>
           <a:prstGeom prst="rect">
             <a:avLst/>
@@ -8584,6 +10754,40 @@
         </p:spPr>
         <p:txBody>
           <a:bodyPr wrap="square" anchor="ctr" lIns="0" rIns="0" tIns="0" bIns="0">
+            <a:spAutoFit/>
+          </a:bodyPr>
+          <a:lstStyle/>
+          <a:p>
+            <a:r>
+              <a:rPr sz="2600" b="1" i="0">
+                <a:solidFill>
+                  <a:srgbClr val="FFFFFF"/>
+                </a:solidFill>
+                <a:latin typeface="Roboto"/>
+              </a:rPr>
+              <a:t>Write the as-deployed record</a:t>
+            </a:r>
+          </a:p>
+        </p:txBody>
+      </p:sp>
+      <p:sp>
+        <p:nvSpPr>
+          <p:cNvPr id="5" name="TextBox 4"/>
+          <p:cNvSpPr txBox="1"/>
+          <p:nvPr/>
+        </p:nvSpPr>
+        <p:spPr>
+          <a:xfrm>
+            <a:off x="658368" y="1554480"/>
+            <a:ext cx="10881360" cy="4297680"/>
+          </a:xfrm>
+          <a:prstGeom prst="rect">
+            <a:avLst/>
+          </a:prstGeom>
+          <a:noFill/>
+        </p:spPr>
+        <p:txBody>
+          <a:bodyPr wrap="square" anchor="t" lIns="0" rIns="0" tIns="0" bIns="0">
             <a:spAutoFit/>
           </a:bodyPr>
           <a:lstStyle/>
@@ -8600,7 +10804,7 @@
               </a:spcAft>
             </a:pPr>
             <a:r>
-              <a:rPr sz="2400" b="1" i="0">
+              <a:rPr sz="1700" b="1" i="0">
                 <a:solidFill>
                   <a:srgbClr val="EDAB0C"/>
                 </a:solidFill>
@@ -8609,13 +10813,13 @@
               <a:t>■  </a:t>
             </a:r>
             <a:r>
-              <a:rPr sz="2400" b="0" i="0">
+              <a:rPr sz="1700" b="0" i="0">
                 <a:solidFill>
                   <a:srgbClr val="2A2929"/>
                 </a:solidFill>
                 <a:latin typeface="Roboto"/>
               </a:rPr>
-              <a:t>Create the documentation of the deployment and testing steps (PE 5) — the step-by-step record of how the improvement was deployed and tested.</a:t>
+              <a:t>Workbook — task 10.</a:t>
             </a:r>
           </a:p>
           <a:p>
@@ -8631,7 +10835,7 @@
               </a:spcAft>
             </a:pPr>
             <a:r>
-              <a:rPr sz="2400" b="1" i="0">
+              <a:rPr sz="1700" b="1" i="0">
                 <a:solidFill>
                   <a:srgbClr val="EDAB0C"/>
                 </a:solidFill>
@@ -8640,51 +10844,100 @@
               <a:t>■  </a:t>
             </a:r>
             <a:r>
-              <a:rPr sz="2400" b="0" i="0">
+              <a:rPr sz="1700" b="0" i="0">
                 <a:solidFill>
                   <a:srgbClr val="2A2929"/>
                 </a:solidFill>
                 <a:latin typeface="Roboto"/>
               </a:rPr>
-              <a:t>Written so a reader could repeat it: the stacks/changes applied, in order, and each test run with its outcome.</a:t>
-            </a:r>
-          </a:p>
-          <a:p>
-            <a:pPr marL="0" indent="0">
-              <a:lnSpc>
-                <a:spcPct val="105000"/>
-              </a:lnSpc>
-              <a:spcBef>
-                <a:spcPts val="0"/>
-              </a:spcBef>
-              <a:spcAft>
-                <a:spcPts val="1000"/>
-              </a:spcAft>
-            </a:pPr>
-            <a:r>
-              <a:rPr sz="2400" b="1" i="0">
-                <a:solidFill>
-                  <a:srgbClr val="EDAB0C"/>
-                </a:solidFill>
-                <a:latin typeface="Roboto"/>
-              </a:rPr>
-              <a:t>■  </a:t>
-            </a:r>
-            <a:r>
-              <a:rPr sz="2400" b="0" i="0">
+              <a:t>Document the as-deployed architecture and test results, highlighting the changes from the approved design, with the deployment and testing steps.</a:t>
+            </a:r>
+          </a:p>
+        </p:txBody>
+      </p:sp>
+      <p:sp>
+        <p:nvSpPr>
+          <p:cNvPr id="6" name="Rounded Rectangle 5"/>
+          <p:cNvSpPr/>
+          <p:nvPr/>
+        </p:nvSpPr>
+        <p:spPr>
+          <a:xfrm>
+            <a:off x="640080" y="5897880"/>
+            <a:ext cx="4023360" cy="457200"/>
+          </a:xfrm>
+          <a:prstGeom prst="roundRect">
+            <a:avLst/>
+          </a:prstGeom>
+          <a:solidFill>
+            <a:srgbClr val="F9F9F9"/>
+          </a:solidFill>
+          <a:ln w="12700">
+            <a:solidFill>
+              <a:srgbClr val="CCCCCC"/>
+            </a:solidFill>
+          </a:ln>
+          <a:effectLst/>
+        </p:spPr>
+        <p:style>
+          <a:lnRef idx="1">
+            <a:schemeClr val="accent1"/>
+          </a:lnRef>
+          <a:fillRef idx="3">
+            <a:schemeClr val="accent1"/>
+          </a:fillRef>
+          <a:effectRef idx="2">
+            <a:schemeClr val="accent1"/>
+          </a:effectRef>
+          <a:fontRef idx="minor">
+            <a:schemeClr val="lt1"/>
+          </a:fontRef>
+        </p:style>
+        <p:txBody>
+          <a:bodyPr rtlCol="0" anchor="ctr"/>
+          <a:lstStyle/>
+          <a:p>
+            <a:pPr algn="ctr"/>
+          </a:p>
+        </p:txBody>
+      </p:sp>
+      <p:sp>
+        <p:nvSpPr>
+          <p:cNvPr id="7" name="TextBox 6"/>
+          <p:cNvSpPr txBox="1"/>
+          <p:nvPr/>
+        </p:nvSpPr>
+        <p:spPr>
+          <a:xfrm>
+            <a:off x="822960" y="5943600"/>
+            <a:ext cx="3657600" cy="365760"/>
+          </a:xfrm>
+          <a:prstGeom prst="rect">
+            <a:avLst/>
+          </a:prstGeom>
+          <a:noFill/>
+        </p:spPr>
+        <p:txBody>
+          <a:bodyPr wrap="square" anchor="ctr" lIns="0" rIns="0" tIns="0" bIns="0">
+            <a:spAutoFit/>
+          </a:bodyPr>
+          <a:lstStyle/>
+          <a:p>
+            <a:r>
+              <a:rPr sz="1500" b="1" i="0">
                 <a:solidFill>
                   <a:srgbClr val="2A2929"/>
                 </a:solidFill>
                 <a:latin typeface="Roboto"/>
               </a:rPr>
-              <a:t>Assembled from the screenshots, exports and logs you captured as you went in Topic 7 — you can't reconstruct it after the fact.</a:t>
-            </a:r>
-          </a:p>
-        </p:txBody>
-      </p:sp>
-      <p:sp>
-        <p:nvSpPr>
-          <p:cNvPr id="5" name="Rectangle 4"/>
+              <a:t>⏱  ~35 min</a:t>
+            </a:r>
+          </a:p>
+        </p:txBody>
+      </p:sp>
+      <p:sp>
+        <p:nvSpPr>
+          <p:cNvPr id="8" name="Rectangle 7"/>
           <p:cNvSpPr/>
           <p:nvPr/>
         </p:nvSpPr>
@@ -8728,7 +10981,7 @@
       </p:sp>
       <p:sp>
         <p:nvSpPr>
-          <p:cNvPr id="6" name="TextBox 5"/>
+          <p:cNvPr id="9" name="TextBox 8"/>
           <p:cNvSpPr txBox="1"/>
           <p:nvPr/>
         </p:nvSpPr>
@@ -8771,7 +11024,7 @@
       </p:sp>
       <p:sp>
         <p:nvSpPr>
-          <p:cNvPr id="7" name="TextBox 6"/>
+          <p:cNvPr id="10" name="TextBox 9"/>
           <p:cNvSpPr txBox="1"/>
           <p:nvPr/>
         </p:nvSpPr>
@@ -8818,7 +11071,7 @@
     <p:bg>
       <p:bgPr>
         <a:solidFill>
-          <a:srgbClr val="FFFFFF"/>
+          <a:srgbClr val="F9F9F9"/>
         </a:solidFill>
         <a:effectLst/>
       </p:bgPr>
@@ -8838,8 +11091,8 @@
         </p:nvSpPr>
         <p:spPr>
           <a:xfrm>
-            <a:off x="640080" y="457200"/>
-            <a:ext cx="10881360" cy="960120"/>
+            <a:off x="640080" y="548640"/>
+            <a:ext cx="10881360" cy="1097280"/>
           </a:xfrm>
           <a:prstGeom prst="rect">
             <a:avLst/>
@@ -8853,13 +11106,29 @@
           <a:lstStyle/>
           <a:p>
             <a:r>
-              <a:rPr sz="2800" b="1" i="0">
+              <a:rPr sz="3200" b="1" i="0">
                 <a:solidFill>
                   <a:srgbClr val="2A2929"/>
                 </a:solidFill>
                 <a:latin typeface="Roboto"/>
               </a:rPr>
-              <a:t>Deployment Report structure</a:t>
+              <a:t>Key takeaways</a:t>
+            </a:r>
+          </a:p>
+          <a:p>
+            <a:pPr>
+              <a:spcBef>
+                <a:spcPts val="200"/>
+              </a:spcBef>
+            </a:pPr>
+            <a:r>
+              <a:rPr sz="1800" b="1" i="0">
+                <a:solidFill>
+                  <a:srgbClr val="92268F"/>
+                </a:solidFill>
+                <a:latin typeface="Roboto"/>
+              </a:rPr>
+              <a:t>Section 1 · The record</a:t>
             </a:r>
           </a:p>
         </p:txBody>
@@ -8872,7 +11141,7 @@
         </p:nvSpPr>
         <p:spPr>
           <a:xfrm>
-            <a:off x="658368" y="1371600"/>
+            <a:off x="658368" y="1600200"/>
             <a:ext cx="1463040" cy="50800"/>
           </a:xfrm>
           <a:prstGeom prst="rect">
@@ -8908,398 +11177,62 @@
           </a:p>
         </p:txBody>
       </p:sp>
-      <p:graphicFrame>
-        <p:nvGraphicFramePr>
-          <p:cNvPr id="4" name="Table 3"/>
-          <p:cNvGraphicFramePr>
-            <a:graphicFrameLocks noGrp="1"/>
-          </p:cNvGraphicFramePr>
-          <p:nvPr/>
-        </p:nvGraphicFramePr>
-        <p:xfrm>
-          <a:off x="658368" y="1828800"/>
-          <a:ext cx="10881360" cy="3200400"/>
-        </p:xfrm>
-        <a:graphic>
-          <a:graphicData uri="http://schemas.openxmlformats.org/drawingml/2006/table">
-            <a:tbl>
-              <a:tblPr>
-                <a:tableStyleId>{5C22544A-7EE6-4342-B048-85BDC9FD1C3A}</a:tableStyleId>
-              </a:tblPr>
-              <a:tblGrid>
-                <a:gridCol w="5440680"/>
-                <a:gridCol w="5440680"/>
-              </a:tblGrid>
-              <a:tr h="457200">
-                <a:tc>
-                  <a:txBody>
-                    <a:bodyPr/>
-                    <a:lstStyle/>
-                    <a:p>
-                      <a:r>
-                        <a:rPr sz="1400" b="1" i="0">
-                          <a:solidFill>
-                            <a:srgbClr val="FFFFFF"/>
-                          </a:solidFill>
-                          <a:latin typeface="Roboto"/>
-                        </a:rPr>
-                        <a:t>Section</a:t>
-                      </a:r>
-                    </a:p>
-                  </a:txBody>
-                  <a:tcPr marL="76200" marR="76200">
-                    <a:solidFill>
-                      <a:srgbClr val="92268F"/>
-                    </a:solidFill>
-                  </a:tcPr>
-                </a:tc>
-                <a:tc>
-                  <a:txBody>
-                    <a:bodyPr/>
-                    <a:lstStyle/>
-                    <a:p>
-                      <a:r>
-                        <a:rPr sz="1400" b="1" i="0">
-                          <a:solidFill>
-                            <a:srgbClr val="FFFFFF"/>
-                          </a:solidFill>
-                          <a:latin typeface="Roboto"/>
-                        </a:rPr>
-                        <a:t>What it contains</a:t>
-                      </a:r>
-                    </a:p>
-                  </a:txBody>
-                  <a:tcPr marL="76200" marR="76200">
-                    <a:solidFill>
-                      <a:srgbClr val="92268F"/>
-                    </a:solidFill>
-                  </a:tcPr>
-                </a:tc>
-              </a:tr>
-              <a:tr h="457200">
-                <a:tc>
-                  <a:txBody>
-                    <a:bodyPr/>
-                    <a:lstStyle/>
-                    <a:p>
-                      <a:r>
-                        <a:rPr sz="1300" b="0" i="0">
-                          <a:solidFill>
-                            <a:srgbClr val="2A2929"/>
-                          </a:solidFill>
-                          <a:latin typeface="Roboto"/>
-                        </a:rPr>
-                        <a:t>As-deployed architecture</a:t>
-                      </a:r>
-                    </a:p>
-                  </a:txBody>
-                  <a:tcPr marL="76200" marR="76200" marT="50800" marB="50800">
-                    <a:solidFill>
-                      <a:srgbClr val="FFFFFF"/>
-                    </a:solidFill>
-                  </a:tcPr>
-                </a:tc>
-                <a:tc>
-                  <a:txBody>
-                    <a:bodyPr/>
-                    <a:lstStyle/>
-                    <a:p>
-                      <a:r>
-                        <a:rPr sz="1300" b="0" i="0">
-                          <a:solidFill>
-                            <a:srgbClr val="2A2929"/>
-                          </a:solidFill>
-                          <a:latin typeface="Roboto"/>
-                        </a:rPr>
-                        <a:t>The system as actually deployed to us-east-1 — diagrams and resource inventory across all four concerns</a:t>
-                      </a:r>
-                    </a:p>
-                  </a:txBody>
-                  <a:tcPr marL="76200" marR="76200" marT="50800" marB="50800">
-                    <a:solidFill>
-                      <a:srgbClr val="FFFFFF"/>
-                    </a:solidFill>
-                  </a:tcPr>
-                </a:tc>
-              </a:tr>
-              <a:tr h="457200">
-                <a:tc>
-                  <a:txBody>
-                    <a:bodyPr/>
-                    <a:lstStyle/>
-                    <a:p>
-                      <a:r>
-                        <a:rPr sz="1300" b="0" i="0">
-                          <a:solidFill>
-                            <a:srgbClr val="2A2929"/>
-                          </a:solidFill>
-                          <a:latin typeface="Roboto"/>
-                        </a:rPr>
-                        <a:t>Changes from approved design</a:t>
-                      </a:r>
-                    </a:p>
-                  </a:txBody>
-                  <a:tcPr marL="76200" marR="76200" marT="50800" marB="50800">
-                    <a:solidFill>
-                      <a:srgbClr val="F9F9F9"/>
-                    </a:solidFill>
-                  </a:tcPr>
-                </a:tc>
-                <a:tc>
-                  <a:txBody>
-                    <a:bodyPr/>
-                    <a:lstStyle/>
-                    <a:p>
-                      <a:r>
-                        <a:rPr sz="1300" b="0" i="0">
-                          <a:solidFill>
-                            <a:srgbClr val="2A2929"/>
-                          </a:solidFill>
-                          <a:latin typeface="Roboto"/>
-                        </a:rPr>
-                        <a:t>Where the as-deployed differs from the approved design, and why (e.g. DB-tier DR left at design level)</a:t>
-                      </a:r>
-                    </a:p>
-                  </a:txBody>
-                  <a:tcPr marL="76200" marR="76200" marT="50800" marB="50800">
-                    <a:solidFill>
-                      <a:srgbClr val="F9F9F9"/>
-                    </a:solidFill>
-                  </a:tcPr>
-                </a:tc>
-              </a:tr>
-              <a:tr h="457200">
-                <a:tc>
-                  <a:txBody>
-                    <a:bodyPr/>
-                    <a:lstStyle/>
-                    <a:p>
-                      <a:r>
-                        <a:rPr sz="1300" b="0" i="0">
-                          <a:solidFill>
-                            <a:srgbClr val="2A2929"/>
-                          </a:solidFill>
-                          <a:latin typeface="Roboto"/>
-                        </a:rPr>
-                        <a:t>Test results</a:t>
-                      </a:r>
-                    </a:p>
-                  </a:txBody>
-                  <a:tcPr marL="76200" marR="76200" marT="50800" marB="50800">
-                    <a:solidFill>
-                      <a:srgbClr val="FFFFFF"/>
-                    </a:solidFill>
-                  </a:tcPr>
-                </a:tc>
-                <a:tc>
-                  <a:txBody>
-                    <a:bodyPr/>
-                    <a:lstStyle/>
-                    <a:p>
-                      <a:r>
-                        <a:rPr sz="1300" b="0" i="0">
-                          <a:solidFill>
-                            <a:srgbClr val="2A2929"/>
-                          </a:solidFill>
-                          <a:latin typeface="Roboto"/>
-                        </a:rPr>
-                        <a:t>The tests run against the deployment and their outcomes — security, reliability, scalability, cost</a:t>
-                      </a:r>
-                    </a:p>
-                  </a:txBody>
-                  <a:tcPr marL="76200" marR="76200" marT="50800" marB="50800">
-                    <a:solidFill>
-                      <a:srgbClr val="FFFFFF"/>
-                    </a:solidFill>
-                  </a:tcPr>
-                </a:tc>
-              </a:tr>
-              <a:tr h="457200">
-                <a:tc>
-                  <a:txBody>
-                    <a:bodyPr/>
-                    <a:lstStyle/>
-                    <a:p>
-                      <a:r>
-                        <a:rPr sz="1300" b="0" i="0">
-                          <a:solidFill>
-                            <a:srgbClr val="2A2929"/>
-                          </a:solidFill>
-                          <a:latin typeface="Roboto"/>
-                        </a:rPr>
-                        <a:t>Deployment &amp; testing steps</a:t>
-                      </a:r>
-                    </a:p>
-                  </a:txBody>
-                  <a:tcPr marL="76200" marR="76200" marT="50800" marB="50800">
-                    <a:solidFill>
-                      <a:srgbClr val="F9F9F9"/>
-                    </a:solidFill>
-                  </a:tcPr>
-                </a:tc>
-                <a:tc>
-                  <a:txBody>
-                    <a:bodyPr/>
-                    <a:lstStyle/>
-                    <a:p>
-                      <a:r>
-                        <a:rPr sz="1300" b="0" i="0">
-                          <a:solidFill>
-                            <a:srgbClr val="2A2929"/>
-                          </a:solidFill>
-                          <a:latin typeface="Roboto"/>
-                        </a:rPr>
-                        <a:t>The step-by-step record of how it was deployed and tested (PE 5) — repeatable by a reader</a:t>
-                      </a:r>
-                    </a:p>
-                  </a:txBody>
-                  <a:tcPr marL="76200" marR="76200" marT="50800" marB="50800">
-                    <a:solidFill>
-                      <a:srgbClr val="F9F9F9"/>
-                    </a:solidFill>
-                  </a:tcPr>
-                </a:tc>
-              </a:tr>
-              <a:tr h="457200">
-                <a:tc>
-                  <a:txBody>
-                    <a:bodyPr/>
-                    <a:lstStyle/>
-                    <a:p>
-                      <a:r>
-                        <a:rPr sz="1300" b="0" i="0">
-                          <a:solidFill>
-                            <a:srgbClr val="2A2929"/>
-                          </a:solidFill>
-                          <a:latin typeface="Roboto"/>
-                        </a:rPr>
-                        <a:t>Long-term improvement strategy</a:t>
-                      </a:r>
-                    </a:p>
-                  </a:txBody>
-                  <a:tcPr marL="76200" marR="76200" marT="50800" marB="50800">
-                    <a:solidFill>
-                      <a:srgbClr val="FFFFFF"/>
-                    </a:solidFill>
-                  </a:tcPr>
-                </a:tc>
-                <a:tc>
-                  <a:txBody>
-                    <a:bodyPr/>
-                    <a:lstStyle/>
-                    <a:p>
-                      <a:r>
-                        <a:rPr sz="1300" b="0" i="0">
-                          <a:solidFill>
-                            <a:srgbClr val="2A2929"/>
-                          </a:solidFill>
-                          <a:latin typeface="Roboto"/>
-                        </a:rPr>
-                        <a:t>The next-iteration improvements and their benefits (C2)</a:t>
-                      </a:r>
-                    </a:p>
-                  </a:txBody>
-                  <a:tcPr marL="76200" marR="76200" marT="50800" marB="50800">
-                    <a:solidFill>
-                      <a:srgbClr val="FFFFFF"/>
-                    </a:solidFill>
-                  </a:tcPr>
-                </a:tc>
-              </a:tr>
-              <a:tr h="457200">
-                <a:tc>
-                  <a:txBody>
-                    <a:bodyPr/>
-                    <a:lstStyle/>
-                    <a:p>
-                      <a:r>
-                        <a:rPr sz="1300" b="0" i="0">
-                          <a:solidFill>
-                            <a:srgbClr val="2A2929"/>
-                          </a:solidFill>
-                          <a:latin typeface="Roboto"/>
-                        </a:rPr>
-                        <a:t>Final sign-off record</a:t>
-                      </a:r>
-                    </a:p>
-                  </a:txBody>
-                  <a:tcPr marL="76200" marR="76200" marT="50800" marB="50800">
-                    <a:solidFill>
-                      <a:srgbClr val="F9F9F9"/>
-                    </a:solidFill>
-                  </a:tcPr>
-                </a:tc>
-                <a:tc>
-                  <a:txBody>
-                    <a:bodyPr/>
-                    <a:lstStyle/>
-                    <a:p>
-                      <a:r>
-                        <a:rPr sz="1300" b="0" i="0">
-                          <a:solidFill>
-                            <a:srgbClr val="2A2929"/>
-                          </a:solidFill>
-                          <a:latin typeface="Roboto"/>
-                        </a:rPr>
-                        <a:t>The approval accepting the deployed system — who, on what, when</a:t>
-                      </a:r>
-                    </a:p>
-                  </a:txBody>
-                  <a:tcPr marL="76200" marR="76200" marT="50800" marB="50800">
-                    <a:solidFill>
-                      <a:srgbClr val="F9F9F9"/>
-                    </a:solidFill>
-                  </a:tcPr>
-                </a:tc>
-              </a:tr>
-            </a:tbl>
-          </a:graphicData>
-        </a:graphic>
-      </p:graphicFrame>
-      <p:sp>
-        <p:nvSpPr>
-          <p:cNvPr id="5" name="TextBox 4"/>
-          <p:cNvSpPr txBox="1"/>
-          <p:nvPr/>
-        </p:nvSpPr>
-        <p:spPr>
-          <a:xfrm>
-            <a:off x="658368" y="5943600"/>
-            <a:ext cx="10881360" cy="457200"/>
-          </a:xfrm>
-          <a:prstGeom prst="rect">
-            <a:avLst/>
-          </a:prstGeom>
-          <a:noFill/>
-        </p:spPr>
-        <p:txBody>
-          <a:bodyPr wrap="square" anchor="t" lIns="0" rIns="0" tIns="0" bIns="0">
-            <a:spAutoFit/>
-          </a:bodyPr>
-          <a:lstStyle/>
-          <a:p>
-            <a:r>
-              <a:rPr sz="1500" b="0" i="1">
-                <a:solidFill>
-                  <a:srgbClr val="484848"/>
-                </a:solidFill>
-                <a:latin typeface="Roboto Light"/>
-              </a:rPr>
-              <a:t>The four concerns run across the as-deployed record and test results; the sign-off record closes the document.</a:t>
-            </a:r>
-          </a:p>
-        </p:txBody>
-      </p:sp>
-      <p:sp>
-        <p:nvSpPr>
-          <p:cNvPr id="6" name="Rectangle 5"/>
+      <p:sp>
+        <p:nvSpPr>
+          <p:cNvPr id="4" name="Rectangle 3"/>
           <p:cNvSpPr/>
           <p:nvPr/>
         </p:nvSpPr>
         <p:spPr>
           <a:xfrm>
-            <a:off x="0" y="6565392"/>
-            <a:ext cx="12191695" cy="38100"/>
+            <a:off x="640080" y="1965960"/>
+            <a:ext cx="10927080" cy="841248"/>
+          </a:xfrm>
+          <a:prstGeom prst="rect">
+            <a:avLst/>
+          </a:prstGeom>
+          <a:solidFill>
+            <a:srgbClr val="FFFFFF"/>
+          </a:solidFill>
+          <a:ln w="12700">
+            <a:solidFill>
+              <a:srgbClr val="CCCCCC"/>
+            </a:solidFill>
+          </a:ln>
+          <a:effectLst/>
+        </p:spPr>
+        <p:style>
+          <a:lnRef idx="1">
+            <a:schemeClr val="accent1"/>
+          </a:lnRef>
+          <a:fillRef idx="3">
+            <a:schemeClr val="accent1"/>
+          </a:fillRef>
+          <a:effectRef idx="2">
+            <a:schemeClr val="accent1"/>
+          </a:effectRef>
+          <a:fontRef idx="minor">
+            <a:schemeClr val="lt1"/>
+          </a:fontRef>
+        </p:style>
+        <p:txBody>
+          <a:bodyPr rtlCol="0" anchor="ctr"/>
+          <a:lstStyle/>
+          <a:p>
+            <a:pPr algn="ctr"/>
+          </a:p>
+        </p:txBody>
+      </p:sp>
+      <p:sp>
+        <p:nvSpPr>
+          <p:cNvPr id="5" name="Rectangle 4"/>
+          <p:cNvSpPr/>
+          <p:nvPr/>
+        </p:nvSpPr>
+        <p:spPr>
+          <a:xfrm>
+            <a:off x="640080" y="1965960"/>
+            <a:ext cx="109728" cy="841248"/>
           </a:xfrm>
           <a:prstGeom prst="rect">
             <a:avLst/>
@@ -9336,7 +11269,219 @@
       </p:sp>
       <p:sp>
         <p:nvSpPr>
-          <p:cNvPr id="7" name="TextBox 6"/>
+          <p:cNvPr id="6" name="TextBox 5"/>
+          <p:cNvSpPr txBox="1"/>
+          <p:nvPr/>
+        </p:nvSpPr>
+        <p:spPr>
+          <a:xfrm>
+            <a:off x="960120" y="1965960"/>
+            <a:ext cx="10424160" cy="841248"/>
+          </a:xfrm>
+          <a:prstGeom prst="rect">
+            <a:avLst/>
+          </a:prstGeom>
+          <a:noFill/>
+        </p:spPr>
+        <p:txBody>
+          <a:bodyPr wrap="square" anchor="ctr" lIns="0" rIns="0" tIns="0" bIns="0">
+            <a:spAutoFit/>
+          </a:bodyPr>
+          <a:lstStyle/>
+          <a:p>
+            <a:pPr>
+              <a:lnSpc>
+                <a:spcPct val="100000"/>
+              </a:lnSpc>
+            </a:pPr>
+            <a:r>
+              <a:rPr sz="1700" b="0" i="0">
+                <a:solidFill>
+                  <a:srgbClr val="2A2929"/>
+                </a:solidFill>
+                <a:latin typeface="Roboto"/>
+              </a:rPr>
+              <a:t>What actually runs, differences named and justified.</a:t>
+            </a:r>
+          </a:p>
+        </p:txBody>
+      </p:sp>
+      <p:sp>
+        <p:nvSpPr>
+          <p:cNvPr id="7" name="Rectangle 6"/>
+          <p:cNvSpPr/>
+          <p:nvPr/>
+        </p:nvSpPr>
+        <p:spPr>
+          <a:xfrm>
+            <a:off x="640080" y="2916936"/>
+            <a:ext cx="10927080" cy="841248"/>
+          </a:xfrm>
+          <a:prstGeom prst="rect">
+            <a:avLst/>
+          </a:prstGeom>
+          <a:solidFill>
+            <a:srgbClr val="FFFFFF"/>
+          </a:solidFill>
+          <a:ln w="12700">
+            <a:solidFill>
+              <a:srgbClr val="CCCCCC"/>
+            </a:solidFill>
+          </a:ln>
+          <a:effectLst/>
+        </p:spPr>
+        <p:style>
+          <a:lnRef idx="1">
+            <a:schemeClr val="accent1"/>
+          </a:lnRef>
+          <a:fillRef idx="3">
+            <a:schemeClr val="accent1"/>
+          </a:fillRef>
+          <a:effectRef idx="2">
+            <a:schemeClr val="accent1"/>
+          </a:effectRef>
+          <a:fontRef idx="minor">
+            <a:schemeClr val="lt1"/>
+          </a:fontRef>
+        </p:style>
+        <p:txBody>
+          <a:bodyPr rtlCol="0" anchor="ctr"/>
+          <a:lstStyle/>
+          <a:p>
+            <a:pPr algn="ctr"/>
+          </a:p>
+        </p:txBody>
+      </p:sp>
+      <p:sp>
+        <p:nvSpPr>
+          <p:cNvPr id="8" name="Rectangle 7"/>
+          <p:cNvSpPr/>
+          <p:nvPr/>
+        </p:nvSpPr>
+        <p:spPr>
+          <a:xfrm>
+            <a:off x="640080" y="2916936"/>
+            <a:ext cx="109728" cy="841248"/>
+          </a:xfrm>
+          <a:prstGeom prst="rect">
+            <a:avLst/>
+          </a:prstGeom>
+          <a:solidFill>
+            <a:srgbClr val="92268F"/>
+          </a:solidFill>
+          <a:ln>
+            <a:noFill/>
+          </a:ln>
+          <a:effectLst/>
+        </p:spPr>
+        <p:style>
+          <a:lnRef idx="1">
+            <a:schemeClr val="accent1"/>
+          </a:lnRef>
+          <a:fillRef idx="3">
+            <a:schemeClr val="accent1"/>
+          </a:fillRef>
+          <a:effectRef idx="2">
+            <a:schemeClr val="accent1"/>
+          </a:effectRef>
+          <a:fontRef idx="minor">
+            <a:schemeClr val="lt1"/>
+          </a:fontRef>
+        </p:style>
+        <p:txBody>
+          <a:bodyPr rtlCol="0" anchor="ctr"/>
+          <a:lstStyle/>
+          <a:p>
+            <a:pPr algn="ctr"/>
+          </a:p>
+        </p:txBody>
+      </p:sp>
+      <p:sp>
+        <p:nvSpPr>
+          <p:cNvPr id="9" name="TextBox 8"/>
+          <p:cNvSpPr txBox="1"/>
+          <p:nvPr/>
+        </p:nvSpPr>
+        <p:spPr>
+          <a:xfrm>
+            <a:off x="960120" y="2916936"/>
+            <a:ext cx="10424160" cy="841248"/>
+          </a:xfrm>
+          <a:prstGeom prst="rect">
+            <a:avLst/>
+          </a:prstGeom>
+          <a:noFill/>
+        </p:spPr>
+        <p:txBody>
+          <a:bodyPr wrap="square" anchor="ctr" lIns="0" rIns="0" tIns="0" bIns="0">
+            <a:spAutoFit/>
+          </a:bodyPr>
+          <a:lstStyle/>
+          <a:p>
+            <a:pPr>
+              <a:lnSpc>
+                <a:spcPct val="100000"/>
+              </a:lnSpc>
+            </a:pPr>
+            <a:r>
+              <a:rPr sz="1700" b="0" i="0">
+                <a:solidFill>
+                  <a:srgbClr val="2A2929"/>
+                </a:solidFill>
+                <a:latin typeface="Roboto"/>
+              </a:rPr>
+              <a:t>Steps a stranger could repeat, from live-captured evidence.</a:t>
+            </a:r>
+          </a:p>
+        </p:txBody>
+      </p:sp>
+      <p:sp>
+        <p:nvSpPr>
+          <p:cNvPr id="10" name="Rectangle 9"/>
+          <p:cNvSpPr/>
+          <p:nvPr/>
+        </p:nvSpPr>
+        <p:spPr>
+          <a:xfrm>
+            <a:off x="0" y="6565392"/>
+            <a:ext cx="12191695" cy="38100"/>
+          </a:xfrm>
+          <a:prstGeom prst="rect">
+            <a:avLst/>
+          </a:prstGeom>
+          <a:solidFill>
+            <a:srgbClr val="92268F"/>
+          </a:solidFill>
+          <a:ln>
+            <a:noFill/>
+          </a:ln>
+          <a:effectLst/>
+        </p:spPr>
+        <p:style>
+          <a:lnRef idx="1">
+            <a:schemeClr val="accent1"/>
+          </a:lnRef>
+          <a:fillRef idx="3">
+            <a:schemeClr val="accent1"/>
+          </a:fillRef>
+          <a:effectRef idx="2">
+            <a:schemeClr val="accent1"/>
+          </a:effectRef>
+          <a:fontRef idx="minor">
+            <a:schemeClr val="lt1"/>
+          </a:fontRef>
+        </p:style>
+        <p:txBody>
+          <a:bodyPr rtlCol="0" anchor="ctr"/>
+          <a:lstStyle/>
+          <a:p>
+            <a:pPr algn="ctr"/>
+          </a:p>
+        </p:txBody>
+      </p:sp>
+      <p:sp>
+        <p:nvSpPr>
+          <p:cNvPr id="11" name="TextBox 10"/>
           <p:cNvSpPr txBox="1"/>
           <p:nvPr/>
         </p:nvSpPr>
@@ -9379,7 +11524,7 @@
       </p:sp>
       <p:sp>
         <p:nvSpPr>
-          <p:cNvPr id="8" name="TextBox 7"/>
+          <p:cNvPr id="12" name="TextBox 11"/>
           <p:cNvSpPr txBox="1"/>
           <p:nvPr/>
         </p:nvSpPr>
@@ -9561,7 +11706,7 @@
                 </a:solidFill>
                 <a:latin typeface="Roboto"/>
               </a:rPr>
-              <a:t>Long-term improvement strategies</a:t>
+              <a:t>The long-term strategy</a:t>
             </a:r>
           </a:p>
           <a:p>
@@ -9577,7 +11722,7 @@
                 </a:solidFill>
                 <a:latin typeface="Roboto Light"/>
               </a:rPr>
-              <a:t>what the next iteration would improve, and why</a:t>
+              <a:t>what the next iteration buys</a:t>
             </a:r>
           </a:p>
         </p:txBody>
@@ -9857,7 +12002,7 @@
                 </a:solidFill>
                 <a:latin typeface="Roboto"/>
               </a:rPr>
-              <a:t>Describe long-term improvement strategies and their benefits as applied to the deployed resources (PC 4.2) — what a next iteration would improve and the benefit it buys.</a:t>
+              <a:t>What a next iteration would improve, and the benefit each item buys — tied to benefits, not a wish-list.</a:t>
             </a:r>
           </a:p>
           <a:p>
@@ -9888,7 +12033,7 @@
                 </a:solidFill>
                 <a:latin typeface="Roboto"/>
               </a:rPr>
-              <a:t>This is where the DB-tier DR lives: built at design level here, it is the headline long-term strategy — cross-Region database resilience and the availability benefit it delivers.</a:t>
+              <a:t>The headline lives here: the database-tier DR designed but not lab-buildable — cross-region resilience and the availability it delivers.</a:t>
             </a:r>
           </a:p>
           <a:p>
@@ -9919,7 +12064,7 @@
                 </a:solidFill>
                 <a:latin typeface="Roboto"/>
               </a:rPr>
-              <a:t>Include other future improvements across the four concerns — tighter cost controls, further scalability headroom, security hardening — each tied to a benefit, not a wish-list.</a:t>
+              <a:t>Ideas the tests surfaced that sat outside your approved scope belong here too — that's what the scope boundary was for.</a:t>
             </a:r>
           </a:p>
         </p:txBody>
